--- a/pizza-ontology/架构设计.pptx
+++ b/pizza-ontology/架构设计.pptx
@@ -7013,39 +7013,6 @@
       </p:grpSp>
       <p:sp>
         <p:nvSpPr>
-          <p:cNvPr id="52" name="AutoShape 29"/>
-          <p:cNvSpPr/>
-          <p:nvPr/>
-        </p:nvSpPr>
-        <p:spPr>
-          <a:xfrm>
-            <a:off x="5948680" y="2052955"/>
-            <a:ext cx="5757545" cy="3589655"/>
-          </a:xfrm>
-          <a:prstGeom prst="roundRect">
-            <a:avLst>
-              <a:gd name="adj" fmla="val 1468"/>
-            </a:avLst>
-          </a:prstGeom>
-          <a:solidFill>
-            <a:srgbClr val="FFFFFF">
-              <a:alpha val="100000"/>
-            </a:srgbClr>
-          </a:solidFill>
-          <a:ln w="9525">
-            <a:solidFill>
-              <a:srgbClr val="ECECEC">
-                <a:alpha val="100000"/>
-              </a:srgbClr>
-            </a:solidFill>
-            <a:prstDash val="solid"/>
-            <a:headEnd type="none"/>
-            <a:tailEnd type="none"/>
-          </a:ln>
-        </p:spPr>
-      </p:sp>
-      <p:sp>
-        <p:nvSpPr>
           <p:cNvPr id="54" name="文本框 53"/>
           <p:cNvSpPr txBox="1"/>
           <p:nvPr/>
@@ -7169,126 +7136,139 @@
           </a:p>
         </p:txBody>
       </p:sp>
-      <p:pic>
-        <p:nvPicPr>
-          <p:cNvPr id="62" name="图片 61"/>
-          <p:cNvPicPr>
-            <a:picLocks noChangeAspect="1"/>
-          </p:cNvPicPr>
+      <p:grpSp>
+        <p:nvGrpSpPr>
+          <p:cNvPr id="5" name="组合 4"/>
+          <p:cNvGrpSpPr/>
           <p:nvPr/>
-        </p:nvPicPr>
-        <p:blipFill>
-          <a:blip r:embed="rId22"/>
-          <a:stretch>
-            <a:fillRect/>
-          </a:stretch>
-        </p:blipFill>
-        <p:spPr>
+        </p:nvGrpSpPr>
+        <p:grpSpPr>
           <a:xfrm>
-            <a:off x="5809615" y="1845310"/>
-            <a:ext cx="5463540" cy="4015740"/>
+            <a:off x="5882005" y="1917700"/>
+            <a:ext cx="5523230" cy="4212590"/>
+            <a:chOff x="9263" y="3020"/>
+            <a:chExt cx="8698" cy="6634"/>
           </a:xfrm>
-          <a:prstGeom prst="rect">
-            <a:avLst/>
-          </a:prstGeom>
-        </p:spPr>
-      </p:pic>
-      <p:pic>
-        <p:nvPicPr>
-          <p:cNvPr id="64" name="图片 63"/>
-          <p:cNvPicPr>
-            <a:picLocks noChangeAspect="1"/>
-          </p:cNvPicPr>
-          <p:nvPr/>
-        </p:nvPicPr>
-        <p:blipFill>
-          <a:blip r:embed="rId23"/>
-          <a:stretch>
-            <a:fillRect/>
-          </a:stretch>
-        </p:blipFill>
-        <p:spPr>
-          <a:xfrm>
-            <a:off x="5888990" y="1989455"/>
-            <a:ext cx="1403985" cy="650875"/>
-          </a:xfrm>
-          <a:prstGeom prst="rect">
-            <a:avLst/>
-          </a:prstGeom>
-        </p:spPr>
-      </p:pic>
-      <p:pic>
-        <p:nvPicPr>
-          <p:cNvPr id="65" name="图片 64"/>
-          <p:cNvPicPr>
-            <a:picLocks noChangeAspect="1"/>
-          </p:cNvPicPr>
-          <p:nvPr/>
-        </p:nvPicPr>
-        <p:blipFill>
-          <a:blip r:embed="rId24"/>
-          <a:stretch>
-            <a:fillRect/>
-          </a:stretch>
-        </p:blipFill>
-        <p:spPr>
-          <a:xfrm>
-            <a:off x="6025515" y="2975610"/>
-            <a:ext cx="1361440" cy="623570"/>
-          </a:xfrm>
-          <a:prstGeom prst="rect">
-            <a:avLst/>
-          </a:prstGeom>
-        </p:spPr>
-      </p:pic>
-      <p:pic>
-        <p:nvPicPr>
-          <p:cNvPr id="66" name="图片 65"/>
-          <p:cNvPicPr>
-            <a:picLocks noChangeAspect="1"/>
-          </p:cNvPicPr>
-          <p:nvPr/>
-        </p:nvPicPr>
-        <p:blipFill>
-          <a:blip r:embed="rId25"/>
-          <a:stretch>
-            <a:fillRect/>
-          </a:stretch>
-        </p:blipFill>
-        <p:spPr>
-          <a:xfrm>
-            <a:off x="5888990" y="4221480"/>
-            <a:ext cx="1405255" cy="598170"/>
-          </a:xfrm>
-          <a:prstGeom prst="rect">
-            <a:avLst/>
-          </a:prstGeom>
-        </p:spPr>
-      </p:pic>
-      <p:pic>
-        <p:nvPicPr>
-          <p:cNvPr id="67" name="图片 66"/>
-          <p:cNvPicPr>
-            <a:picLocks noChangeAspect="1"/>
-          </p:cNvPicPr>
-          <p:nvPr/>
-        </p:nvPicPr>
-        <p:blipFill>
-          <a:blip r:embed="rId26"/>
-          <a:stretch>
-            <a:fillRect/>
-          </a:stretch>
-        </p:blipFill>
-        <p:spPr>
-          <a:xfrm>
-            <a:off x="6169660" y="5272405"/>
-            <a:ext cx="1144905" cy="622300"/>
-          </a:xfrm>
-          <a:prstGeom prst="rect">
-            <a:avLst/>
-          </a:prstGeom>
-        </p:spPr>
-      </p:pic>
+        </p:grpSpPr>
+        <p:pic>
+          <p:nvPicPr>
+            <p:cNvPr id="4" name="图片 3"/>
+            <p:cNvPicPr/>
+            <p:nvPr/>
+          </p:nvPicPr>
+          <p:blipFill>
+            <a:blip r:embed="rId22"/>
+            <a:stretch>
+              <a:fillRect/>
+            </a:stretch>
+          </p:blipFill>
+          <p:spPr>
+            <a:xfrm>
+              <a:off x="9263" y="3020"/>
+              <a:ext cx="8698" cy="6634"/>
+            </a:xfrm>
+            <a:prstGeom prst="rect">
+              <a:avLst/>
+            </a:prstGeom>
+          </p:spPr>
+        </p:pic>
+        <p:pic>
+          <p:nvPicPr>
+            <p:cNvPr id="64" name="图片 63"/>
+            <p:cNvPicPr>
+              <a:picLocks noChangeAspect="1"/>
+            </p:cNvPicPr>
+            <p:nvPr/>
+          </p:nvPicPr>
+          <p:blipFill>
+            <a:blip r:embed="rId23"/>
+            <a:stretch>
+              <a:fillRect/>
+            </a:stretch>
+          </p:blipFill>
+          <p:spPr>
+            <a:xfrm>
+              <a:off x="9387" y="3359"/>
+              <a:ext cx="2211" cy="1025"/>
+            </a:xfrm>
+            <a:prstGeom prst="rect">
+              <a:avLst/>
+            </a:prstGeom>
+          </p:spPr>
+        </p:pic>
+        <p:pic>
+          <p:nvPicPr>
+            <p:cNvPr id="65" name="图片 64"/>
+            <p:cNvPicPr>
+              <a:picLocks noChangeAspect="1"/>
+            </p:cNvPicPr>
+            <p:nvPr/>
+          </p:nvPicPr>
+          <p:blipFill>
+            <a:blip r:embed="rId24"/>
+            <a:stretch>
+              <a:fillRect/>
+            </a:stretch>
+          </p:blipFill>
+          <p:spPr>
+            <a:xfrm>
+              <a:off x="9715" y="4799"/>
+              <a:ext cx="2144" cy="982"/>
+            </a:xfrm>
+            <a:prstGeom prst="rect">
+              <a:avLst/>
+            </a:prstGeom>
+          </p:spPr>
+        </p:pic>
+        <p:pic>
+          <p:nvPicPr>
+            <p:cNvPr id="66" name="图片 65"/>
+            <p:cNvPicPr>
+              <a:picLocks noChangeAspect="1"/>
+            </p:cNvPicPr>
+            <p:nvPr/>
+          </p:nvPicPr>
+          <p:blipFill>
+            <a:blip r:embed="rId25"/>
+            <a:stretch>
+              <a:fillRect/>
+            </a:stretch>
+          </p:blipFill>
+          <p:spPr>
+            <a:xfrm>
+              <a:off x="9500" y="6648"/>
+              <a:ext cx="2213" cy="942"/>
+            </a:xfrm>
+            <a:prstGeom prst="rect">
+              <a:avLst/>
+            </a:prstGeom>
+          </p:spPr>
+        </p:pic>
+        <p:pic>
+          <p:nvPicPr>
+            <p:cNvPr id="67" name="图片 66"/>
+            <p:cNvPicPr>
+              <a:picLocks noChangeAspect="1"/>
+            </p:cNvPicPr>
+            <p:nvPr/>
+          </p:nvPicPr>
+          <p:blipFill>
+            <a:blip r:embed="rId26"/>
+            <a:stretch>
+              <a:fillRect/>
+            </a:stretch>
+          </p:blipFill>
+          <p:spPr>
+            <a:xfrm>
+              <a:off x="9942" y="8303"/>
+              <a:ext cx="1803" cy="980"/>
+            </a:xfrm>
+            <a:prstGeom prst="rect">
+              <a:avLst/>
+            </a:prstGeom>
+          </p:spPr>
+        </p:pic>
+      </p:grpSp>
     </p:spTree>
   </p:cSld>
   <p:clrMapOvr>

--- a/pizza-ontology/架构设计.pptx
+++ b/pizza-ontology/架构设计.pptx
@@ -10,7 +10,7 @@
     <p:notesMasterId r:id="rId6"/>
   </p:notesMasterIdLst>
   <p:handoutMasterIdLst>
-    <p:handoutMasterId r:id="rId14"/>
+    <p:handoutMasterId r:id="rId15"/>
   </p:handoutMasterIdLst>
   <p:sldIdLst>
     <p:sldId id="278" r:id="rId5"/>
@@ -18,9 +18,10 @@
     <p:sldId id="620" r:id="rId8"/>
     <p:sldId id="619" r:id="rId9"/>
     <p:sldId id="615" r:id="rId10"/>
-    <p:sldId id="616" r:id="rId11"/>
+    <p:sldId id="624" r:id="rId11"/>
     <p:sldId id="621" r:id="rId12"/>
     <p:sldId id="622" r:id="rId13"/>
+    <p:sldId id="616" r:id="rId14"/>
   </p:sldIdLst>
   <p:sldSz cx="12195175" cy="6859270"/>
   <p:notesSz cx="6858000" cy="9144000"/>
@@ -133,9 +134,10 @@
             <p14:sldId id="620"/>
             <p14:sldId id="619"/>
             <p14:sldId id="615"/>
-            <p14:sldId id="616"/>
+            <p14:sldId id="624"/>
             <p14:sldId id="621"/>
             <p14:sldId id="622"/>
+            <p14:sldId id="616"/>
           </p14:sldIdLst>
         </p14:section>
       </p14:sectionLst>
@@ -152,22 +154,22 @@
             <a:srgbClr val="A4A3A4"/>
           </p15:clr>
         </p15:guide>
-        <p15:guide id="3" orient="horz" pos="3976" userDrawn="1">
+        <p15:guide id="3" orient="horz" pos="4020" userDrawn="1">
           <p15:clr>
             <a:srgbClr val="A4A3A4"/>
           </p15:clr>
         </p15:guide>
-        <p15:guide id="4" orient="horz" pos="892" userDrawn="1">
+        <p15:guide id="4" orient="horz" pos="905" userDrawn="1">
           <p15:clr>
             <a:srgbClr val="A4A3A4"/>
           </p15:clr>
         </p15:guide>
-        <p15:guide id="5" pos="383" userDrawn="1">
+        <p15:guide id="5" pos="384" userDrawn="1">
           <p15:clr>
             <a:srgbClr val="A4A3A4"/>
           </p15:clr>
         </p15:guide>
-        <p15:guide id="6" pos="7374" userDrawn="1">
+        <p15:guide id="6" pos="7414" userDrawn="1">
           <p15:clr>
             <a:srgbClr val="A4A3A4"/>
           </p15:clr>
@@ -13368,35 +13370,6 @@
       <p:grpSpPr/>
       <p:sp>
         <p:nvSpPr>
-          <p:cNvPr id="4" name="AutoShape 10"/>
-          <p:cNvSpPr/>
-          <p:nvPr/>
-        </p:nvSpPr>
-        <p:spPr>
-          <a:xfrm>
-            <a:off x="619125" y="1064895"/>
-            <a:ext cx="11207750" cy="742950"/>
-          </a:xfrm>
-          <a:prstGeom prst="rect">
-            <a:avLst/>
-          </a:prstGeom>
-          <a:blipFill rotWithShape="1">
-            <a:blip r:embed="rId1">
-              <a:alphaModFix amt="100000"/>
-              <a:alphaModFix amt="100000"/>
-            </a:blip>
-            <a:stretch>
-              <a:fillRect/>
-            </a:stretch>
-          </a:blipFill>
-          <a:ln>
-            <a:headEnd type="none"/>
-            <a:tailEnd type="none"/>
-          </a:ln>
-        </p:spPr>
-      </p:sp>
-      <p:sp>
-        <p:nvSpPr>
           <p:cNvPr id="2" name="标题 1"/>
           <p:cNvSpPr>
             <a:spLocks noGrp="1"/>
@@ -13405,10 +13378,15 @@
             <p:ph type="title"/>
           </p:nvPr>
         </p:nvSpPr>
-        <p:spPr/>
+        <p:spPr>
+          <a:xfrm>
+            <a:off x="335280" y="0"/>
+            <a:ext cx="11667490" cy="871855"/>
+          </a:xfrm>
+        </p:spPr>
         <p:txBody>
           <a:bodyPr>
-            <a:normAutofit/>
+            <a:normAutofit fontScale="90000"/>
           </a:bodyPr>
           <a:p>
             <a:pPr algn="l">
@@ -13417,22 +13395,38 @@
               <a:buFontTx/>
             </a:pPr>
             <a:r>
-              <a:rPr lang="zh-CN" altLang="en-US"/>
-              <a:t>三种使用场景与精度梯度</a:t>
-            </a:r>
-            <a:r>
-              <a:rPr lang="zh-CN" altLang="en-US" sz="2000"/>
-              <a:t>（</a:t>
-            </a:r>
-            <a:r>
-              <a:rPr kumimoji="1" lang="en-US" altLang="zh-CN" sz="2000">
+              <a:rPr kumimoji="1" lang="zh-CN" altLang="en-US">
                 <a:latin typeface="微软雅黑" panose="020B0503020204020204" pitchFamily="34" charset="-122"/>
                 <a:ea typeface="微软雅黑" panose="020B0503020204020204" pitchFamily="34" charset="-122"/>
                 <a:sym typeface="+mn-ea"/>
               </a:rPr>
-              <a:t>Precision Gradient &amp; Application Scenarios）</a:t>
+              <a:t>智能体+本体双引擎协同架构</a:t>
             </a:r>
-            <a:endParaRPr kumimoji="1" lang="en-US" altLang="zh-CN" sz="2000">
+            <a:r>
+              <a:rPr kumimoji="1" lang="zh-CN" altLang="en-US" sz="2200">
+                <a:latin typeface="微软雅黑" panose="020B0503020204020204" pitchFamily="34" charset="-122"/>
+                <a:ea typeface="微软雅黑" panose="020B0503020204020204" pitchFamily="34" charset="-122"/>
+                <a:sym typeface="+mn-ea"/>
+              </a:rPr>
+              <a:t>（</a:t>
+            </a:r>
+            <a:r>
+              <a:rPr kumimoji="1" lang="en-US" altLang="zh-CN" sz="2200">
+                <a:latin typeface="微软雅黑" panose="020B0503020204020204" pitchFamily="34" charset="-122"/>
+                <a:ea typeface="微软雅黑" panose="020B0503020204020204" pitchFamily="34" charset="-122"/>
+                <a:sym typeface="+mn-ea"/>
+              </a:rPr>
+              <a:t>Agent-Ontology Dual-Engine Synergistic Architecture</a:t>
+            </a:r>
+            <a:r>
+              <a:rPr kumimoji="1" sz="2200">
+                <a:latin typeface="微软雅黑" panose="020B0503020204020204" pitchFamily="34" charset="-122"/>
+                <a:ea typeface="微软雅黑" panose="020B0503020204020204" pitchFamily="34" charset="-122"/>
+                <a:sym typeface="+mn-ea"/>
+              </a:rPr>
+              <a:t>）</a:t>
+            </a:r>
+            <a:endParaRPr kumimoji="1" sz="2200">
               <a:latin typeface="微软雅黑" panose="020B0503020204020204" pitchFamily="34" charset="-122"/>
               <a:ea typeface="微软雅黑" panose="020B0503020204020204" pitchFamily="34" charset="-122"/>
               <a:sym typeface="+mn-ea"/>
@@ -13442,113 +13436,41 @@
       </p:sp>
       <p:grpSp>
         <p:nvGrpSpPr>
-          <p:cNvPr id="3" name="组合 2"/>
+          <p:cNvPr id="56" name="组合 55"/>
           <p:cNvGrpSpPr/>
-          <p:nvPr>
-            <p:custDataLst>
-              <p:tags r:id="rId2"/>
-            </p:custDataLst>
-          </p:nvPr>
+          <p:nvPr/>
         </p:nvGrpSpPr>
         <p:grpSpPr>
           <a:xfrm>
-            <a:off x="608809" y="1163372"/>
-            <a:ext cx="11263904" cy="5061578"/>
-            <a:chOff x="960" y="2941"/>
-            <a:chExt cx="17275" cy="7439"/>
+            <a:off x="404495" y="837565"/>
+            <a:ext cx="11395710" cy="742950"/>
+            <a:chOff x="713" y="1319"/>
+            <a:chExt cx="17650" cy="1170"/>
           </a:xfrm>
         </p:grpSpPr>
         <p:sp>
           <p:nvSpPr>
-            <p:cNvPr id="14" name="AutoShape 14"/>
+            <p:cNvPr id="4" name="AutoShape 10"/>
             <p:cNvSpPr/>
-            <p:nvPr>
-              <p:custDataLst>
-                <p:tags r:id="rId3"/>
-              </p:custDataLst>
-            </p:nvPr>
+            <p:nvPr/>
           </p:nvSpPr>
           <p:spPr>
             <a:xfrm>
-              <a:off x="960" y="4171"/>
-              <a:ext cx="5558" cy="6209"/>
-            </a:xfrm>
-            <a:prstGeom prst="roundRect">
-              <a:avLst>
-                <a:gd name="adj" fmla="val 1258"/>
-              </a:avLst>
-            </a:prstGeom>
-            <a:solidFill>
-              <a:srgbClr val="FFFFFF">
-                <a:alpha val="100000"/>
-              </a:srgbClr>
-            </a:solidFill>
-            <a:ln w="9525">
-              <a:solidFill>
-                <a:srgbClr val="E2E6EA">
-                  <a:alpha val="100000"/>
-                </a:srgbClr>
-              </a:solidFill>
-              <a:prstDash val="solid"/>
-              <a:headEnd type="none"/>
-              <a:tailEnd type="none"/>
-            </a:ln>
-          </p:spPr>
-        </p:sp>
-        <p:sp>
-          <p:nvSpPr>
-            <p:cNvPr id="15" name="AutoShape 15"/>
-            <p:cNvSpPr/>
-            <p:nvPr>
-              <p:custDataLst>
-                <p:tags r:id="rId4"/>
-              </p:custDataLst>
-            </p:nvPr>
-          </p:nvSpPr>
-          <p:spPr>
-            <a:xfrm>
-              <a:off x="1335" y="4186"/>
-              <a:ext cx="4814" cy="60"/>
+              <a:off x="713" y="1319"/>
+              <a:ext cx="17650" cy="1170"/>
             </a:xfrm>
             <a:prstGeom prst="rect">
               <a:avLst/>
             </a:prstGeom>
-            <a:solidFill>
-              <a:srgbClr val="C00000"/>
-            </a:solidFill>
-            <a:ln>
-              <a:headEnd type="none"/>
-              <a:tailEnd type="none"/>
-            </a:ln>
-          </p:spPr>
-          <p:txBody>
-            <a:bodyPr/>
-            <a:p>
-              <a:endParaRPr lang="zh-CN" altLang="en-US"/>
-            </a:p>
-          </p:txBody>
-        </p:sp>
-        <p:sp>
-          <p:nvSpPr>
-            <p:cNvPr id="16" name="AutoShape 16"/>
-            <p:cNvSpPr/>
-            <p:nvPr>
-              <p:custDataLst>
-                <p:tags r:id="rId5"/>
-              </p:custDataLst>
-            </p:nvPr>
-          </p:nvSpPr>
-          <p:spPr>
-            <a:xfrm>
-              <a:off x="1335" y="4708"/>
-              <a:ext cx="780" cy="780"/>
-            </a:xfrm>
-            <a:prstGeom prst="ellipse">
-              <a:avLst/>
-            </a:prstGeom>
-            <a:solidFill>
-              <a:srgbClr val="C00000"/>
-            </a:solidFill>
+            <a:blipFill rotWithShape="1">
+              <a:blip r:embed="rId1">
+                <a:alphaModFix amt="100000"/>
+                <a:alphaModFix amt="100000"/>
+              </a:blip>
+              <a:stretch>
+                <a:fillRect/>
+              </a:stretch>
+            </a:blipFill>
             <a:ln>
               <a:headEnd type="none"/>
               <a:tailEnd type="none"/>
@@ -13557,1827 +13479,14 @@
         </p:sp>
         <p:sp>
           <p:nvSpPr>
-            <p:cNvPr id="17" name="AutoShape 17"/>
-            <p:cNvSpPr/>
-            <p:nvPr>
-              <p:custDataLst>
-                <p:tags r:id="rId6"/>
-              </p:custDataLst>
-            </p:nvPr>
-          </p:nvSpPr>
-          <p:spPr>
-            <a:xfrm>
-              <a:off x="1560" y="4933"/>
-              <a:ext cx="330" cy="330"/>
-            </a:xfrm>
-            <a:custGeom>
-              <a:avLst/>
-              <a:gdLst/>
-              <a:ahLst/>
-              <a:cxnLst/>
-              <a:rect l="l" t="t" r="r" b="b"/>
-              <a:pathLst>
-                <a:path w="9998" h="10000">
-                  <a:moveTo>
-                    <a:pt x="4999" y="0"/>
-                  </a:moveTo>
-                  <a:cubicBezTo>
-                    <a:pt x="5096" y="0"/>
-                    <a:pt x="5186" y="20"/>
-                    <a:pt x="5270" y="60"/>
-                  </a:cubicBezTo>
-                  <a:lnTo>
-                    <a:pt x="9206" y="1650"/>
-                  </a:lnTo>
-                  <a:cubicBezTo>
-                    <a:pt x="9442" y="1742"/>
-                    <a:pt x="9630" y="1888"/>
-                    <a:pt x="9769" y="2087"/>
-                  </a:cubicBezTo>
-                  <a:cubicBezTo>
-                    <a:pt x="9921" y="2286"/>
-                    <a:pt x="9998" y="2518"/>
-                    <a:pt x="9998" y="2783"/>
-                  </a:cubicBezTo>
-                  <a:cubicBezTo>
-                    <a:pt x="10012" y="3459"/>
-                    <a:pt x="9894" y="4254"/>
-                    <a:pt x="9644" y="5169"/>
-                  </a:cubicBezTo>
-                  <a:cubicBezTo>
-                    <a:pt x="9394" y="6083"/>
-                    <a:pt x="8942" y="6971"/>
-                    <a:pt x="8290" y="7833"/>
-                  </a:cubicBezTo>
-                  <a:cubicBezTo>
-                    <a:pt x="7651" y="8707"/>
-                    <a:pt x="6735" y="9430"/>
-                    <a:pt x="5541" y="10000"/>
-                  </a:cubicBezTo>
-                  <a:cubicBezTo>
-                    <a:pt x="5179" y="10159"/>
-                    <a:pt x="4818" y="10159"/>
-                    <a:pt x="4457" y="10000"/>
-                  </a:cubicBezTo>
-                  <a:cubicBezTo>
-                    <a:pt x="3263" y="9430"/>
-                    <a:pt x="2346" y="8707"/>
-                    <a:pt x="1708" y="7833"/>
-                  </a:cubicBezTo>
-                  <a:cubicBezTo>
-                    <a:pt x="1055" y="6971"/>
-                    <a:pt x="604" y="6083"/>
-                    <a:pt x="354" y="5169"/>
-                  </a:cubicBezTo>
-                  <a:cubicBezTo>
-                    <a:pt x="104" y="4254"/>
-                    <a:pt x="-14" y="3459"/>
-                    <a:pt x="0" y="2783"/>
-                  </a:cubicBezTo>
-                  <a:cubicBezTo>
-                    <a:pt x="0" y="2518"/>
-                    <a:pt x="76" y="2286"/>
-                    <a:pt x="229" y="2087"/>
-                  </a:cubicBezTo>
-                  <a:cubicBezTo>
-                    <a:pt x="367" y="1888"/>
-                    <a:pt x="555" y="1742"/>
-                    <a:pt x="792" y="1650"/>
-                  </a:cubicBezTo>
-                  <a:lnTo>
-                    <a:pt x="4728" y="60"/>
-                  </a:lnTo>
-                  <a:cubicBezTo>
-                    <a:pt x="4811" y="20"/>
-                    <a:pt x="4901" y="0"/>
-                    <a:pt x="4999" y="0"/>
-                  </a:cubicBezTo>
-                  <a:moveTo>
-                    <a:pt x="4999" y="1332"/>
-                  </a:moveTo>
-                  <a:lnTo>
-                    <a:pt x="4999" y="8847"/>
-                  </a:lnTo>
-                  <a:lnTo>
-                    <a:pt x="4999" y="1332"/>
-                  </a:lnTo>
-                  <a:lnTo>
-                    <a:pt x="4999" y="8847"/>
-                  </a:lnTo>
-                  <a:cubicBezTo>
-                    <a:pt x="5943" y="8383"/>
-                    <a:pt x="6686" y="7793"/>
-                    <a:pt x="7228" y="7078"/>
-                  </a:cubicBezTo>
-                  <a:cubicBezTo>
-                    <a:pt x="7755" y="6362"/>
-                    <a:pt x="8130" y="5626"/>
-                    <a:pt x="8352" y="4871"/>
-                  </a:cubicBezTo>
-                  <a:cubicBezTo>
-                    <a:pt x="8560" y="4102"/>
-                    <a:pt x="8665" y="3413"/>
-                    <a:pt x="8665" y="2803"/>
-                  </a:cubicBezTo>
-                  <a:lnTo>
-                    <a:pt x="4999" y="1332"/>
-                  </a:lnTo>
-                </a:path>
-              </a:pathLst>
-            </a:custGeom>
-            <a:solidFill>
-              <a:srgbClr val="FFFFFF">
-                <a:alpha val="100000"/>
-              </a:srgbClr>
-            </a:solidFill>
-            <a:ln>
-              <a:headEnd type="none"/>
-              <a:tailEnd type="none"/>
-            </a:ln>
-          </p:spPr>
-        </p:sp>
-        <p:sp>
-          <p:nvSpPr>
-            <p:cNvPr id="18" name="TextBox 18"/>
-            <p:cNvSpPr txBox="1"/>
-            <p:nvPr>
-              <p:custDataLst>
-                <p:tags r:id="rId7"/>
-              </p:custDataLst>
-            </p:nvPr>
-          </p:nvSpPr>
-          <p:spPr>
-            <a:xfrm>
-              <a:off x="2294" y="4695"/>
-              <a:ext cx="1102" cy="450"/>
-            </a:xfrm>
-            <a:prstGeom prst="rect">
-              <a:avLst/>
-            </a:prstGeom>
-            <a:ln>
-              <a:headEnd type="none"/>
-              <a:tailEnd type="none"/>
-            </a:ln>
-          </p:spPr>
-          <p:txBody>
-            <a:bodyPr vert="horz" wrap="none" lIns="0" tIns="0" rIns="0" bIns="0" rtlCol="0" anchor="t" anchorCtr="0"/>
-            <a:lstStyle/>
-            <a:p>
-              <a:pPr algn="l">
-                <a:defRPr/>
-              </a:pPr>
-              <a:r>
-                <a:rPr lang="zh-CN" altLang="en-US" sz="2000" b="1" i="0" strike="noStrike">
-                  <a:solidFill>
-                    <a:srgbClr val="C00000">
-                      <a:alpha val="100000"/>
-                    </a:srgbClr>
-                  </a:solidFill>
-                  <a:latin typeface="微软雅黑" panose="020B0503020204020204" pitchFamily="34" charset="-122"/>
-                  <a:ea typeface="微软雅黑" panose="020B0503020204020204" pitchFamily="34" charset="-122"/>
-                  <a:cs typeface="Inter" panose="02000503000000020004"/>
-                </a:rPr>
-                <a:t>完全</a:t>
-              </a:r>
-              <a:r>
-                <a:rPr lang="zh-CN" altLang="en-US" sz="2000" b="1" i="0" strike="noStrike">
-                  <a:solidFill>
-                    <a:srgbClr val="C00000">
-                      <a:alpha val="100000"/>
-                    </a:srgbClr>
-                  </a:solidFill>
-                  <a:latin typeface="微软雅黑" panose="020B0503020204020204" pitchFamily="34" charset="-122"/>
-                  <a:ea typeface="微软雅黑" panose="020B0503020204020204" pitchFamily="34" charset="-122"/>
-                  <a:cs typeface="Inter" panose="02000503000000020004"/>
-                </a:rPr>
-                <a:t>可控</a:t>
-              </a:r>
-              <a:endParaRPr lang="zh-CN" altLang="en-US" sz="2000" b="1" i="0" strike="noStrike">
-                <a:solidFill>
-                  <a:srgbClr val="C00000">
-                    <a:alpha val="100000"/>
-                  </a:srgbClr>
-                </a:solidFill>
-                <a:latin typeface="微软雅黑" panose="020B0503020204020204" pitchFamily="34" charset="-122"/>
-                <a:ea typeface="微软雅黑" panose="020B0503020204020204" pitchFamily="34" charset="-122"/>
-                <a:cs typeface="Inter" panose="02000503000000020004"/>
-              </a:endParaRPr>
-            </a:p>
-          </p:txBody>
-        </p:sp>
-        <p:sp>
-          <p:nvSpPr>
-            <p:cNvPr id="19" name="TextBox 19"/>
-            <p:cNvSpPr txBox="1"/>
-            <p:nvPr>
-              <p:custDataLst>
-                <p:tags r:id="rId8"/>
-              </p:custDataLst>
-            </p:nvPr>
-          </p:nvSpPr>
-          <p:spPr>
-            <a:xfrm>
-              <a:off x="2294" y="5248"/>
-              <a:ext cx="997" cy="180"/>
-            </a:xfrm>
-            <a:prstGeom prst="rect">
-              <a:avLst/>
-            </a:prstGeom>
-            <a:ln>
-              <a:headEnd type="none"/>
-              <a:tailEnd type="none"/>
-            </a:ln>
-          </p:spPr>
-          <p:txBody>
-            <a:bodyPr vert="horz" wrap="none" lIns="0" tIns="0" rIns="0" bIns="0" rtlCol="0" anchor="t" anchorCtr="0"/>
-            <a:lstStyle/>
-            <a:p>
-              <a:pPr algn="l">
-                <a:defRPr/>
-              </a:pPr>
-              <a:r>
-                <a:rPr lang="en-US" sz="1000" b="1" i="0" strike="noStrike">
-                  <a:solidFill>
-                    <a:srgbClr val="C00000">
-                      <a:alpha val="50196"/>
-                    </a:srgbClr>
-                  </a:solidFill>
-                  <a:latin typeface="微软雅黑" panose="020B0503020204020204" pitchFamily="34" charset="-122"/>
-                  <a:ea typeface="微软雅黑" panose="020B0503020204020204" pitchFamily="34" charset="-122"/>
-                  <a:cs typeface="FZYaYiHei GB18030L2 R" panose="02000500000000000000" charset="-122"/>
-                </a:rPr>
-                <a:t>精确推理</a:t>
-              </a:r>
-              <a:endParaRPr lang="en-US" sz="1000" b="1" i="0" strike="noStrike">
-                <a:solidFill>
-                  <a:srgbClr val="C00000">
-                    <a:alpha val="50196"/>
-                  </a:srgbClr>
-                </a:solidFill>
-                <a:latin typeface="微软雅黑" panose="020B0503020204020204" pitchFamily="34" charset="-122"/>
-                <a:ea typeface="微软雅黑" panose="020B0503020204020204" pitchFamily="34" charset="-122"/>
-                <a:cs typeface="FZYaYiHei GB18030L2 R" panose="02000500000000000000" charset="-122"/>
-              </a:endParaRPr>
-            </a:p>
-          </p:txBody>
-        </p:sp>
-        <p:sp>
-          <p:nvSpPr>
-            <p:cNvPr id="20" name="TextBox 20"/>
-            <p:cNvSpPr txBox="1"/>
-            <p:nvPr>
-              <p:custDataLst>
-                <p:tags r:id="rId9"/>
-              </p:custDataLst>
-            </p:nvPr>
-          </p:nvSpPr>
-          <p:spPr>
-            <a:xfrm>
-              <a:off x="1353" y="6060"/>
-              <a:ext cx="4809" cy="330"/>
-            </a:xfrm>
-            <a:prstGeom prst="rect">
-              <a:avLst/>
-            </a:prstGeom>
-            <a:ln>
-              <a:headEnd type="none"/>
-              <a:tailEnd type="none"/>
-            </a:ln>
-          </p:spPr>
-          <p:txBody>
-            <a:bodyPr vert="horz" wrap="none" lIns="0" tIns="0" rIns="0" bIns="0" rtlCol="0" anchor="t" anchorCtr="0"/>
-            <a:lstStyle/>
-            <a:p>
-              <a:pPr algn="l">
-                <a:defRPr/>
-              </a:pPr>
-              <a:r>
-                <a:rPr lang="zh-CN" altLang="en-US" sz="1600" b="1" i="0" strike="noStrike">
-                  <a:solidFill>
-                    <a:srgbClr val="0A1F3D">
-                      <a:alpha val="100000"/>
-                    </a:srgbClr>
-                  </a:solidFill>
-                  <a:latin typeface="微软雅黑" panose="020B0503020204020204" pitchFamily="34" charset="-122"/>
-                  <a:ea typeface="微软雅黑" panose="020B0503020204020204" pitchFamily="34" charset="-122"/>
-                  <a:cs typeface="微软雅黑" panose="020B0503020204020204" pitchFamily="34" charset="-122"/>
-                </a:rPr>
-                <a:t>完全可控</a:t>
-              </a:r>
-              <a:r>
-                <a:rPr lang="en-US" sz="1600" b="1" i="0" strike="noStrike">
-                  <a:solidFill>
-                    <a:srgbClr val="0A1F3D">
-                      <a:alpha val="100000"/>
-                    </a:srgbClr>
-                  </a:solidFill>
-                  <a:latin typeface="微软雅黑" panose="020B0503020204020204" pitchFamily="34" charset="-122"/>
-                  <a:ea typeface="微软雅黑" panose="020B0503020204020204" pitchFamily="34" charset="-122"/>
-                  <a:cs typeface="微软雅黑" panose="020B0503020204020204" pitchFamily="34" charset="-122"/>
-                </a:rPr>
-                <a:t>推理场景</a:t>
-              </a:r>
-              <a:endParaRPr lang="en-US" sz="1600" b="1" i="0" strike="noStrike">
-                <a:solidFill>
-                  <a:srgbClr val="0A1F3D">
-                    <a:alpha val="100000"/>
-                  </a:srgbClr>
-                </a:solidFill>
-                <a:latin typeface="微软雅黑" panose="020B0503020204020204" pitchFamily="34" charset="-122"/>
-                <a:ea typeface="微软雅黑" panose="020B0503020204020204" pitchFamily="34" charset="-122"/>
-                <a:cs typeface="微软雅黑" panose="020B0503020204020204" pitchFamily="34" charset="-122"/>
-              </a:endParaRPr>
-            </a:p>
-          </p:txBody>
-        </p:sp>
-        <p:sp>
-          <p:nvSpPr>
-            <p:cNvPr id="22" name="TextBox 22"/>
-            <p:cNvSpPr txBox="1"/>
-            <p:nvPr>
-              <p:custDataLst>
-                <p:tags r:id="rId10"/>
-              </p:custDataLst>
-            </p:nvPr>
-          </p:nvSpPr>
-          <p:spPr>
-            <a:xfrm>
-              <a:off x="1563" y="6705"/>
-              <a:ext cx="4599" cy="3013"/>
-            </a:xfrm>
-            <a:prstGeom prst="rect">
-              <a:avLst/>
-            </a:prstGeom>
-            <a:ln>
-              <a:headEnd type="none"/>
-              <a:tailEnd type="none"/>
-            </a:ln>
-          </p:spPr>
-          <p:txBody>
-            <a:bodyPr vert="horz" wrap="square" lIns="0" tIns="0" rIns="0" bIns="0" rtlCol="0" anchor="t" anchorCtr="0"/>
-            <a:lstStyle/>
-            <a:p>
-              <a:pPr marL="171450" indent="-171450" algn="l">
-                <a:buFont typeface="Wingdings" panose="05000000000000000000" charset="0"/>
-                <a:buChar char="Ø"/>
-                <a:defRPr/>
-              </a:pPr>
-              <a:r>
-                <a:rPr lang="en-US" sz="1400" b="0" i="0" strike="noStrike">
-                  <a:solidFill>
-                    <a:srgbClr val="0A1F3D">
-                      <a:alpha val="85098"/>
-                    </a:srgbClr>
-                  </a:solidFill>
-                  <a:latin typeface="微软雅黑" panose="020B0503020204020204" pitchFamily="34" charset="-122"/>
-                  <a:ea typeface="微软雅黑" panose="020B0503020204020204" pitchFamily="34" charset="-122"/>
-                  <a:cs typeface="FZYaYiHei GB18030L2 R" panose="02000500000000000000" charset="-122"/>
-                </a:rPr>
-                <a:t>通过大模型录入各类语料打造精确本体，用提示</a:t>
-              </a:r>
-              <a:r>
-                <a:rPr sz="1400" b="0" i="0" strike="noStrike">
-                  <a:solidFill>
-                    <a:srgbClr val="0A1F3D">
-                      <a:alpha val="85098"/>
-                    </a:srgbClr>
-                  </a:solidFill>
-                  <a:latin typeface="微软雅黑" panose="020B0503020204020204" pitchFamily="34" charset="-122"/>
-                  <a:ea typeface="微软雅黑" panose="020B0503020204020204" pitchFamily="34" charset="-122"/>
-                  <a:cs typeface="FZYaYiHei GB18030L2 R" panose="02000500000000000000" charset="-122"/>
-                </a:rPr>
-                <a:t>词工程确定客户需求后输入本体封装框架，由本体独立完成精确推理。</a:t>
-              </a:r>
-              <a:endParaRPr sz="1400" b="0" i="0" strike="noStrike">
-                <a:solidFill>
-                  <a:srgbClr val="0A1F3D">
-                    <a:alpha val="85098"/>
-                  </a:srgbClr>
-                </a:solidFill>
-                <a:latin typeface="微软雅黑" panose="020B0503020204020204" pitchFamily="34" charset="-122"/>
-                <a:ea typeface="微软雅黑" panose="020B0503020204020204" pitchFamily="34" charset="-122"/>
-                <a:cs typeface="FZYaYiHei GB18030L2 R" panose="02000500000000000000" charset="-122"/>
-              </a:endParaRPr>
-            </a:p>
-            <a:p>
-              <a:pPr marL="171450" indent="-171450" algn="l">
-                <a:buFont typeface="Wingdings" panose="05000000000000000000" charset="0"/>
-                <a:buChar char="Ø"/>
-                <a:defRPr/>
-              </a:pPr>
-              <a:endParaRPr sz="1400" b="0" i="0" strike="noStrike">
-                <a:solidFill>
-                  <a:srgbClr val="0A1F3D">
-                    <a:alpha val="85098"/>
-                  </a:srgbClr>
-                </a:solidFill>
-                <a:latin typeface="微软雅黑" panose="020B0503020204020204" pitchFamily="34" charset="-122"/>
-                <a:ea typeface="微软雅黑" panose="020B0503020204020204" pitchFamily="34" charset="-122"/>
-                <a:cs typeface="FZYaYiHei GB18030L2 R" panose="02000500000000000000" charset="-122"/>
-              </a:endParaRPr>
-            </a:p>
-            <a:p>
-              <a:pPr marL="171450" indent="-171450" algn="l">
-                <a:buFont typeface="Wingdings" panose="05000000000000000000" charset="0"/>
-                <a:buChar char="Ø"/>
-                <a:defRPr/>
-              </a:pPr>
-              <a:r>
-                <a:rPr lang="en-US" sz="1400">
-                  <a:solidFill>
-                    <a:srgbClr val="0A1F3D">
-                      <a:alpha val="85098"/>
-                    </a:srgbClr>
-                  </a:solidFill>
-                  <a:latin typeface="微软雅黑" panose="020B0503020204020204" pitchFamily="34" charset="-122"/>
-                  <a:ea typeface="微软雅黑" panose="020B0503020204020204" pitchFamily="34" charset="-122"/>
-                  <a:cs typeface="FZYaYiHei GB18030L2 R" panose="02000500000000000000" charset="-122"/>
-                  <a:sym typeface="+mn-ea"/>
-                </a:rPr>
-                <a:t>适用于金融合规、医疗诊断、安全审计等零容错</a:t>
-              </a:r>
-              <a:r>
-                <a:rPr sz="1400">
-                  <a:solidFill>
-                    <a:srgbClr val="0A1F3D">
-                      <a:alpha val="85098"/>
-                    </a:srgbClr>
-                  </a:solidFill>
-                  <a:latin typeface="微软雅黑" panose="020B0503020204020204" pitchFamily="34" charset="-122"/>
-                  <a:ea typeface="微软雅黑" panose="020B0503020204020204" pitchFamily="34" charset="-122"/>
-                  <a:cs typeface="FZYaYiHei GB18030L2 R" panose="02000500000000000000" charset="-122"/>
-                  <a:sym typeface="+mn-ea"/>
-                </a:rPr>
-                <a:t>领域，推理结果完全由形式化语义保证，不依赖概率模型。</a:t>
-              </a:r>
-              <a:endParaRPr sz="1400" b="0" i="0" strike="noStrike">
-                <a:solidFill>
-                  <a:srgbClr val="0A1F3D">
-                    <a:alpha val="85098"/>
-                  </a:srgbClr>
-                </a:solidFill>
-                <a:latin typeface="微软雅黑" panose="020B0503020204020204" pitchFamily="34" charset="-122"/>
-                <a:ea typeface="微软雅黑" panose="020B0503020204020204" pitchFamily="34" charset="-122"/>
-                <a:cs typeface="FZYaYiHei GB18030L2 R" panose="02000500000000000000" charset="-122"/>
-              </a:endParaRPr>
-            </a:p>
-            <a:p>
-              <a:pPr marL="171450" indent="-171450" algn="l">
-                <a:buFont typeface="Wingdings" panose="05000000000000000000" charset="0"/>
-                <a:buChar char="Ø"/>
-                <a:defRPr/>
-              </a:pPr>
-              <a:endParaRPr sz="1400" b="0" i="0" strike="noStrike">
-                <a:solidFill>
-                  <a:srgbClr val="0A1F3D">
-                    <a:alpha val="85098"/>
-                  </a:srgbClr>
-                </a:solidFill>
-                <a:latin typeface="微软雅黑" panose="020B0503020204020204" pitchFamily="34" charset="-122"/>
-                <a:ea typeface="微软雅黑" panose="020B0503020204020204" pitchFamily="34" charset="-122"/>
-                <a:cs typeface="FZYaYiHei GB18030L2 R" panose="02000500000000000000" charset="-122"/>
-              </a:endParaRPr>
-            </a:p>
-          </p:txBody>
-        </p:sp>
-        <p:sp>
-          <p:nvSpPr>
-            <p:cNvPr id="25" name="AutoShape 25"/>
-            <p:cNvSpPr/>
-            <p:nvPr>
-              <p:custDataLst>
-                <p:tags r:id="rId11"/>
-              </p:custDataLst>
-            </p:nvPr>
-          </p:nvSpPr>
-          <p:spPr>
-            <a:xfrm>
-              <a:off x="6818" y="4171"/>
-              <a:ext cx="5559" cy="6209"/>
-            </a:xfrm>
-            <a:prstGeom prst="roundRect">
-              <a:avLst>
-                <a:gd name="adj" fmla="val 1258"/>
-              </a:avLst>
-            </a:prstGeom>
-            <a:solidFill>
-              <a:srgbClr val="FFFFFF">
-                <a:alpha val="100000"/>
-              </a:srgbClr>
-            </a:solidFill>
-            <a:ln w="9525">
-              <a:solidFill>
-                <a:srgbClr val="E2E6EA">
-                  <a:alpha val="100000"/>
-                </a:srgbClr>
-              </a:solidFill>
-              <a:prstDash val="solid"/>
-              <a:headEnd type="none"/>
-              <a:tailEnd type="none"/>
-            </a:ln>
-          </p:spPr>
-        </p:sp>
-        <p:sp>
-          <p:nvSpPr>
-            <p:cNvPr id="26" name="AutoShape 26"/>
-            <p:cNvSpPr/>
-            <p:nvPr>
-              <p:custDataLst>
-                <p:tags r:id="rId12"/>
-              </p:custDataLst>
-            </p:nvPr>
-          </p:nvSpPr>
-          <p:spPr>
-            <a:xfrm>
-              <a:off x="7193" y="4186"/>
-              <a:ext cx="4814" cy="60"/>
-            </a:xfrm>
-            <a:prstGeom prst="rect">
-              <a:avLst/>
-            </a:prstGeom>
-            <a:solidFill>
-              <a:srgbClr val="C00000"/>
-            </a:solidFill>
-            <a:ln>
-              <a:headEnd type="none"/>
-              <a:tailEnd type="none"/>
-            </a:ln>
-          </p:spPr>
-        </p:sp>
-        <p:sp>
-          <p:nvSpPr>
-            <p:cNvPr id="27" name="AutoShape 27"/>
-            <p:cNvSpPr/>
-            <p:nvPr>
-              <p:custDataLst>
-                <p:tags r:id="rId13"/>
-              </p:custDataLst>
-            </p:nvPr>
-          </p:nvSpPr>
-          <p:spPr>
-            <a:xfrm>
-              <a:off x="7193" y="4708"/>
-              <a:ext cx="780" cy="780"/>
-            </a:xfrm>
-            <a:prstGeom prst="ellipse">
-              <a:avLst/>
-            </a:prstGeom>
-            <a:solidFill>
-              <a:srgbClr val="C00000"/>
-            </a:solidFill>
-            <a:ln>
-              <a:headEnd type="none"/>
-              <a:tailEnd type="none"/>
-            </a:ln>
-          </p:spPr>
-        </p:sp>
-        <p:sp>
-          <p:nvSpPr>
-            <p:cNvPr id="28" name="AutoShape 28"/>
-            <p:cNvSpPr/>
-            <p:nvPr>
-              <p:custDataLst>
-                <p:tags r:id="rId14"/>
-              </p:custDataLst>
-            </p:nvPr>
-          </p:nvSpPr>
-          <p:spPr>
-            <a:xfrm>
-              <a:off x="7418" y="5563"/>
-              <a:ext cx="330" cy="330"/>
-            </a:xfrm>
-            <a:custGeom>
-              <a:avLst/>
-              <a:gdLst/>
-              <a:ahLst/>
-              <a:cxnLst/>
-              <a:rect l="l" t="t" r="r" b="b"/>
-              <a:pathLst>
-                <a:path w="9998" h="10000">
-                  <a:moveTo>
-                    <a:pt x="1854" y="3779"/>
-                  </a:moveTo>
-                  <a:cubicBezTo>
-                    <a:pt x="2020" y="3256"/>
-                    <a:pt x="2284" y="2795"/>
-                    <a:pt x="2645" y="2396"/>
-                  </a:cubicBezTo>
-                  <a:cubicBezTo>
-                    <a:pt x="3325" y="1674"/>
-                    <a:pt x="4110" y="1313"/>
-                    <a:pt x="4999" y="1313"/>
-                  </a:cubicBezTo>
-                  <a:cubicBezTo>
-                    <a:pt x="5887" y="1313"/>
-                    <a:pt x="6672" y="1674"/>
-                    <a:pt x="7353" y="2396"/>
-                  </a:cubicBezTo>
-                  <a:lnTo>
-                    <a:pt x="7707" y="2788"/>
-                  </a:lnTo>
-                  <a:lnTo>
-                    <a:pt x="6999" y="2788"/>
-                  </a:lnTo>
-                  <a:cubicBezTo>
-                    <a:pt x="6804" y="2788"/>
-                    <a:pt x="6644" y="2857"/>
-                    <a:pt x="6520" y="2995"/>
-                  </a:cubicBezTo>
-                  <a:cubicBezTo>
-                    <a:pt x="6394" y="3133"/>
-                    <a:pt x="6332" y="3310"/>
-                    <a:pt x="6332" y="3525"/>
-                  </a:cubicBezTo>
-                  <a:cubicBezTo>
-                    <a:pt x="6332" y="3740"/>
-                    <a:pt x="6394" y="3917"/>
-                    <a:pt x="6520" y="4055"/>
-                  </a:cubicBezTo>
-                  <a:cubicBezTo>
-                    <a:pt x="6644" y="4193"/>
-                    <a:pt x="6804" y="4263"/>
-                    <a:pt x="6999" y="4263"/>
-                  </a:cubicBezTo>
-                  <a:lnTo>
-                    <a:pt x="9331" y="4263"/>
-                  </a:lnTo>
-                  <a:cubicBezTo>
-                    <a:pt x="9331" y="4263"/>
-                    <a:pt x="9331" y="4263"/>
-                    <a:pt x="9331" y="4263"/>
-                  </a:cubicBezTo>
-                  <a:cubicBezTo>
-                    <a:pt x="9331" y="4263"/>
-                    <a:pt x="9331" y="4263"/>
-                    <a:pt x="9331" y="4263"/>
-                  </a:cubicBezTo>
-                  <a:cubicBezTo>
-                    <a:pt x="9525" y="4263"/>
-                    <a:pt x="9685" y="4193"/>
-                    <a:pt x="9811" y="4055"/>
-                  </a:cubicBezTo>
-                  <a:cubicBezTo>
-                    <a:pt x="9935" y="3917"/>
-                    <a:pt x="9998" y="3740"/>
-                    <a:pt x="9998" y="3525"/>
-                  </a:cubicBezTo>
-                  <a:lnTo>
-                    <a:pt x="9998" y="945"/>
-                  </a:lnTo>
-                  <a:cubicBezTo>
-                    <a:pt x="9998" y="729"/>
-                    <a:pt x="9935" y="553"/>
-                    <a:pt x="9811" y="415"/>
-                  </a:cubicBezTo>
-                  <a:cubicBezTo>
-                    <a:pt x="9685" y="276"/>
-                    <a:pt x="9525" y="207"/>
-                    <a:pt x="9331" y="207"/>
-                  </a:cubicBezTo>
-                  <a:cubicBezTo>
-                    <a:pt x="9137" y="207"/>
-                    <a:pt x="8977" y="276"/>
-                    <a:pt x="8852" y="415"/>
-                  </a:cubicBezTo>
-                  <a:cubicBezTo>
-                    <a:pt x="8727" y="553"/>
-                    <a:pt x="8665" y="729"/>
-                    <a:pt x="8665" y="945"/>
-                  </a:cubicBezTo>
-                  <a:lnTo>
-                    <a:pt x="8665" y="1751"/>
-                  </a:lnTo>
-                  <a:lnTo>
-                    <a:pt x="8290" y="1359"/>
-                  </a:lnTo>
-                  <a:cubicBezTo>
-                    <a:pt x="7679" y="683"/>
-                    <a:pt x="6978" y="230"/>
-                    <a:pt x="6186" y="0"/>
-                  </a:cubicBezTo>
-                  <a:cubicBezTo>
-                    <a:pt x="5394" y="-215"/>
-                    <a:pt x="4603" y="-215"/>
-                    <a:pt x="3812" y="0"/>
-                  </a:cubicBezTo>
-                  <a:cubicBezTo>
-                    <a:pt x="3020" y="230"/>
-                    <a:pt x="2318" y="683"/>
-                    <a:pt x="1708" y="1359"/>
-                  </a:cubicBezTo>
-                  <a:cubicBezTo>
-                    <a:pt x="1194" y="1927"/>
-                    <a:pt x="826" y="2565"/>
-                    <a:pt x="604" y="3272"/>
-                  </a:cubicBezTo>
-                  <a:cubicBezTo>
-                    <a:pt x="548" y="3471"/>
-                    <a:pt x="555" y="3663"/>
-                    <a:pt x="625" y="3848"/>
-                  </a:cubicBezTo>
-                  <a:cubicBezTo>
-                    <a:pt x="708" y="4016"/>
-                    <a:pt x="833" y="4139"/>
-                    <a:pt x="1000" y="4217"/>
-                  </a:cubicBezTo>
-                  <a:cubicBezTo>
-                    <a:pt x="1180" y="4278"/>
-                    <a:pt x="1354" y="4270"/>
-                    <a:pt x="1521" y="4194"/>
-                  </a:cubicBezTo>
-                  <a:cubicBezTo>
-                    <a:pt x="1673" y="4101"/>
-                    <a:pt x="1784" y="3963"/>
-                    <a:pt x="1854" y="3779"/>
-                  </a:cubicBezTo>
-                  <a:moveTo>
-                    <a:pt x="479" y="5760"/>
-                  </a:moveTo>
-                  <a:cubicBezTo>
-                    <a:pt x="367" y="5806"/>
-                    <a:pt x="270" y="5875"/>
-                    <a:pt x="187" y="5968"/>
-                  </a:cubicBezTo>
-                  <a:cubicBezTo>
-                    <a:pt x="103" y="6060"/>
-                    <a:pt x="48" y="6167"/>
-                    <a:pt x="21" y="6290"/>
-                  </a:cubicBezTo>
-                  <a:cubicBezTo>
-                    <a:pt x="21" y="6305"/>
-                    <a:pt x="14" y="6328"/>
-                    <a:pt x="0" y="6359"/>
-                  </a:cubicBezTo>
-                  <a:cubicBezTo>
-                    <a:pt x="0" y="6405"/>
-                    <a:pt x="0" y="6444"/>
-                    <a:pt x="0" y="6475"/>
-                  </a:cubicBezTo>
-                  <a:lnTo>
-                    <a:pt x="0" y="9055"/>
-                  </a:lnTo>
-                  <a:cubicBezTo>
-                    <a:pt x="0" y="9270"/>
-                    <a:pt x="62" y="9447"/>
-                    <a:pt x="187" y="9585"/>
-                  </a:cubicBezTo>
-                  <a:cubicBezTo>
-                    <a:pt x="312" y="9723"/>
-                    <a:pt x="472" y="9793"/>
-                    <a:pt x="667" y="9793"/>
-                  </a:cubicBezTo>
-                  <a:cubicBezTo>
-                    <a:pt x="861" y="9793"/>
-                    <a:pt x="1020" y="9723"/>
-                    <a:pt x="1146" y="9585"/>
-                  </a:cubicBezTo>
-                  <a:cubicBezTo>
-                    <a:pt x="1270" y="9447"/>
-                    <a:pt x="1333" y="9270"/>
-                    <a:pt x="1333" y="9055"/>
-                  </a:cubicBezTo>
-                  <a:lnTo>
-                    <a:pt x="1333" y="8249"/>
-                  </a:lnTo>
-                  <a:lnTo>
-                    <a:pt x="1708" y="8641"/>
-                  </a:lnTo>
-                  <a:cubicBezTo>
-                    <a:pt x="2318" y="9316"/>
-                    <a:pt x="3020" y="9769"/>
-                    <a:pt x="3812" y="10000"/>
-                  </a:cubicBezTo>
-                  <a:cubicBezTo>
-                    <a:pt x="4603" y="10215"/>
-                    <a:pt x="5394" y="10215"/>
-                    <a:pt x="6186" y="10000"/>
-                  </a:cubicBezTo>
-                  <a:cubicBezTo>
-                    <a:pt x="6978" y="9769"/>
-                    <a:pt x="7679" y="9316"/>
-                    <a:pt x="8290" y="8641"/>
-                  </a:cubicBezTo>
-                  <a:cubicBezTo>
-                    <a:pt x="8804" y="8072"/>
-                    <a:pt x="9172" y="7434"/>
-                    <a:pt x="9394" y="6728"/>
-                  </a:cubicBezTo>
-                  <a:cubicBezTo>
-                    <a:pt x="9449" y="6528"/>
-                    <a:pt x="9442" y="6336"/>
-                    <a:pt x="9373" y="6152"/>
-                  </a:cubicBezTo>
-                  <a:cubicBezTo>
-                    <a:pt x="9289" y="5983"/>
-                    <a:pt x="9164" y="5860"/>
-                    <a:pt x="8998" y="5783"/>
-                  </a:cubicBezTo>
-                  <a:cubicBezTo>
-                    <a:pt x="8817" y="5721"/>
-                    <a:pt x="8643" y="5729"/>
-                    <a:pt x="8477" y="5806"/>
-                  </a:cubicBezTo>
-                  <a:cubicBezTo>
-                    <a:pt x="8324" y="5898"/>
-                    <a:pt x="8213" y="6037"/>
-                    <a:pt x="8144" y="6221"/>
-                  </a:cubicBezTo>
-                  <a:cubicBezTo>
-                    <a:pt x="7977" y="6743"/>
-                    <a:pt x="7713" y="7204"/>
-                    <a:pt x="7353" y="7604"/>
-                  </a:cubicBezTo>
-                  <a:cubicBezTo>
-                    <a:pt x="6672" y="8326"/>
-                    <a:pt x="5887" y="8687"/>
-                    <a:pt x="4999" y="8687"/>
-                  </a:cubicBezTo>
-                  <a:cubicBezTo>
-                    <a:pt x="4110" y="8687"/>
-                    <a:pt x="3325" y="8326"/>
-                    <a:pt x="2645" y="7604"/>
-                  </a:cubicBezTo>
-                  <a:lnTo>
-                    <a:pt x="2291" y="7212"/>
-                  </a:lnTo>
-                  <a:lnTo>
-                    <a:pt x="2999" y="7212"/>
-                  </a:lnTo>
-                  <a:cubicBezTo>
-                    <a:pt x="3193" y="7212"/>
-                    <a:pt x="3353" y="7143"/>
-                    <a:pt x="3478" y="7005"/>
-                  </a:cubicBezTo>
-                  <a:cubicBezTo>
-                    <a:pt x="3603" y="6866"/>
-                    <a:pt x="3666" y="6689"/>
-                    <a:pt x="3666" y="6475"/>
-                  </a:cubicBezTo>
-                  <a:cubicBezTo>
-                    <a:pt x="3666" y="6259"/>
-                    <a:pt x="3603" y="6083"/>
-                    <a:pt x="3478" y="5945"/>
-                  </a:cubicBezTo>
-                  <a:cubicBezTo>
-                    <a:pt x="3353" y="5806"/>
-                    <a:pt x="3193" y="5737"/>
-                    <a:pt x="2999" y="5737"/>
-                  </a:cubicBezTo>
-                  <a:lnTo>
-                    <a:pt x="667" y="5737"/>
-                  </a:lnTo>
-                  <a:cubicBezTo>
-                    <a:pt x="639" y="5737"/>
-                    <a:pt x="611" y="5737"/>
-                    <a:pt x="583" y="5737"/>
-                  </a:cubicBezTo>
-                  <a:cubicBezTo>
-                    <a:pt x="541" y="5752"/>
-                    <a:pt x="507" y="5760"/>
-                    <a:pt x="479" y="5760"/>
-                  </a:cubicBezTo>
-                </a:path>
-              </a:pathLst>
-            </a:custGeom>
-            <a:solidFill>
-              <a:srgbClr val="FFFFFF">
-                <a:alpha val="100000"/>
-              </a:srgbClr>
-            </a:solidFill>
-            <a:ln>
-              <a:headEnd type="none"/>
-              <a:tailEnd type="none"/>
-            </a:ln>
-          </p:spPr>
-        </p:sp>
-        <p:sp>
-          <p:nvSpPr>
-            <p:cNvPr id="29" name="TextBox 29"/>
-            <p:cNvSpPr txBox="1"/>
-            <p:nvPr>
-              <p:custDataLst>
-                <p:tags r:id="rId15"/>
-              </p:custDataLst>
-            </p:nvPr>
-          </p:nvSpPr>
-          <p:spPr>
-            <a:xfrm>
-              <a:off x="8153" y="4695"/>
-              <a:ext cx="1113" cy="450"/>
-            </a:xfrm>
-            <a:prstGeom prst="rect">
-              <a:avLst/>
-            </a:prstGeom>
-            <a:ln>
-              <a:headEnd type="none"/>
-              <a:tailEnd type="none"/>
-            </a:ln>
-          </p:spPr>
-          <p:txBody>
-            <a:bodyPr vert="horz" wrap="none" lIns="0" tIns="0" rIns="0" bIns="0" rtlCol="0" anchor="t" anchorCtr="0"/>
-            <a:lstStyle/>
-            <a:p>
-              <a:pPr algn="l">
-                <a:defRPr/>
-              </a:pPr>
-              <a:r>
-                <a:rPr lang="en-US" sz="2000" b="1" i="0" strike="noStrike">
-                  <a:solidFill>
-                    <a:srgbClr val="C00000">
-                      <a:alpha val="100000"/>
-                    </a:srgbClr>
-                  </a:solidFill>
-                  <a:latin typeface="微软雅黑" panose="020B0503020204020204" pitchFamily="34" charset="-122"/>
-                  <a:ea typeface="微软雅黑" panose="020B0503020204020204" pitchFamily="34" charset="-122"/>
-                  <a:cs typeface="Inter" panose="02000503000000020004"/>
-                </a:rPr>
-                <a:t>~95%+</a:t>
-              </a:r>
-              <a:endParaRPr lang="en-US" sz="2000" b="1" i="0" strike="noStrike">
-                <a:solidFill>
-                  <a:srgbClr val="C00000">
-                    <a:alpha val="100000"/>
-                  </a:srgbClr>
-                </a:solidFill>
-                <a:latin typeface="微软雅黑" panose="020B0503020204020204" pitchFamily="34" charset="-122"/>
-                <a:ea typeface="微软雅黑" panose="020B0503020204020204" pitchFamily="34" charset="-122"/>
-                <a:cs typeface="Inter" panose="02000503000000020004"/>
-              </a:endParaRPr>
-            </a:p>
-          </p:txBody>
-        </p:sp>
-        <p:sp>
-          <p:nvSpPr>
-            <p:cNvPr id="30" name="TextBox 30"/>
-            <p:cNvSpPr txBox="1"/>
-            <p:nvPr>
-              <p:custDataLst>
-                <p:tags r:id="rId16"/>
-              </p:custDataLst>
-            </p:nvPr>
-          </p:nvSpPr>
-          <p:spPr>
-            <a:xfrm>
-              <a:off x="8153" y="5248"/>
-              <a:ext cx="1008" cy="180"/>
-            </a:xfrm>
-            <a:prstGeom prst="rect">
-              <a:avLst/>
-            </a:prstGeom>
-            <a:ln>
-              <a:headEnd type="none"/>
-              <a:tailEnd type="none"/>
-            </a:ln>
-          </p:spPr>
-          <p:txBody>
-            <a:bodyPr vert="horz" wrap="none" lIns="0" tIns="0" rIns="0" bIns="0" rtlCol="0" anchor="t" anchorCtr="0"/>
-            <a:lstStyle/>
-            <a:p>
-              <a:pPr algn="l">
-                <a:defRPr/>
-              </a:pPr>
-              <a:r>
-                <a:rPr lang="en-US" sz="1000" b="1" i="0" strike="noStrike">
-                  <a:solidFill>
-                    <a:srgbClr val="C00000">
-                      <a:alpha val="50196"/>
-                    </a:srgbClr>
-                  </a:solidFill>
-                  <a:latin typeface="微软雅黑" panose="020B0503020204020204" pitchFamily="34" charset="-122"/>
-                  <a:ea typeface="微软雅黑" panose="020B0503020204020204" pitchFamily="34" charset="-122"/>
-                  <a:cs typeface="FZYaYiHei GB18030L2 R" panose="02000500000000000000" charset="-122"/>
-                </a:rPr>
-                <a:t>混合验证</a:t>
-              </a:r>
-              <a:endParaRPr lang="en-US" sz="1000" b="1" i="0" strike="noStrike">
-                <a:solidFill>
-                  <a:srgbClr val="C00000">
-                    <a:alpha val="50196"/>
-                  </a:srgbClr>
-                </a:solidFill>
-                <a:latin typeface="微软雅黑" panose="020B0503020204020204" pitchFamily="34" charset="-122"/>
-                <a:ea typeface="微软雅黑" panose="020B0503020204020204" pitchFamily="34" charset="-122"/>
-                <a:cs typeface="FZYaYiHei GB18030L2 R" panose="02000500000000000000" charset="-122"/>
-              </a:endParaRPr>
-            </a:p>
-          </p:txBody>
-        </p:sp>
-        <p:sp>
-          <p:nvSpPr>
-            <p:cNvPr id="31" name="TextBox 31"/>
-            <p:cNvSpPr txBox="1"/>
-            <p:nvPr>
-              <p:custDataLst>
-                <p:tags r:id="rId17"/>
-              </p:custDataLst>
-            </p:nvPr>
-          </p:nvSpPr>
-          <p:spPr>
-            <a:xfrm>
-              <a:off x="7212" y="6060"/>
-              <a:ext cx="4809" cy="330"/>
-            </a:xfrm>
-            <a:prstGeom prst="rect">
-              <a:avLst/>
-            </a:prstGeom>
-            <a:ln>
-              <a:headEnd type="none"/>
-              <a:tailEnd type="none"/>
-            </a:ln>
-          </p:spPr>
-          <p:txBody>
-            <a:bodyPr vert="horz" wrap="none" lIns="0" tIns="0" rIns="0" bIns="0" rtlCol="0" anchor="t" anchorCtr="0"/>
-            <a:lstStyle/>
-            <a:p>
-              <a:pPr algn="l">
-                <a:defRPr/>
-              </a:pPr>
-              <a:r>
-                <a:rPr lang="en-US" sz="1600" b="1" i="0" strike="noStrike">
-                  <a:solidFill>
-                    <a:srgbClr val="0A1F3D">
-                      <a:alpha val="100000"/>
-                    </a:srgbClr>
-                  </a:solidFill>
-                  <a:latin typeface="微软雅黑" panose="020B0503020204020204" pitchFamily="34" charset="-122"/>
-                  <a:ea typeface="微软雅黑" panose="020B0503020204020204" pitchFamily="34" charset="-122"/>
-                  <a:cs typeface="Alibaba PuHuiTi 3.0 55 Regular"/>
-                </a:rPr>
-                <a:t>高准确度混合验证场景</a:t>
-              </a:r>
-              <a:endParaRPr lang="en-US" sz="1600" b="1" i="0" strike="noStrike">
-                <a:solidFill>
-                  <a:srgbClr val="0A1F3D">
-                    <a:alpha val="100000"/>
-                  </a:srgbClr>
-                </a:solidFill>
-                <a:latin typeface="微软雅黑" panose="020B0503020204020204" pitchFamily="34" charset="-122"/>
-                <a:ea typeface="微软雅黑" panose="020B0503020204020204" pitchFamily="34" charset="-122"/>
-                <a:cs typeface="Alibaba PuHuiTi 3.0 55 Regular"/>
-              </a:endParaRPr>
-            </a:p>
-          </p:txBody>
-        </p:sp>
-        <p:sp>
-          <p:nvSpPr>
-            <p:cNvPr id="33" name="TextBox 33"/>
-            <p:cNvSpPr txBox="1"/>
-            <p:nvPr>
-              <p:custDataLst>
-                <p:tags r:id="rId18"/>
-              </p:custDataLst>
-            </p:nvPr>
-          </p:nvSpPr>
-          <p:spPr>
-            <a:xfrm>
-              <a:off x="7154" y="6705"/>
-              <a:ext cx="4599" cy="2350"/>
-            </a:xfrm>
-            <a:prstGeom prst="rect">
-              <a:avLst/>
-            </a:prstGeom>
-            <a:ln>
-              <a:headEnd type="none"/>
-              <a:tailEnd type="none"/>
-            </a:ln>
-          </p:spPr>
-          <p:txBody>
-            <a:bodyPr vert="horz" wrap="square" lIns="0" tIns="0" rIns="0" bIns="0" rtlCol="0" anchor="t" anchorCtr="0"/>
-            <a:lstStyle/>
-            <a:p>
-              <a:pPr marL="171450" indent="-171450" algn="l">
-                <a:buFont typeface="Wingdings" panose="05000000000000000000" charset="0"/>
-                <a:buChar char="Ø"/>
-                <a:defRPr/>
-              </a:pPr>
-              <a:r>
-                <a:rPr lang="en-US" sz="1400" b="0" i="0" strike="noStrike">
-                  <a:solidFill>
-                    <a:srgbClr val="0A1F3D">
-                      <a:alpha val="85098"/>
-                    </a:srgbClr>
-                  </a:solidFill>
-                  <a:latin typeface="微软雅黑" panose="020B0503020204020204" pitchFamily="34" charset="-122"/>
-                  <a:ea typeface="微软雅黑" panose="020B0503020204020204" pitchFamily="34" charset="-122"/>
-                  <a:cs typeface="FZYaYiHei GB18030L2 R" panose="02000500000000000000" charset="-122"/>
-                </a:rPr>
-                <a:t>将精确本体直接导入大模型，由大模型生成初步</a:t>
-              </a:r>
-              <a:r>
-                <a:rPr sz="1400" b="0" i="0" strike="noStrike">
-                  <a:solidFill>
-                    <a:srgbClr val="0A1F3D">
-                      <a:alpha val="85098"/>
-                    </a:srgbClr>
-                  </a:solidFill>
-                  <a:latin typeface="微软雅黑" panose="020B0503020204020204" pitchFamily="34" charset="-122"/>
-                  <a:ea typeface="微软雅黑" panose="020B0503020204020204" pitchFamily="34" charset="-122"/>
-                  <a:cs typeface="FZYaYiHei GB18030L2 R" panose="02000500000000000000" charset="-122"/>
-                </a:rPr>
-                <a:t>结果后交由本体系统验证合法性，不合法则触发重新生成。</a:t>
-              </a:r>
-              <a:endParaRPr sz="1400" b="0" i="0" strike="noStrike">
-                <a:solidFill>
-                  <a:srgbClr val="0A1F3D">
-                    <a:alpha val="85098"/>
-                  </a:srgbClr>
-                </a:solidFill>
-                <a:latin typeface="微软雅黑" panose="020B0503020204020204" pitchFamily="34" charset="-122"/>
-                <a:ea typeface="微软雅黑" panose="020B0503020204020204" pitchFamily="34" charset="-122"/>
-                <a:cs typeface="FZYaYiHei GB18030L2 R" panose="02000500000000000000" charset="-122"/>
-              </a:endParaRPr>
-            </a:p>
-            <a:p>
-              <a:pPr marL="171450" indent="-171450" algn="l">
-                <a:buFont typeface="Wingdings" panose="05000000000000000000" charset="0"/>
-                <a:buChar char="Ø"/>
-                <a:defRPr/>
-              </a:pPr>
-              <a:endParaRPr sz="1400" b="0" i="0" strike="noStrike">
-                <a:solidFill>
-                  <a:srgbClr val="0A1F3D">
-                    <a:alpha val="85098"/>
-                  </a:srgbClr>
-                </a:solidFill>
-                <a:latin typeface="微软雅黑" panose="020B0503020204020204" pitchFamily="34" charset="-122"/>
-                <a:ea typeface="微软雅黑" panose="020B0503020204020204" pitchFamily="34" charset="-122"/>
-                <a:cs typeface="FZYaYiHei GB18030L2 R" panose="02000500000000000000" charset="-122"/>
-              </a:endParaRPr>
-            </a:p>
-            <a:p>
-              <a:pPr marL="171450" indent="-171450" algn="l">
-                <a:buFont typeface="Wingdings" panose="05000000000000000000" charset="0"/>
-                <a:buChar char="Ø"/>
-                <a:defRPr/>
-              </a:pPr>
-              <a:r>
-                <a:rPr lang="en-US" sz="1400">
-                  <a:solidFill>
-                    <a:srgbClr val="0A1F3D">
-                      <a:alpha val="85098"/>
-                    </a:srgbClr>
-                  </a:solidFill>
-                  <a:latin typeface="微软雅黑" panose="020B0503020204020204" pitchFamily="34" charset="-122"/>
-                  <a:ea typeface="微软雅黑" panose="020B0503020204020204" pitchFamily="34" charset="-122"/>
-                  <a:cs typeface="微软雅黑" panose="020B0503020204020204" pitchFamily="34" charset="-122"/>
-                  <a:sym typeface="+mn-ea"/>
-                </a:rPr>
-                <a:t>准确度要求大于90%时采用此模式，兼顾大模型</a:t>
-              </a:r>
-              <a:r>
-                <a:rPr sz="1400">
-                  <a:solidFill>
-                    <a:srgbClr val="0A1F3D">
-                      <a:alpha val="85098"/>
-                    </a:srgbClr>
-                  </a:solidFill>
-                  <a:latin typeface="微软雅黑" panose="020B0503020204020204" pitchFamily="34" charset="-122"/>
-                  <a:ea typeface="微软雅黑" panose="020B0503020204020204" pitchFamily="34" charset="-122"/>
-                  <a:cs typeface="微软雅黑" panose="020B0503020204020204" pitchFamily="34" charset="-122"/>
-                  <a:sym typeface="+mn-ea"/>
-                </a:rPr>
-                <a:t>的灵活性与本体的严格校验，形成生成-验证闭环。</a:t>
-              </a:r>
-              <a:endParaRPr sz="1400" b="0" i="0" strike="noStrike">
-                <a:solidFill>
-                  <a:srgbClr val="0A1F3D">
-                    <a:alpha val="85098"/>
-                  </a:srgbClr>
-                </a:solidFill>
-                <a:latin typeface="微软雅黑" panose="020B0503020204020204" pitchFamily="34" charset="-122"/>
-                <a:ea typeface="微软雅黑" panose="020B0503020204020204" pitchFamily="34" charset="-122"/>
-                <a:cs typeface="微软雅黑" panose="020B0503020204020204" pitchFamily="34" charset="-122"/>
-              </a:endParaRPr>
-            </a:p>
-            <a:p>
-              <a:pPr algn="l">
-                <a:defRPr/>
-              </a:pPr>
-              <a:endParaRPr sz="1400" b="0" i="0" strike="noStrike">
-                <a:solidFill>
-                  <a:srgbClr val="0A1F3D">
-                    <a:alpha val="85098"/>
-                  </a:srgbClr>
-                </a:solidFill>
-                <a:latin typeface="微软雅黑" panose="020B0503020204020204" pitchFamily="34" charset="-122"/>
-                <a:ea typeface="微软雅黑" panose="020B0503020204020204" pitchFamily="34" charset="-122"/>
-                <a:cs typeface="微软雅黑" panose="020B0503020204020204" pitchFamily="34" charset="-122"/>
-              </a:endParaRPr>
-            </a:p>
-          </p:txBody>
-        </p:sp>
-        <p:sp>
-          <p:nvSpPr>
-            <p:cNvPr id="36" name="AutoShape 36"/>
-            <p:cNvSpPr/>
-            <p:nvPr>
-              <p:custDataLst>
-                <p:tags r:id="rId19"/>
-              </p:custDataLst>
-            </p:nvPr>
-          </p:nvSpPr>
-          <p:spPr>
-            <a:xfrm>
-              <a:off x="12677" y="4171"/>
-              <a:ext cx="5558" cy="6209"/>
-            </a:xfrm>
-            <a:prstGeom prst="roundRect">
-              <a:avLst>
-                <a:gd name="adj" fmla="val 1258"/>
-              </a:avLst>
-            </a:prstGeom>
-            <a:solidFill>
-              <a:srgbClr val="FFFFFF">
-                <a:alpha val="100000"/>
-              </a:srgbClr>
-            </a:solidFill>
-            <a:ln w="9525">
-              <a:solidFill>
-                <a:srgbClr val="E2E6EA">
-                  <a:alpha val="100000"/>
-                </a:srgbClr>
-              </a:solidFill>
-              <a:prstDash val="solid"/>
-              <a:headEnd type="none"/>
-              <a:tailEnd type="none"/>
-            </a:ln>
-          </p:spPr>
-        </p:sp>
-        <p:sp>
-          <p:nvSpPr>
-            <p:cNvPr id="37" name="AutoShape 37"/>
-            <p:cNvSpPr/>
-            <p:nvPr>
-              <p:custDataLst>
-                <p:tags r:id="rId20"/>
-              </p:custDataLst>
-            </p:nvPr>
-          </p:nvSpPr>
-          <p:spPr>
-            <a:xfrm>
-              <a:off x="13052" y="4186"/>
-              <a:ext cx="4814" cy="60"/>
-            </a:xfrm>
-            <a:prstGeom prst="rect">
-              <a:avLst/>
-            </a:prstGeom>
-            <a:solidFill>
-              <a:srgbClr val="C00000"/>
-            </a:solidFill>
-            <a:ln>
-              <a:headEnd type="none"/>
-              <a:tailEnd type="none"/>
-            </a:ln>
-          </p:spPr>
-        </p:sp>
-        <p:sp>
-          <p:nvSpPr>
-            <p:cNvPr id="38" name="AutoShape 38"/>
-            <p:cNvSpPr/>
-            <p:nvPr>
-              <p:custDataLst>
-                <p:tags r:id="rId21"/>
-              </p:custDataLst>
-            </p:nvPr>
-          </p:nvSpPr>
-          <p:spPr>
-            <a:xfrm>
-              <a:off x="13052" y="4875"/>
-              <a:ext cx="780" cy="780"/>
-            </a:xfrm>
-            <a:prstGeom prst="ellipse">
-              <a:avLst/>
-            </a:prstGeom>
-            <a:solidFill>
-              <a:srgbClr val="C00000"/>
-            </a:solidFill>
-            <a:ln>
-              <a:headEnd type="none"/>
-              <a:tailEnd type="none"/>
-            </a:ln>
-          </p:spPr>
-        </p:sp>
-        <p:sp>
-          <p:nvSpPr>
-            <p:cNvPr id="39" name="AutoShape 39"/>
-            <p:cNvSpPr/>
-            <p:nvPr>
-              <p:custDataLst>
-                <p:tags r:id="rId22"/>
-              </p:custDataLst>
-            </p:nvPr>
-          </p:nvSpPr>
-          <p:spPr>
-            <a:xfrm>
-              <a:off x="13277" y="5731"/>
-              <a:ext cx="330" cy="330"/>
-            </a:xfrm>
-            <a:custGeom>
-              <a:avLst/>
-              <a:gdLst/>
-              <a:ahLst/>
-              <a:cxnLst/>
-              <a:rect l="l" t="t" r="r" b="b"/>
-              <a:pathLst>
-                <a:path w="9998" h="10000">
-                  <a:moveTo>
-                    <a:pt x="3031" y="7559"/>
-                  </a:moveTo>
-                  <a:lnTo>
-                    <a:pt x="2421" y="6949"/>
-                  </a:lnTo>
-                  <a:lnTo>
-                    <a:pt x="3031" y="7559"/>
-                  </a:lnTo>
-                  <a:lnTo>
-                    <a:pt x="2421" y="6949"/>
-                  </a:lnTo>
-                  <a:cubicBezTo>
-                    <a:pt x="2250" y="6765"/>
-                    <a:pt x="2197" y="6555"/>
-                    <a:pt x="2263" y="6319"/>
-                  </a:cubicBezTo>
-                  <a:cubicBezTo>
-                    <a:pt x="2329" y="6135"/>
-                    <a:pt x="2407" y="5912"/>
-                    <a:pt x="2499" y="5650"/>
-                  </a:cubicBezTo>
-                  <a:lnTo>
-                    <a:pt x="413" y="5650"/>
-                  </a:lnTo>
-                  <a:cubicBezTo>
-                    <a:pt x="229" y="5650"/>
-                    <a:pt x="92" y="5571"/>
-                    <a:pt x="0" y="5413"/>
-                  </a:cubicBezTo>
-                  <a:cubicBezTo>
-                    <a:pt x="-78" y="5255"/>
-                    <a:pt x="-78" y="5098"/>
-                    <a:pt x="0" y="4941"/>
-                  </a:cubicBezTo>
-                  <a:lnTo>
-                    <a:pt x="1043" y="3189"/>
-                  </a:lnTo>
-                  <a:cubicBezTo>
-                    <a:pt x="1318" y="2743"/>
-                    <a:pt x="1725" y="2513"/>
-                    <a:pt x="2263" y="2500"/>
-                  </a:cubicBezTo>
-                  <a:lnTo>
-                    <a:pt x="3877" y="2500"/>
-                  </a:lnTo>
-                  <a:cubicBezTo>
-                    <a:pt x="3929" y="2421"/>
-                    <a:pt x="3975" y="2349"/>
-                    <a:pt x="4015" y="2283"/>
-                  </a:cubicBezTo>
-                  <a:cubicBezTo>
-                    <a:pt x="4566" y="1495"/>
-                    <a:pt x="5170" y="931"/>
-                    <a:pt x="5826" y="591"/>
-                  </a:cubicBezTo>
-                  <a:cubicBezTo>
-                    <a:pt x="6482" y="249"/>
-                    <a:pt x="7131" y="52"/>
-                    <a:pt x="7774" y="0"/>
-                  </a:cubicBezTo>
-                  <a:cubicBezTo>
-                    <a:pt x="8416" y="-39"/>
-                    <a:pt x="8981" y="-13"/>
-                    <a:pt x="9467" y="79"/>
-                  </a:cubicBezTo>
-                  <a:cubicBezTo>
-                    <a:pt x="9703" y="144"/>
-                    <a:pt x="9853" y="295"/>
-                    <a:pt x="9919" y="531"/>
-                  </a:cubicBezTo>
-                  <a:cubicBezTo>
-                    <a:pt x="10011" y="1017"/>
-                    <a:pt x="10037" y="1581"/>
-                    <a:pt x="9998" y="2224"/>
-                  </a:cubicBezTo>
-                  <a:cubicBezTo>
-                    <a:pt x="9945" y="2867"/>
-                    <a:pt x="9748" y="3517"/>
-                    <a:pt x="9408" y="4173"/>
-                  </a:cubicBezTo>
-                  <a:cubicBezTo>
-                    <a:pt x="9066" y="4829"/>
-                    <a:pt x="8502" y="5432"/>
-                    <a:pt x="7715" y="5984"/>
-                  </a:cubicBezTo>
-                  <a:cubicBezTo>
-                    <a:pt x="7649" y="6023"/>
-                    <a:pt x="7577" y="6069"/>
-                    <a:pt x="7499" y="6122"/>
-                  </a:cubicBezTo>
-                  <a:lnTo>
-                    <a:pt x="7499" y="7736"/>
-                  </a:lnTo>
-                  <a:cubicBezTo>
-                    <a:pt x="7485" y="8274"/>
-                    <a:pt x="7256" y="8681"/>
-                    <a:pt x="6810" y="8957"/>
-                  </a:cubicBezTo>
-                  <a:lnTo>
-                    <a:pt x="5058" y="10000"/>
-                  </a:lnTo>
-                  <a:cubicBezTo>
-                    <a:pt x="4900" y="10078"/>
-                    <a:pt x="4743" y="10078"/>
-                    <a:pt x="4586" y="10000"/>
-                  </a:cubicBezTo>
-                  <a:cubicBezTo>
-                    <a:pt x="4428" y="9908"/>
-                    <a:pt x="4350" y="9770"/>
-                    <a:pt x="4350" y="9587"/>
-                  </a:cubicBezTo>
-                  <a:lnTo>
-                    <a:pt x="4350" y="7480"/>
-                  </a:lnTo>
-                  <a:cubicBezTo>
-                    <a:pt x="4074" y="7572"/>
-                    <a:pt x="3837" y="7651"/>
-                    <a:pt x="3641" y="7717"/>
-                  </a:cubicBezTo>
-                  <a:cubicBezTo>
-                    <a:pt x="3405" y="7782"/>
-                    <a:pt x="3201" y="7729"/>
-                    <a:pt x="3031" y="7559"/>
-                  </a:cubicBezTo>
-                  <a:moveTo>
-                    <a:pt x="7499" y="3287"/>
-                  </a:moveTo>
-                  <a:cubicBezTo>
-                    <a:pt x="7800" y="3274"/>
-                    <a:pt x="8029" y="3143"/>
-                    <a:pt x="8187" y="2894"/>
-                  </a:cubicBezTo>
-                  <a:cubicBezTo>
-                    <a:pt x="8318" y="2631"/>
-                    <a:pt x="8318" y="2368"/>
-                    <a:pt x="8187" y="2106"/>
-                  </a:cubicBezTo>
-                  <a:cubicBezTo>
-                    <a:pt x="8029" y="1856"/>
-                    <a:pt x="7800" y="1725"/>
-                    <a:pt x="7499" y="1713"/>
-                  </a:cubicBezTo>
-                  <a:cubicBezTo>
-                    <a:pt x="7197" y="1725"/>
-                    <a:pt x="6967" y="1856"/>
-                    <a:pt x="6810" y="2106"/>
-                  </a:cubicBezTo>
-                  <a:cubicBezTo>
-                    <a:pt x="6678" y="2368"/>
-                    <a:pt x="6678" y="2631"/>
-                    <a:pt x="6810" y="2894"/>
-                  </a:cubicBezTo>
-                  <a:cubicBezTo>
-                    <a:pt x="6967" y="3143"/>
-                    <a:pt x="7197" y="3274"/>
-                    <a:pt x="7499" y="3287"/>
-                  </a:cubicBezTo>
-                </a:path>
-              </a:pathLst>
-            </a:custGeom>
-            <a:solidFill>
-              <a:srgbClr val="FFFFFF">
-                <a:alpha val="100000"/>
-              </a:srgbClr>
-            </a:solidFill>
-            <a:ln>
-              <a:headEnd type="none"/>
-              <a:tailEnd type="none"/>
-            </a:ln>
-          </p:spPr>
-        </p:sp>
-        <p:sp>
-          <p:nvSpPr>
-            <p:cNvPr id="40" name="TextBox 40"/>
-            <p:cNvSpPr txBox="1"/>
-            <p:nvPr>
-              <p:custDataLst>
-                <p:tags r:id="rId23"/>
-              </p:custDataLst>
-            </p:nvPr>
-          </p:nvSpPr>
-          <p:spPr>
-            <a:xfrm>
-              <a:off x="14011" y="4695"/>
-              <a:ext cx="1113" cy="450"/>
-            </a:xfrm>
-            <a:prstGeom prst="rect">
-              <a:avLst/>
-            </a:prstGeom>
-            <a:ln>
-              <a:headEnd type="none"/>
-              <a:tailEnd type="none"/>
-            </a:ln>
-          </p:spPr>
-          <p:txBody>
-            <a:bodyPr vert="horz" wrap="none" lIns="0" tIns="0" rIns="0" bIns="0" rtlCol="0" anchor="t" anchorCtr="0"/>
-            <a:lstStyle/>
-            <a:p>
-              <a:pPr algn="l">
-                <a:defRPr/>
-              </a:pPr>
-              <a:r>
-                <a:rPr lang="en-US" sz="2000" b="1" i="0" strike="noStrike">
-                  <a:solidFill>
-                    <a:srgbClr val="C00000">
-                      <a:alpha val="100000"/>
-                    </a:srgbClr>
-                  </a:solidFill>
-                  <a:latin typeface="微软雅黑" panose="020B0503020204020204" pitchFamily="34" charset="-122"/>
-                  <a:ea typeface="微软雅黑" panose="020B0503020204020204" pitchFamily="34" charset="-122"/>
-                  <a:cs typeface="Inter" panose="02000503000000020004"/>
-                </a:rPr>
-                <a:t>~90%</a:t>
-              </a:r>
-              <a:endParaRPr lang="en-US" sz="2000" b="1" i="0" strike="noStrike">
-                <a:solidFill>
-                  <a:srgbClr val="C00000">
-                    <a:alpha val="100000"/>
-                  </a:srgbClr>
-                </a:solidFill>
-                <a:latin typeface="微软雅黑" panose="020B0503020204020204" pitchFamily="34" charset="-122"/>
-                <a:ea typeface="微软雅黑" panose="020B0503020204020204" pitchFamily="34" charset="-122"/>
-                <a:cs typeface="Inter" panose="02000503000000020004"/>
-              </a:endParaRPr>
-            </a:p>
-          </p:txBody>
-        </p:sp>
-        <p:sp>
-          <p:nvSpPr>
-            <p:cNvPr id="41" name="TextBox 41"/>
-            <p:cNvSpPr txBox="1"/>
-            <p:nvPr>
-              <p:custDataLst>
-                <p:tags r:id="rId24"/>
-              </p:custDataLst>
-            </p:nvPr>
-          </p:nvSpPr>
-          <p:spPr>
-            <a:xfrm>
-              <a:off x="14011" y="5248"/>
-              <a:ext cx="1008" cy="180"/>
-            </a:xfrm>
-            <a:prstGeom prst="rect">
-              <a:avLst/>
-            </a:prstGeom>
-            <a:ln>
-              <a:headEnd type="none"/>
-              <a:tailEnd type="none"/>
-            </a:ln>
-          </p:spPr>
-          <p:txBody>
-            <a:bodyPr vert="horz" wrap="none" lIns="0" tIns="0" rIns="0" bIns="0" rtlCol="0" anchor="t" anchorCtr="0"/>
-            <a:lstStyle/>
-            <a:p>
-              <a:pPr algn="l">
-                <a:defRPr/>
-              </a:pPr>
-              <a:r>
-                <a:rPr lang="en-US" sz="1000" b="1" i="0" strike="noStrike">
-                  <a:solidFill>
-                    <a:srgbClr val="C00000">
-                      <a:alpha val="50196"/>
-                    </a:srgbClr>
-                  </a:solidFill>
-                  <a:latin typeface="微软雅黑" panose="020B0503020204020204" pitchFamily="34" charset="-122"/>
-                  <a:ea typeface="微软雅黑" panose="020B0503020204020204" pitchFamily="34" charset="-122"/>
-                  <a:cs typeface="FZYaYiHei GB18030L2 R" panose="02000500000000000000" charset="-122"/>
-                </a:rPr>
-                <a:t>快速探索</a:t>
-              </a:r>
-              <a:endParaRPr lang="en-US" sz="1000" b="1" i="0" strike="noStrike">
-                <a:solidFill>
-                  <a:srgbClr val="C00000">
-                    <a:alpha val="50196"/>
-                  </a:srgbClr>
-                </a:solidFill>
-                <a:latin typeface="微软雅黑" panose="020B0503020204020204" pitchFamily="34" charset="-122"/>
-                <a:ea typeface="微软雅黑" panose="020B0503020204020204" pitchFamily="34" charset="-122"/>
-                <a:cs typeface="FZYaYiHei GB18030L2 R" panose="02000500000000000000" charset="-122"/>
-              </a:endParaRPr>
-            </a:p>
-          </p:txBody>
-        </p:sp>
-        <p:sp>
-          <p:nvSpPr>
-            <p:cNvPr id="42" name="TextBox 42"/>
-            <p:cNvSpPr txBox="1"/>
-            <p:nvPr>
-              <p:custDataLst>
-                <p:tags r:id="rId25"/>
-              </p:custDataLst>
-            </p:nvPr>
-          </p:nvSpPr>
-          <p:spPr>
-            <a:xfrm>
-              <a:off x="13070" y="6060"/>
-              <a:ext cx="4809" cy="330"/>
-            </a:xfrm>
-            <a:prstGeom prst="rect">
-              <a:avLst/>
-            </a:prstGeom>
-            <a:ln>
-              <a:headEnd type="none"/>
-              <a:tailEnd type="none"/>
-            </a:ln>
-          </p:spPr>
-          <p:txBody>
-            <a:bodyPr vert="horz" wrap="none" lIns="0" tIns="0" rIns="0" bIns="0" rtlCol="0" anchor="t" anchorCtr="0"/>
-            <a:lstStyle/>
-            <a:p>
-              <a:pPr algn="l">
-                <a:defRPr/>
-              </a:pPr>
-              <a:r>
-                <a:rPr lang="en-US" sz="1600" b="1" i="0" strike="noStrike">
-                  <a:solidFill>
-                    <a:srgbClr val="0A1F3D">
-                      <a:alpha val="100000"/>
-                    </a:srgbClr>
-                  </a:solidFill>
-                  <a:latin typeface="微软雅黑" panose="020B0503020204020204" pitchFamily="34" charset="-122"/>
-                  <a:ea typeface="微软雅黑" panose="020B0503020204020204" pitchFamily="34" charset="-122"/>
-                  <a:cs typeface="Alibaba PuHuiTi 3.0 55 Regular"/>
-                </a:rPr>
-                <a:t>低要求快速探索场景</a:t>
-              </a:r>
-              <a:endParaRPr lang="en-US" sz="1600" b="1" i="0" strike="noStrike">
-                <a:solidFill>
-                  <a:srgbClr val="0A1F3D">
-                    <a:alpha val="100000"/>
-                  </a:srgbClr>
-                </a:solidFill>
-                <a:latin typeface="微软雅黑" panose="020B0503020204020204" pitchFamily="34" charset="-122"/>
-                <a:ea typeface="微软雅黑" panose="020B0503020204020204" pitchFamily="34" charset="-122"/>
-                <a:cs typeface="Alibaba PuHuiTi 3.0 55 Regular"/>
-              </a:endParaRPr>
-            </a:p>
-          </p:txBody>
-        </p:sp>
-        <p:sp>
-          <p:nvSpPr>
-            <p:cNvPr id="44" name="TextBox 44"/>
-            <p:cNvSpPr txBox="1"/>
-            <p:nvPr>
-              <p:custDataLst>
-                <p:tags r:id="rId26"/>
-              </p:custDataLst>
-            </p:nvPr>
-          </p:nvSpPr>
-          <p:spPr>
-            <a:xfrm>
-              <a:off x="13023" y="6705"/>
-              <a:ext cx="4599" cy="2817"/>
-            </a:xfrm>
-            <a:prstGeom prst="rect">
-              <a:avLst/>
-            </a:prstGeom>
-            <a:ln>
-              <a:headEnd type="none"/>
-              <a:tailEnd type="none"/>
-            </a:ln>
-          </p:spPr>
-          <p:txBody>
-            <a:bodyPr vert="horz" wrap="square" lIns="0" tIns="0" rIns="0" bIns="0" rtlCol="0" anchor="t" anchorCtr="0"/>
-            <a:lstStyle/>
-            <a:p>
-              <a:pPr marL="285750" indent="-285750" algn="l">
-                <a:buFont typeface="Wingdings" panose="05000000000000000000" charset="0"/>
-                <a:buChar char="Ø"/>
-                <a:defRPr/>
-              </a:pPr>
-              <a:r>
-                <a:rPr lang="en-US" sz="1400" b="0" i="0" strike="noStrike">
-                  <a:solidFill>
-                    <a:srgbClr val="0A1F3D">
-                      <a:alpha val="85098"/>
-                    </a:srgbClr>
-                  </a:solidFill>
-                  <a:latin typeface="微软雅黑" panose="020B0503020204020204" pitchFamily="34" charset="-122"/>
-                  <a:ea typeface="微软雅黑" panose="020B0503020204020204" pitchFamily="34" charset="-122"/>
-                  <a:cs typeface="FZYaYiHei GB18030L2 R" panose="02000500000000000000" charset="-122"/>
-                </a:rPr>
-                <a:t>利用本体打造基础版本导入大模型，由大模型完</a:t>
-              </a:r>
-              <a:r>
-                <a:rPr sz="1400" b="0" i="0" strike="noStrike">
-                  <a:solidFill>
-                    <a:srgbClr val="0A1F3D">
-                      <a:alpha val="85098"/>
-                    </a:srgbClr>
-                  </a:solidFill>
-                  <a:latin typeface="微软雅黑" panose="020B0503020204020204" pitchFamily="34" charset="-122"/>
-                  <a:ea typeface="微软雅黑" panose="020B0503020204020204" pitchFamily="34" charset="-122"/>
-                  <a:cs typeface="FZYaYiHei GB18030L2 R" panose="02000500000000000000" charset="-122"/>
-                </a:rPr>
-                <a:t>成主要推理任务，本体框架仅做合理性检查而非精确验证。</a:t>
-              </a:r>
-              <a:endParaRPr sz="1400" b="0" i="0" strike="noStrike">
-                <a:solidFill>
-                  <a:srgbClr val="0A1F3D">
-                    <a:alpha val="85098"/>
-                  </a:srgbClr>
-                </a:solidFill>
-                <a:latin typeface="微软雅黑" panose="020B0503020204020204" pitchFamily="34" charset="-122"/>
-                <a:ea typeface="微软雅黑" panose="020B0503020204020204" pitchFamily="34" charset="-122"/>
-                <a:cs typeface="FZYaYiHei GB18030L2 R" panose="02000500000000000000" charset="-122"/>
-              </a:endParaRPr>
-            </a:p>
-            <a:p>
-              <a:pPr marL="285750" indent="-285750" algn="l">
-                <a:buFont typeface="Wingdings" panose="05000000000000000000" charset="0"/>
-                <a:buChar char="Ø"/>
-                <a:defRPr/>
-              </a:pPr>
-              <a:endParaRPr sz="1400" b="0" i="0" strike="noStrike">
-                <a:solidFill>
-                  <a:srgbClr val="0A1F3D">
-                    <a:alpha val="85098"/>
-                  </a:srgbClr>
-                </a:solidFill>
-                <a:latin typeface="微软雅黑" panose="020B0503020204020204" pitchFamily="34" charset="-122"/>
-                <a:ea typeface="微软雅黑" panose="020B0503020204020204" pitchFamily="34" charset="-122"/>
-                <a:cs typeface="FZYaYiHei GB18030L2 R" panose="02000500000000000000" charset="-122"/>
-              </a:endParaRPr>
-            </a:p>
-            <a:p>
-              <a:pPr marL="285750" indent="-285750" algn="l">
-                <a:buFont typeface="Wingdings" panose="05000000000000000000" charset="0"/>
-                <a:buChar char="Ø"/>
-                <a:defRPr/>
-              </a:pPr>
-              <a:r>
-                <a:rPr lang="en-US" sz="1400">
-                  <a:solidFill>
-                    <a:srgbClr val="0A1F3D">
-                      <a:alpha val="85098"/>
-                    </a:srgbClr>
-                  </a:solidFill>
-                  <a:latin typeface="微软雅黑" panose="020B0503020204020204" pitchFamily="34" charset="-122"/>
-                  <a:ea typeface="微软雅黑" panose="020B0503020204020204" pitchFamily="34" charset="-122"/>
-                  <a:cs typeface="FZYaYiHei GB18030L2 R" panose="02000500000000000000" charset="-122"/>
-                  <a:sym typeface="+mn-ea"/>
-                </a:rPr>
-                <a:t>适用于创意生成、内部探索、原型验证等容忍度</a:t>
-              </a:r>
-              <a:r>
-                <a:rPr sz="1400">
-                  <a:solidFill>
-                    <a:srgbClr val="0A1F3D">
-                      <a:alpha val="85098"/>
-                    </a:srgbClr>
-                  </a:solidFill>
-                  <a:latin typeface="微软雅黑" panose="020B0503020204020204" pitchFamily="34" charset="-122"/>
-                  <a:ea typeface="微软雅黑" panose="020B0503020204020204" pitchFamily="34" charset="-122"/>
-                  <a:cs typeface="FZYaYiHei GB18030L2 R" panose="02000500000000000000" charset="-122"/>
-                  <a:sym typeface="+mn-ea"/>
-                </a:rPr>
-                <a:t>较高的场景，以最低成本获得可用结果。</a:t>
-              </a:r>
-              <a:endParaRPr sz="1400" b="0" i="0" strike="noStrike">
-                <a:solidFill>
-                  <a:srgbClr val="0A1F3D">
-                    <a:alpha val="85098"/>
-                  </a:srgbClr>
-                </a:solidFill>
-                <a:latin typeface="微软雅黑" panose="020B0503020204020204" pitchFamily="34" charset="-122"/>
-                <a:ea typeface="微软雅黑" panose="020B0503020204020204" pitchFamily="34" charset="-122"/>
-                <a:cs typeface="FZYaYiHei GB18030L2 R" panose="02000500000000000000" charset="-122"/>
-              </a:endParaRPr>
-            </a:p>
-            <a:p>
-              <a:pPr algn="l">
-                <a:defRPr/>
-              </a:pPr>
-              <a:endParaRPr sz="1400" b="0" i="0" strike="noStrike">
-                <a:solidFill>
-                  <a:srgbClr val="0A1F3D">
-                    <a:alpha val="85098"/>
-                  </a:srgbClr>
-                </a:solidFill>
-                <a:latin typeface="微软雅黑" panose="020B0503020204020204" pitchFamily="34" charset="-122"/>
-                <a:ea typeface="微软雅黑" panose="020B0503020204020204" pitchFamily="34" charset="-122"/>
-                <a:cs typeface="FZYaYiHei GB18030L2 R" panose="02000500000000000000" charset="-122"/>
-              </a:endParaRPr>
-            </a:p>
-          </p:txBody>
-        </p:sp>
-        <p:sp>
-          <p:nvSpPr>
-            <p:cNvPr id="13" name="TextBox 13"/>
+            <p:cNvPr id="6" name="TextBox 13"/>
             <p:cNvSpPr txBox="1"/>
             <p:nvPr/>
           </p:nvSpPr>
           <p:spPr>
             <a:xfrm>
-              <a:off x="1275" y="2941"/>
-              <a:ext cx="16680" cy="604"/>
+              <a:off x="960" y="1524"/>
+              <a:ext cx="17127" cy="647"/>
             </a:xfrm>
             <a:prstGeom prst="rect">
               <a:avLst/>
@@ -15395,19 +13504,6 @@
                 <a:defRPr/>
               </a:pPr>
               <a:r>
-                <a:rPr lang="en-US" sz="1600" b="0" i="1" strike="noStrike">
-                  <a:solidFill>
-                    <a:srgbClr val="0A1F3D">
-                      <a:alpha val="81960"/>
-                    </a:srgbClr>
-                  </a:solidFill>
-                  <a:latin typeface="微软雅黑" panose="020B0503020204020204" pitchFamily="34" charset="-122"/>
-                  <a:ea typeface="微软雅黑" panose="020B0503020204020204" pitchFamily="34" charset="-122"/>
-                  <a:cs typeface="微软雅黑" panose="020B0503020204020204" pitchFamily="34" charset="-122"/>
-                </a:rPr>
-                <a:t>根据业务准确度要求分为三档：</a:t>
-              </a:r>
-              <a:r>
                 <a:rPr lang="zh-CN" altLang="en-US" sz="1600" b="0" i="1" strike="noStrike">
                   <a:solidFill>
                     <a:srgbClr val="0A1F3D">
@@ -15418,35 +13514,24 @@
                   <a:ea typeface="微软雅黑" panose="020B0503020204020204" pitchFamily="34" charset="-122"/>
                   <a:cs typeface="微软雅黑" panose="020B0503020204020204" pitchFamily="34" charset="-122"/>
                 </a:rPr>
-                <a:t>完全可控</a:t>
+                <a:t>将业务场景按确定性拆分为双引擎驱动：确定性部分由本体独立完成推理、精度完全可控，大模型仅参与本体打磨而不介入运行时；不确定性部分由智能体主导推理，准确率超越资深专家。两引擎协同，兼顾刚性精度与弹性应变。</a:t>
               </a:r>
-              <a:r>
-                <a:rPr lang="en-US" sz="1600" b="0" i="1" strike="noStrike">
-                  <a:solidFill>
-                    <a:srgbClr val="0A1F3D">
-                      <a:alpha val="81960"/>
-                    </a:srgbClr>
-                  </a:solidFill>
-                  <a:latin typeface="微软雅黑" panose="020B0503020204020204" pitchFamily="34" charset="-122"/>
-                  <a:ea typeface="微软雅黑" panose="020B0503020204020204" pitchFamily="34" charset="-122"/>
-                  <a:cs typeface="微软雅黑" panose="020B0503020204020204" pitchFamily="34" charset="-122"/>
-                </a:rPr>
-                <a:t>场景由本体框架独立完成推理；高准确度场景采用大模型生成加本体验证的闭环模式；低要求场景由大模型主导推理、本体仅</a:t>
-              </a:r>
-              <a:r>
-                <a:rPr sz="1600" b="0" i="1" strike="noStrike">
-                  <a:solidFill>
-                    <a:srgbClr val="0A1F3D">
-                      <a:alpha val="81960"/>
-                    </a:srgbClr>
-                  </a:solidFill>
-                  <a:latin typeface="微软雅黑" panose="020B0503020204020204" pitchFamily="34" charset="-122"/>
-                  <a:ea typeface="微软雅黑" panose="020B0503020204020204" pitchFamily="34" charset="-122"/>
-                  <a:cs typeface="微软雅黑" panose="020B0503020204020204" pitchFamily="34" charset="-122"/>
-                </a:rPr>
-                <a:t>做合理性检查。</a:t>
-              </a:r>
-              <a:endParaRPr sz="1600" b="0" i="1" strike="noStrike">
+              <a:endParaRPr lang="zh-CN" altLang="en-US" sz="1600" b="0" i="1" strike="noStrike">
+                <a:solidFill>
+                  <a:srgbClr val="0A1F3D">
+                    <a:alpha val="81960"/>
+                  </a:srgbClr>
+                </a:solidFill>
+                <a:latin typeface="微软雅黑" panose="020B0503020204020204" pitchFamily="34" charset="-122"/>
+                <a:ea typeface="微软雅黑" panose="020B0503020204020204" pitchFamily="34" charset="-122"/>
+                <a:cs typeface="微软雅黑" panose="020B0503020204020204" pitchFamily="34" charset="-122"/>
+              </a:endParaRPr>
+            </a:p>
+            <a:p>
+              <a:pPr algn="l">
+                <a:defRPr/>
+              </a:pPr>
+              <a:endParaRPr lang="zh-CN" altLang="en-US" sz="1600" b="0" i="1" strike="noStrike">
                 <a:solidFill>
                   <a:srgbClr val="0A1F3D">
                     <a:alpha val="81960"/>
@@ -15460,6 +13545,1663 @@
           </p:txBody>
         </p:sp>
       </p:grpSp>
+      <p:sp>
+        <p:nvSpPr>
+          <p:cNvPr id="7" name="AutoShape 7"/>
+          <p:cNvSpPr/>
+          <p:nvPr/>
+        </p:nvSpPr>
+        <p:spPr>
+          <a:xfrm>
+            <a:off x="418996" y="1676658"/>
+            <a:ext cx="5561209" cy="4847332"/>
+          </a:xfrm>
+          <a:prstGeom prst="rect">
+            <a:avLst/>
+          </a:prstGeom>
+          <a:solidFill>
+            <a:schemeClr val="bg1"/>
+          </a:solidFill>
+          <a:ln w="9525">
+            <a:solidFill>
+              <a:srgbClr val="D4CEC4">
+                <a:alpha val="100000"/>
+              </a:srgbClr>
+            </a:solidFill>
+            <a:prstDash val="solid"/>
+            <a:headEnd type="none"/>
+            <a:tailEnd type="none"/>
+          </a:ln>
+        </p:spPr>
+      </p:sp>
+      <p:sp>
+        <p:nvSpPr>
+          <p:cNvPr id="8" name="AutoShape 8"/>
+          <p:cNvSpPr/>
+          <p:nvPr/>
+        </p:nvSpPr>
+        <p:spPr>
+          <a:xfrm>
+            <a:off x="418996" y="1676658"/>
+            <a:ext cx="5561209" cy="9525"/>
+          </a:xfrm>
+          <a:prstGeom prst="line">
+            <a:avLst/>
+          </a:prstGeom>
+          <a:ln w="28575">
+            <a:solidFill>
+              <a:srgbClr val="C00000">
+                <a:alpha val="100000"/>
+              </a:srgbClr>
+            </a:solidFill>
+            <a:prstDash val="solid"/>
+            <a:headEnd type="none"/>
+            <a:tailEnd type="none"/>
+          </a:ln>
+        </p:spPr>
+      </p:sp>
+      <p:sp>
+        <p:nvSpPr>
+          <p:cNvPr id="9" name="AutoShape 9"/>
+          <p:cNvSpPr/>
+          <p:nvPr/>
+        </p:nvSpPr>
+        <p:spPr>
+          <a:xfrm>
+            <a:off x="583037" y="1910020"/>
+            <a:ext cx="152362" cy="152400"/>
+          </a:xfrm>
+          <a:custGeom>
+            <a:avLst/>
+            <a:gdLst/>
+            <a:ahLst/>
+            <a:cxnLst/>
+            <a:rect l="l" t="t" r="r" b="b"/>
+            <a:pathLst>
+              <a:path w="9998" h="10000">
+                <a:moveTo>
+                  <a:pt x="1111" y="3853"/>
+                </a:moveTo>
+                <a:lnTo>
+                  <a:pt x="1111" y="5000"/>
+                </a:lnTo>
+                <a:cubicBezTo>
+                  <a:pt x="1111" y="5091"/>
+                  <a:pt x="1177" y="5200"/>
+                  <a:pt x="1311" y="5326"/>
+                </a:cubicBezTo>
+                <a:cubicBezTo>
+                  <a:pt x="1466" y="5466"/>
+                  <a:pt x="1684" y="5603"/>
+                  <a:pt x="1966" y="5737"/>
+                </a:cubicBezTo>
+                <a:cubicBezTo>
+                  <a:pt x="2351" y="5919"/>
+                  <a:pt x="2807" y="6061"/>
+                  <a:pt x="3333" y="6163"/>
+                </a:cubicBezTo>
+                <a:cubicBezTo>
+                  <a:pt x="3858" y="6265"/>
+                  <a:pt x="4413" y="6316"/>
+                  <a:pt x="4999" y="6316"/>
+                </a:cubicBezTo>
+                <a:cubicBezTo>
+                  <a:pt x="5584" y="6316"/>
+                  <a:pt x="6139" y="6265"/>
+                  <a:pt x="6665" y="6163"/>
+                </a:cubicBezTo>
+                <a:cubicBezTo>
+                  <a:pt x="7191" y="6061"/>
+                  <a:pt x="7646" y="5919"/>
+                  <a:pt x="8032" y="5737"/>
+                </a:cubicBezTo>
+                <a:cubicBezTo>
+                  <a:pt x="8313" y="5603"/>
+                  <a:pt x="8531" y="5466"/>
+                  <a:pt x="8687" y="5326"/>
+                </a:cubicBezTo>
+                <a:cubicBezTo>
+                  <a:pt x="8820" y="5200"/>
+                  <a:pt x="8887" y="5091"/>
+                  <a:pt x="8887" y="5000"/>
+                </a:cubicBezTo>
+                <a:lnTo>
+                  <a:pt x="8887" y="3853"/>
+                </a:lnTo>
+                <a:cubicBezTo>
+                  <a:pt x="8420" y="4126"/>
+                  <a:pt x="7853" y="4340"/>
+                  <a:pt x="7187" y="4495"/>
+                </a:cubicBezTo>
+                <a:cubicBezTo>
+                  <a:pt x="6498" y="4656"/>
+                  <a:pt x="5769" y="4737"/>
+                  <a:pt x="4999" y="4737"/>
+                </a:cubicBezTo>
+                <a:cubicBezTo>
+                  <a:pt x="4229" y="4737"/>
+                  <a:pt x="3499" y="4656"/>
+                  <a:pt x="2811" y="4495"/>
+                </a:cubicBezTo>
+                <a:cubicBezTo>
+                  <a:pt x="2144" y="4340"/>
+                  <a:pt x="1577" y="4126"/>
+                  <a:pt x="1111" y="3853"/>
+                </a:cubicBezTo>
+                <a:moveTo>
+                  <a:pt x="8887" y="7632"/>
+                </a:moveTo>
+                <a:lnTo>
+                  <a:pt x="8887" y="6484"/>
+                </a:lnTo>
+                <a:cubicBezTo>
+                  <a:pt x="8420" y="6758"/>
+                  <a:pt x="7853" y="6972"/>
+                  <a:pt x="7187" y="7126"/>
+                </a:cubicBezTo>
+                <a:cubicBezTo>
+                  <a:pt x="6498" y="7287"/>
+                  <a:pt x="5769" y="7368"/>
+                  <a:pt x="4999" y="7368"/>
+                </a:cubicBezTo>
+                <a:cubicBezTo>
+                  <a:pt x="4229" y="7368"/>
+                  <a:pt x="3499" y="7287"/>
+                  <a:pt x="2811" y="7126"/>
+                </a:cubicBezTo>
+                <a:cubicBezTo>
+                  <a:pt x="2144" y="6972"/>
+                  <a:pt x="1577" y="6758"/>
+                  <a:pt x="1111" y="6484"/>
+                </a:cubicBezTo>
+                <a:lnTo>
+                  <a:pt x="1111" y="7632"/>
+                </a:lnTo>
+                <a:cubicBezTo>
+                  <a:pt x="1111" y="7722"/>
+                  <a:pt x="1177" y="7831"/>
+                  <a:pt x="1311" y="7958"/>
+                </a:cubicBezTo>
+                <a:cubicBezTo>
+                  <a:pt x="1466" y="8098"/>
+                  <a:pt x="1684" y="8234"/>
+                  <a:pt x="1966" y="8368"/>
+                </a:cubicBezTo>
+                <a:cubicBezTo>
+                  <a:pt x="2351" y="8550"/>
+                  <a:pt x="2807" y="8693"/>
+                  <a:pt x="3333" y="8795"/>
+                </a:cubicBezTo>
+                <a:cubicBezTo>
+                  <a:pt x="3858" y="8896"/>
+                  <a:pt x="4413" y="8947"/>
+                  <a:pt x="4999" y="8947"/>
+                </a:cubicBezTo>
+                <a:cubicBezTo>
+                  <a:pt x="5584" y="8947"/>
+                  <a:pt x="6139" y="8896"/>
+                  <a:pt x="6665" y="8795"/>
+                </a:cubicBezTo>
+                <a:cubicBezTo>
+                  <a:pt x="7191" y="8693"/>
+                  <a:pt x="7646" y="8550"/>
+                  <a:pt x="8032" y="8368"/>
+                </a:cubicBezTo>
+                <a:cubicBezTo>
+                  <a:pt x="8313" y="8234"/>
+                  <a:pt x="8531" y="8098"/>
+                  <a:pt x="8687" y="7958"/>
+                </a:cubicBezTo>
+                <a:cubicBezTo>
+                  <a:pt x="8820" y="7831"/>
+                  <a:pt x="8887" y="7722"/>
+                  <a:pt x="8887" y="7632"/>
+                </a:cubicBezTo>
+                <a:moveTo>
+                  <a:pt x="0" y="7632"/>
+                </a:moveTo>
+                <a:lnTo>
+                  <a:pt x="0" y="2368"/>
+                </a:lnTo>
+                <a:cubicBezTo>
+                  <a:pt x="0" y="1940"/>
+                  <a:pt x="226" y="1540"/>
+                  <a:pt x="678" y="1168"/>
+                </a:cubicBezTo>
+                <a:cubicBezTo>
+                  <a:pt x="1122" y="817"/>
+                  <a:pt x="1721" y="536"/>
+                  <a:pt x="2477" y="326"/>
+                </a:cubicBezTo>
+                <a:cubicBezTo>
+                  <a:pt x="3255" y="108"/>
+                  <a:pt x="4095" y="0"/>
+                  <a:pt x="4999" y="0"/>
+                </a:cubicBezTo>
+                <a:cubicBezTo>
+                  <a:pt x="5902" y="0"/>
+                  <a:pt x="6743" y="108"/>
+                  <a:pt x="7521" y="326"/>
+                </a:cubicBezTo>
+                <a:cubicBezTo>
+                  <a:pt x="8276" y="536"/>
+                  <a:pt x="8876" y="817"/>
+                  <a:pt x="9320" y="1168"/>
+                </a:cubicBezTo>
+                <a:cubicBezTo>
+                  <a:pt x="9772" y="1540"/>
+                  <a:pt x="9998" y="1940"/>
+                  <a:pt x="9998" y="2368"/>
+                </a:cubicBezTo>
+                <a:lnTo>
+                  <a:pt x="9998" y="7632"/>
+                </a:lnTo>
+                <a:cubicBezTo>
+                  <a:pt x="9998" y="8060"/>
+                  <a:pt x="9772" y="8460"/>
+                  <a:pt x="9320" y="8832"/>
+                </a:cubicBezTo>
+                <a:cubicBezTo>
+                  <a:pt x="8876" y="9182"/>
+                  <a:pt x="8276" y="9463"/>
+                  <a:pt x="7521" y="9674"/>
+                </a:cubicBezTo>
+                <a:cubicBezTo>
+                  <a:pt x="6743" y="9891"/>
+                  <a:pt x="5902" y="10000"/>
+                  <a:pt x="4999" y="10000"/>
+                </a:cubicBezTo>
+                <a:cubicBezTo>
+                  <a:pt x="4095" y="10000"/>
+                  <a:pt x="3255" y="9891"/>
+                  <a:pt x="2477" y="9674"/>
+                </a:cubicBezTo>
+                <a:cubicBezTo>
+                  <a:pt x="1721" y="9463"/>
+                  <a:pt x="1122" y="9182"/>
+                  <a:pt x="678" y="8832"/>
+                </a:cubicBezTo>
+                <a:cubicBezTo>
+                  <a:pt x="226" y="8460"/>
+                  <a:pt x="0" y="8060"/>
+                  <a:pt x="0" y="7632"/>
+                </a:cubicBezTo>
+                <a:moveTo>
+                  <a:pt x="4999" y="3684"/>
+                </a:moveTo>
+                <a:cubicBezTo>
+                  <a:pt x="5584" y="3684"/>
+                  <a:pt x="6139" y="3633"/>
+                  <a:pt x="6665" y="3532"/>
+                </a:cubicBezTo>
+                <a:cubicBezTo>
+                  <a:pt x="7191" y="3430"/>
+                  <a:pt x="7646" y="3287"/>
+                  <a:pt x="8032" y="3105"/>
+                </a:cubicBezTo>
+                <a:cubicBezTo>
+                  <a:pt x="8313" y="2971"/>
+                  <a:pt x="8531" y="2835"/>
+                  <a:pt x="8687" y="2695"/>
+                </a:cubicBezTo>
+                <a:cubicBezTo>
+                  <a:pt x="8820" y="2568"/>
+                  <a:pt x="8887" y="2459"/>
+                  <a:pt x="8887" y="2368"/>
+                </a:cubicBezTo>
+                <a:cubicBezTo>
+                  <a:pt x="8887" y="2277"/>
+                  <a:pt x="8820" y="2168"/>
+                  <a:pt x="8687" y="2042"/>
+                </a:cubicBezTo>
+                <a:cubicBezTo>
+                  <a:pt x="8531" y="1902"/>
+                  <a:pt x="8313" y="1765"/>
+                  <a:pt x="8032" y="1632"/>
+                </a:cubicBezTo>
+                <a:cubicBezTo>
+                  <a:pt x="7646" y="1449"/>
+                  <a:pt x="7191" y="1307"/>
+                  <a:pt x="6665" y="1205"/>
+                </a:cubicBezTo>
+                <a:cubicBezTo>
+                  <a:pt x="6139" y="1103"/>
+                  <a:pt x="5584" y="1053"/>
+                  <a:pt x="4999" y="1053"/>
+                </a:cubicBezTo>
+                <a:cubicBezTo>
+                  <a:pt x="4413" y="1053"/>
+                  <a:pt x="3858" y="1103"/>
+                  <a:pt x="3333" y="1205"/>
+                </a:cubicBezTo>
+                <a:cubicBezTo>
+                  <a:pt x="2807" y="1307"/>
+                  <a:pt x="2351" y="1449"/>
+                  <a:pt x="1966" y="1632"/>
+                </a:cubicBezTo>
+                <a:cubicBezTo>
+                  <a:pt x="1684" y="1765"/>
+                  <a:pt x="1466" y="1902"/>
+                  <a:pt x="1311" y="2042"/>
+                </a:cubicBezTo>
+                <a:cubicBezTo>
+                  <a:pt x="1177" y="2168"/>
+                  <a:pt x="1111" y="2277"/>
+                  <a:pt x="1111" y="2368"/>
+                </a:cubicBezTo>
+                <a:cubicBezTo>
+                  <a:pt x="1111" y="2459"/>
+                  <a:pt x="1177" y="2568"/>
+                  <a:pt x="1311" y="2695"/>
+                </a:cubicBezTo>
+                <a:cubicBezTo>
+                  <a:pt x="1466" y="2835"/>
+                  <a:pt x="1684" y="2971"/>
+                  <a:pt x="1966" y="3105"/>
+                </a:cubicBezTo>
+                <a:cubicBezTo>
+                  <a:pt x="2351" y="3287"/>
+                  <a:pt x="2807" y="3430"/>
+                  <a:pt x="3333" y="3532"/>
+                </a:cubicBezTo>
+                <a:cubicBezTo>
+                  <a:pt x="3858" y="3633"/>
+                  <a:pt x="4413" y="3684"/>
+                  <a:pt x="4999" y="3684"/>
+                </a:cubicBezTo>
+              </a:path>
+            </a:pathLst>
+          </a:custGeom>
+          <a:solidFill>
+            <a:srgbClr val="2B4C9B">
+              <a:alpha val="100000"/>
+            </a:srgbClr>
+          </a:solidFill>
+          <a:ln>
+            <a:solidFill>
+              <a:srgbClr val="C00000"/>
+            </a:solidFill>
+            <a:headEnd type="none"/>
+            <a:tailEnd type="none"/>
+          </a:ln>
+        </p:spPr>
+      </p:sp>
+      <p:sp>
+        <p:nvSpPr>
+          <p:cNvPr id="10" name="TextBox 10"/>
+          <p:cNvSpPr txBox="1"/>
+          <p:nvPr/>
+        </p:nvSpPr>
+        <p:spPr>
+          <a:xfrm>
+            <a:off x="794692" y="1886208"/>
+            <a:ext cx="1733266" cy="190500"/>
+          </a:xfrm>
+          <a:prstGeom prst="rect">
+            <a:avLst/>
+          </a:prstGeom>
+          <a:ln>
+            <a:headEnd type="none"/>
+            <a:tailEnd type="none"/>
+          </a:ln>
+        </p:spPr>
+        <p:txBody>
+          <a:bodyPr vert="horz" wrap="none" lIns="0" tIns="0" rIns="0" bIns="0" rtlCol="0" anchor="t" anchorCtr="0"/>
+          <a:lstStyle/>
+          <a:p>
+            <a:pPr algn="l">
+              <a:defRPr/>
+            </a:pPr>
+            <a:r>
+              <a:rPr lang="en-US" sz="1300" b="1" i="0" strike="noStrike">
+                <a:solidFill>
+                  <a:srgbClr val="1A1A1A">
+                    <a:alpha val="100000"/>
+                  </a:srgbClr>
+                </a:solidFill>
+                <a:latin typeface="Source Han Serif CN" panose="02020400000000000000" charset="-122"/>
+                <a:ea typeface="Source Han Serif CN" panose="02020400000000000000" charset="-122"/>
+                <a:cs typeface="Source Han Serif CN" panose="02020400000000000000" charset="-122"/>
+              </a:rPr>
+              <a:t>本体驱动 · 确定性场景</a:t>
+            </a:r>
+            <a:endParaRPr lang="en-US" sz="1100"/>
+          </a:p>
+        </p:txBody>
+      </p:sp>
+      <p:pic>
+        <p:nvPicPr>
+          <p:cNvPr id="11" name="Picture 11"/>
+          <p:cNvPicPr>
+            <a:picLocks noChangeAspect="1"/>
+          </p:cNvPicPr>
+          <p:nvPr/>
+        </p:nvPicPr>
+        <p:blipFill>
+          <a:blip r:embed="rId2">
+            <a:alphaModFix amt="100000"/>
+          </a:blip>
+          <a:srcRect/>
+          <a:stretch>
+            <a:fillRect/>
+          </a:stretch>
+        </p:blipFill>
+        <p:spPr>
+          <a:xfrm>
+            <a:off x="599925" y="2191008"/>
+            <a:ext cx="5199350" cy="1919735"/>
+          </a:xfrm>
+          <a:prstGeom prst="rect">
+            <a:avLst/>
+          </a:prstGeom>
+          <a:ln>
+            <a:headEnd type="none"/>
+            <a:tailEnd type="none"/>
+          </a:ln>
+        </p:spPr>
+      </p:pic>
+      <p:sp>
+        <p:nvSpPr>
+          <p:cNvPr id="12" name="TextBox 12"/>
+          <p:cNvSpPr txBox="1"/>
+          <p:nvPr/>
+        </p:nvSpPr>
+        <p:spPr>
+          <a:xfrm>
+            <a:off x="599925" y="4139317"/>
+            <a:ext cx="5199350" cy="133350"/>
+          </a:xfrm>
+          <a:prstGeom prst="rect">
+            <a:avLst/>
+          </a:prstGeom>
+          <a:ln>
+            <a:headEnd type="none"/>
+            <a:tailEnd type="none"/>
+          </a:ln>
+        </p:spPr>
+        <p:txBody>
+          <a:bodyPr vert="horz" wrap="none" lIns="0" tIns="0" rIns="0" bIns="0" rtlCol="0" anchor="t" anchorCtr="0"/>
+          <a:lstStyle/>
+          <a:p>
+            <a:pPr algn="l">
+              <a:defRPr/>
+            </a:pPr>
+            <a:r>
+              <a:rPr lang="zh-CN" altLang="en-US" sz="1200" b="1" i="0" strike="noStrike">
+                <a:solidFill>
+                  <a:schemeClr val="tx1">
+                    <a:alpha val="40000"/>
+                  </a:schemeClr>
+                </a:solidFill>
+                <a:latin typeface="微软雅黑" panose="020B0503020204020204" pitchFamily="34" charset="-122"/>
+                <a:ea typeface="微软雅黑" panose="020B0503020204020204" pitchFamily="34" charset="-122"/>
+                <a:cs typeface="Inter" panose="02000503000000020004"/>
+              </a:rPr>
+              <a:t>确定性</a:t>
+            </a:r>
+            <a:r>
+              <a:rPr lang="en-US" sz="1200" b="1" i="0" strike="noStrike">
+                <a:solidFill>
+                  <a:schemeClr val="tx1">
+                    <a:alpha val="40000"/>
+                  </a:schemeClr>
+                </a:solidFill>
+                <a:latin typeface="微软雅黑" panose="020B0503020204020204" pitchFamily="34" charset="-122"/>
+                <a:ea typeface="微软雅黑" panose="020B0503020204020204" pitchFamily="34" charset="-122"/>
+                <a:cs typeface="Inter" panose="02000503000000020004"/>
+              </a:rPr>
+              <a:t>工作场景</a:t>
+            </a:r>
+            <a:endParaRPr lang="en-US" sz="1200" b="1" i="0" strike="noStrike">
+              <a:solidFill>
+                <a:schemeClr val="tx1">
+                  <a:alpha val="40000"/>
+                </a:schemeClr>
+              </a:solidFill>
+              <a:latin typeface="微软雅黑" panose="020B0503020204020204" pitchFamily="34" charset="-122"/>
+              <a:ea typeface="微软雅黑" panose="020B0503020204020204" pitchFamily="34" charset="-122"/>
+              <a:cs typeface="Inter" panose="02000503000000020004"/>
+            </a:endParaRPr>
+          </a:p>
+        </p:txBody>
+      </p:sp>
+      <p:sp>
+        <p:nvSpPr>
+          <p:cNvPr id="21" name="AutoShape 13"/>
+          <p:cNvSpPr/>
+          <p:nvPr/>
+        </p:nvSpPr>
+        <p:spPr>
+          <a:xfrm>
+            <a:off x="599925" y="4477901"/>
+            <a:ext cx="9522" cy="400050"/>
+          </a:xfrm>
+          <a:prstGeom prst="line">
+            <a:avLst/>
+          </a:prstGeom>
+          <a:ln w="9525">
+            <a:solidFill>
+              <a:srgbClr val="C00000">
+                <a:alpha val="100000"/>
+              </a:srgbClr>
+            </a:solidFill>
+            <a:prstDash val="solid"/>
+            <a:headEnd type="none"/>
+            <a:tailEnd type="none"/>
+          </a:ln>
+        </p:spPr>
+      </p:sp>
+      <p:sp>
+        <p:nvSpPr>
+          <p:cNvPr id="23" name="TextBox 14"/>
+          <p:cNvSpPr txBox="1"/>
+          <p:nvPr/>
+        </p:nvSpPr>
+        <p:spPr>
+          <a:xfrm>
+            <a:off x="704673" y="4496951"/>
+            <a:ext cx="5275530" cy="352425"/>
+          </a:xfrm>
+          <a:prstGeom prst="rect">
+            <a:avLst/>
+          </a:prstGeom>
+          <a:ln>
+            <a:headEnd type="none"/>
+            <a:tailEnd type="none"/>
+          </a:ln>
+        </p:spPr>
+        <p:txBody>
+          <a:bodyPr vert="horz" wrap="square" lIns="0" tIns="0" rIns="0" bIns="0" rtlCol="0" anchor="t" anchorCtr="0"/>
+          <a:lstStyle/>
+          <a:p>
+            <a:pPr algn="l">
+              <a:defRPr/>
+            </a:pPr>
+            <a:r>
+              <a:rPr lang="en-US" sz="1000" b="0" i="0" strike="noStrike">
+                <a:solidFill>
+                  <a:schemeClr val="tx1">
+                    <a:alpha val="85098"/>
+                  </a:schemeClr>
+                </a:solidFill>
+                <a:latin typeface="微软雅黑" panose="020B0503020204020204" pitchFamily="34" charset="-122"/>
+                <a:ea typeface="微软雅黑" panose="020B0503020204020204" pitchFamily="34" charset="-122"/>
+                <a:cs typeface="FZYaYiHei GB18030L2 R" panose="02000500000000000000" charset="-122"/>
+              </a:rPr>
+              <a:t>确定性业务逻辑由本体框架独立完成推理，大模型不参与运行时执行，仅在前端通过语</a:t>
+            </a:r>
+            <a:endParaRPr lang="en-US" sz="1100">
+              <a:solidFill>
+                <a:schemeClr val="tx1"/>
+              </a:solidFill>
+              <a:latin typeface="微软雅黑" panose="020B0503020204020204" pitchFamily="34" charset="-122"/>
+              <a:ea typeface="微软雅黑" panose="020B0503020204020204" pitchFamily="34" charset="-122"/>
+            </a:endParaRPr>
+          </a:p>
+          <a:p>
+            <a:pPr algn="l"/>
+            <a:r>
+              <a:rPr sz="1000" b="0" i="0" strike="noStrike">
+                <a:solidFill>
+                  <a:schemeClr val="tx1">
+                    <a:alpha val="85098"/>
+                  </a:schemeClr>
+                </a:solidFill>
+                <a:latin typeface="微软雅黑" panose="020B0503020204020204" pitchFamily="34" charset="-122"/>
+                <a:ea typeface="微软雅黑" panose="020B0503020204020204" pitchFamily="34" charset="-122"/>
+                <a:cs typeface="FZYaYiHei GB18030L2 R" panose="02000500000000000000" charset="-122"/>
+              </a:rPr>
+              <a:t>料训练与提示词工程打磨本体结构</a:t>
+            </a:r>
+            <a:endParaRPr sz="1000" b="0" i="0" strike="noStrike">
+              <a:solidFill>
+                <a:schemeClr val="tx1">
+                  <a:alpha val="85098"/>
+                </a:schemeClr>
+              </a:solidFill>
+              <a:latin typeface="微软雅黑" panose="020B0503020204020204" pitchFamily="34" charset="-122"/>
+              <a:ea typeface="微软雅黑" panose="020B0503020204020204" pitchFamily="34" charset="-122"/>
+              <a:cs typeface="FZYaYiHei GB18030L2 R" panose="02000500000000000000" charset="-122"/>
+            </a:endParaRPr>
+          </a:p>
+        </p:txBody>
+      </p:sp>
+      <p:sp>
+        <p:nvSpPr>
+          <p:cNvPr id="24" name="AutoShape 15"/>
+          <p:cNvSpPr/>
+          <p:nvPr/>
+        </p:nvSpPr>
+        <p:spPr>
+          <a:xfrm>
+            <a:off x="599925" y="5172481"/>
+            <a:ext cx="9522" cy="400050"/>
+          </a:xfrm>
+          <a:prstGeom prst="line">
+            <a:avLst/>
+          </a:prstGeom>
+          <a:ln w="9525">
+            <a:solidFill>
+              <a:srgbClr val="C00000">
+                <a:alpha val="100000"/>
+              </a:srgbClr>
+            </a:solidFill>
+            <a:prstDash val="solid"/>
+            <a:headEnd type="none"/>
+            <a:tailEnd type="none"/>
+          </a:ln>
+        </p:spPr>
+      </p:sp>
+      <p:sp>
+        <p:nvSpPr>
+          <p:cNvPr id="32" name="TextBox 16"/>
+          <p:cNvSpPr txBox="1"/>
+          <p:nvPr/>
+        </p:nvSpPr>
+        <p:spPr>
+          <a:xfrm>
+            <a:off x="704673" y="5191531"/>
+            <a:ext cx="5275530" cy="352425"/>
+          </a:xfrm>
+          <a:prstGeom prst="rect">
+            <a:avLst/>
+          </a:prstGeom>
+          <a:ln>
+            <a:headEnd type="none"/>
+            <a:tailEnd type="none"/>
+          </a:ln>
+        </p:spPr>
+        <p:txBody>
+          <a:bodyPr vert="horz" wrap="square" lIns="0" tIns="0" rIns="0" bIns="0" rtlCol="0" anchor="t" anchorCtr="0"/>
+          <a:lstStyle/>
+          <a:p>
+            <a:pPr algn="l">
+              <a:defRPr/>
+            </a:pPr>
+            <a:r>
+              <a:rPr lang="en-US" sz="1000" b="0" i="0" strike="noStrike">
+                <a:solidFill>
+                  <a:schemeClr val="tx1">
+                    <a:alpha val="85098"/>
+                  </a:schemeClr>
+                </a:solidFill>
+                <a:latin typeface="微软雅黑" panose="020B0503020204020204" pitchFamily="34" charset="-122"/>
+                <a:ea typeface="微软雅黑" panose="020B0503020204020204" pitchFamily="34" charset="-122"/>
+                <a:cs typeface="微软雅黑" panose="020B0503020204020204" pitchFamily="34" charset="-122"/>
+              </a:rPr>
+              <a:t>推理精度100%完全可控，结果由形式化语义保证，适用于</a:t>
+            </a:r>
+            <a:r>
+              <a:rPr sz="1000" b="0" i="0" strike="noStrike">
+                <a:solidFill>
+                  <a:schemeClr val="tx1">
+                    <a:alpha val="85098"/>
+                  </a:schemeClr>
+                </a:solidFill>
+                <a:latin typeface="微软雅黑" panose="020B0503020204020204" pitchFamily="34" charset="-122"/>
+                <a:ea typeface="微软雅黑" panose="020B0503020204020204" pitchFamily="34" charset="-122"/>
+                <a:cs typeface="微软雅黑" panose="020B0503020204020204" pitchFamily="34" charset="-122"/>
+              </a:rPr>
+              <a:t>零容错领域</a:t>
+            </a:r>
+            <a:endParaRPr sz="1000" b="0" i="0" strike="noStrike">
+              <a:solidFill>
+                <a:schemeClr val="tx1">
+                  <a:alpha val="85098"/>
+                </a:schemeClr>
+              </a:solidFill>
+              <a:latin typeface="微软雅黑" panose="020B0503020204020204" pitchFamily="34" charset="-122"/>
+              <a:ea typeface="微软雅黑" panose="020B0503020204020204" pitchFamily="34" charset="-122"/>
+              <a:cs typeface="微软雅黑" panose="020B0503020204020204" pitchFamily="34" charset="-122"/>
+            </a:endParaRPr>
+          </a:p>
+        </p:txBody>
+      </p:sp>
+      <p:sp>
+        <p:nvSpPr>
+          <p:cNvPr id="34" name="AutoShape 17"/>
+          <p:cNvSpPr/>
+          <p:nvPr/>
+        </p:nvSpPr>
+        <p:spPr>
+          <a:xfrm>
+            <a:off x="599925" y="5867062"/>
+            <a:ext cx="9522" cy="400050"/>
+          </a:xfrm>
+          <a:prstGeom prst="line">
+            <a:avLst/>
+          </a:prstGeom>
+          <a:ln w="9525">
+            <a:solidFill>
+              <a:srgbClr val="C00000">
+                <a:alpha val="100000"/>
+              </a:srgbClr>
+            </a:solidFill>
+            <a:prstDash val="solid"/>
+            <a:headEnd type="none"/>
+            <a:tailEnd type="none"/>
+          </a:ln>
+        </p:spPr>
+      </p:sp>
+      <p:sp>
+        <p:nvSpPr>
+          <p:cNvPr id="35" name="TextBox 18"/>
+          <p:cNvSpPr txBox="1"/>
+          <p:nvPr/>
+        </p:nvSpPr>
+        <p:spPr>
+          <a:xfrm>
+            <a:off x="704673" y="5886112"/>
+            <a:ext cx="5275530" cy="352425"/>
+          </a:xfrm>
+          <a:prstGeom prst="rect">
+            <a:avLst/>
+          </a:prstGeom>
+          <a:ln>
+            <a:headEnd type="none"/>
+            <a:tailEnd type="none"/>
+          </a:ln>
+        </p:spPr>
+        <p:txBody>
+          <a:bodyPr vert="horz" wrap="square" lIns="0" tIns="0" rIns="0" bIns="0" rtlCol="0" anchor="t" anchorCtr="0"/>
+          <a:lstStyle/>
+          <a:p>
+            <a:pPr algn="l">
+              <a:defRPr/>
+            </a:pPr>
+            <a:r>
+              <a:rPr lang="en-US" sz="1000" b="0" i="0" strike="noStrike">
+                <a:solidFill>
+                  <a:schemeClr val="tx1">
+                    <a:alpha val="85098"/>
+                  </a:schemeClr>
+                </a:solidFill>
+                <a:latin typeface="微软雅黑" panose="020B0503020204020204" pitchFamily="34" charset="-122"/>
+                <a:ea typeface="微软雅黑" panose="020B0503020204020204" pitchFamily="34" charset="-122"/>
+                <a:cs typeface="FZYaYiHei GB18030L2 R" panose="02000500000000000000" charset="-122"/>
+              </a:rPr>
+              <a:t>本体构建完成即可脱离大模型独立运行，推理成本极低且延迟稳定，保障核心业务链路</a:t>
+            </a:r>
+            <a:endParaRPr lang="en-US" sz="1100">
+              <a:solidFill>
+                <a:schemeClr val="tx1"/>
+              </a:solidFill>
+              <a:latin typeface="微软雅黑" panose="020B0503020204020204" pitchFamily="34" charset="-122"/>
+              <a:ea typeface="微软雅黑" panose="020B0503020204020204" pitchFamily="34" charset="-122"/>
+            </a:endParaRPr>
+          </a:p>
+          <a:p>
+            <a:pPr algn="l"/>
+            <a:r>
+              <a:rPr sz="1000" b="0" i="0" strike="noStrike">
+                <a:solidFill>
+                  <a:schemeClr val="tx1">
+                    <a:alpha val="85098"/>
+                  </a:schemeClr>
+                </a:solidFill>
+                <a:latin typeface="微软雅黑" panose="020B0503020204020204" pitchFamily="34" charset="-122"/>
+                <a:ea typeface="微软雅黑" panose="020B0503020204020204" pitchFamily="34" charset="-122"/>
+                <a:cs typeface="FZYaYiHei GB18030L2 R" panose="02000500000000000000" charset="-122"/>
+              </a:rPr>
+              <a:t>的确定性与可审计性</a:t>
+            </a:r>
+            <a:endParaRPr sz="1000" b="0" i="0" strike="noStrike">
+              <a:solidFill>
+                <a:schemeClr val="tx1">
+                  <a:alpha val="85098"/>
+                </a:schemeClr>
+              </a:solidFill>
+              <a:latin typeface="微软雅黑" panose="020B0503020204020204" pitchFamily="34" charset="-122"/>
+              <a:ea typeface="微软雅黑" panose="020B0503020204020204" pitchFamily="34" charset="-122"/>
+              <a:cs typeface="FZYaYiHei GB18030L2 R" panose="02000500000000000000" charset="-122"/>
+            </a:endParaRPr>
+          </a:p>
+        </p:txBody>
+      </p:sp>
+      <p:sp>
+        <p:nvSpPr>
+          <p:cNvPr id="43" name="AutoShape 19"/>
+          <p:cNvSpPr/>
+          <p:nvPr/>
+        </p:nvSpPr>
+        <p:spPr>
+          <a:xfrm>
+            <a:off x="6208747" y="1676658"/>
+            <a:ext cx="5561209" cy="4847332"/>
+          </a:xfrm>
+          <a:prstGeom prst="rect">
+            <a:avLst/>
+          </a:prstGeom>
+          <a:solidFill>
+            <a:schemeClr val="bg1"/>
+          </a:solidFill>
+          <a:ln w="9525">
+            <a:solidFill>
+              <a:srgbClr val="D4CEC4">
+                <a:alpha val="100000"/>
+              </a:srgbClr>
+            </a:solidFill>
+            <a:prstDash val="solid"/>
+            <a:headEnd type="none"/>
+            <a:tailEnd type="none"/>
+          </a:ln>
+        </p:spPr>
+      </p:sp>
+      <p:sp>
+        <p:nvSpPr>
+          <p:cNvPr id="45" name="AutoShape 20"/>
+          <p:cNvSpPr/>
+          <p:nvPr/>
+        </p:nvSpPr>
+        <p:spPr>
+          <a:xfrm>
+            <a:off x="6208747" y="1676658"/>
+            <a:ext cx="5561209" cy="9525"/>
+          </a:xfrm>
+          <a:prstGeom prst="line">
+            <a:avLst/>
+          </a:prstGeom>
+          <a:ln w="28575">
+            <a:solidFill>
+              <a:srgbClr val="C00000">
+                <a:alpha val="100000"/>
+              </a:srgbClr>
+            </a:solidFill>
+            <a:prstDash val="solid"/>
+            <a:headEnd type="none"/>
+            <a:tailEnd type="none"/>
+          </a:ln>
+        </p:spPr>
+      </p:sp>
+      <p:sp>
+        <p:nvSpPr>
+          <p:cNvPr id="46" name="AutoShape 21"/>
+          <p:cNvSpPr/>
+          <p:nvPr/>
+        </p:nvSpPr>
+        <p:spPr>
+          <a:xfrm>
+            <a:off x="6372789" y="1910020"/>
+            <a:ext cx="152362" cy="152400"/>
+          </a:xfrm>
+          <a:custGeom>
+            <a:avLst/>
+            <a:gdLst/>
+            <a:ahLst/>
+            <a:cxnLst/>
+            <a:rect l="l" t="t" r="r" b="b"/>
+            <a:pathLst>
+              <a:path w="9998" h="10000">
+                <a:moveTo>
+                  <a:pt x="5624" y="737"/>
+                </a:moveTo>
+                <a:lnTo>
+                  <a:pt x="5624" y="727"/>
+                </a:lnTo>
+                <a:cubicBezTo>
+                  <a:pt x="5624" y="837"/>
+                  <a:pt x="5606" y="940"/>
+                  <a:pt x="5570" y="1035"/>
+                </a:cubicBezTo>
+                <a:cubicBezTo>
+                  <a:pt x="5534" y="1129"/>
+                  <a:pt x="5482" y="1208"/>
+                  <a:pt x="5416" y="1274"/>
+                </a:cubicBezTo>
+                <a:lnTo>
+                  <a:pt x="5416" y="2191"/>
+                </a:lnTo>
+                <a:lnTo>
+                  <a:pt x="7499" y="2191"/>
+                </a:lnTo>
+                <a:cubicBezTo>
+                  <a:pt x="7726" y="2191"/>
+                  <a:pt x="7936" y="2257"/>
+                  <a:pt x="8128" y="2391"/>
+                </a:cubicBezTo>
+                <a:cubicBezTo>
+                  <a:pt x="8319" y="2525"/>
+                  <a:pt x="8470" y="2704"/>
+                  <a:pt x="8582" y="2928"/>
+                </a:cubicBezTo>
+                <a:cubicBezTo>
+                  <a:pt x="8692" y="3152"/>
+                  <a:pt x="8748" y="3395"/>
+                  <a:pt x="8748" y="3655"/>
+                </a:cubicBezTo>
+                <a:lnTo>
+                  <a:pt x="8748" y="8536"/>
+                </a:lnTo>
+                <a:cubicBezTo>
+                  <a:pt x="8748" y="8802"/>
+                  <a:pt x="8692" y="9048"/>
+                  <a:pt x="8582" y="9273"/>
+                </a:cubicBezTo>
+                <a:cubicBezTo>
+                  <a:pt x="8470" y="9497"/>
+                  <a:pt x="8319" y="9676"/>
+                  <a:pt x="8128" y="9810"/>
+                </a:cubicBezTo>
+                <a:cubicBezTo>
+                  <a:pt x="7936" y="9943"/>
+                  <a:pt x="7726" y="10006"/>
+                  <a:pt x="7499" y="10000"/>
+                </a:cubicBezTo>
+                <a:lnTo>
+                  <a:pt x="2499" y="10000"/>
+                </a:lnTo>
+                <a:cubicBezTo>
+                  <a:pt x="2271" y="10006"/>
+                  <a:pt x="2062" y="9943"/>
+                  <a:pt x="1870" y="9810"/>
+                </a:cubicBezTo>
+                <a:cubicBezTo>
+                  <a:pt x="1678" y="9676"/>
+                  <a:pt x="1527" y="9497"/>
+                  <a:pt x="1416" y="9273"/>
+                </a:cubicBezTo>
+                <a:cubicBezTo>
+                  <a:pt x="1305" y="9048"/>
+                  <a:pt x="1250" y="8802"/>
+                  <a:pt x="1250" y="8536"/>
+                </a:cubicBezTo>
+                <a:lnTo>
+                  <a:pt x="1250" y="3655"/>
+                </a:lnTo>
+                <a:cubicBezTo>
+                  <a:pt x="1250" y="3395"/>
+                  <a:pt x="1305" y="3152"/>
+                  <a:pt x="1416" y="2928"/>
+                </a:cubicBezTo>
+                <a:cubicBezTo>
+                  <a:pt x="1527" y="2704"/>
+                  <a:pt x="1678" y="2525"/>
+                  <a:pt x="1870" y="2391"/>
+                </a:cubicBezTo>
+                <a:cubicBezTo>
+                  <a:pt x="2062" y="2257"/>
+                  <a:pt x="2271" y="2191"/>
+                  <a:pt x="2499" y="2191"/>
+                </a:cubicBezTo>
+                <a:lnTo>
+                  <a:pt x="4582" y="2191"/>
+                </a:lnTo>
+                <a:lnTo>
+                  <a:pt x="4582" y="1274"/>
+                </a:lnTo>
+                <a:cubicBezTo>
+                  <a:pt x="4515" y="1208"/>
+                  <a:pt x="4464" y="1129"/>
+                  <a:pt x="4428" y="1035"/>
+                </a:cubicBezTo>
+                <a:cubicBezTo>
+                  <a:pt x="4392" y="940"/>
+                  <a:pt x="4374" y="841"/>
+                  <a:pt x="4374" y="737"/>
+                </a:cubicBezTo>
+                <a:cubicBezTo>
+                  <a:pt x="4374" y="529"/>
+                  <a:pt x="4435" y="353"/>
+                  <a:pt x="4557" y="210"/>
+                </a:cubicBezTo>
+                <a:cubicBezTo>
+                  <a:pt x="4679" y="66"/>
+                  <a:pt x="4827" y="-3"/>
+                  <a:pt x="4999" y="0"/>
+                </a:cubicBezTo>
+                <a:cubicBezTo>
+                  <a:pt x="5171" y="3"/>
+                  <a:pt x="5318" y="75"/>
+                  <a:pt x="5441" y="215"/>
+                </a:cubicBezTo>
+                <a:cubicBezTo>
+                  <a:pt x="5563" y="355"/>
+                  <a:pt x="5624" y="529"/>
+                  <a:pt x="5624" y="737"/>
+                </a:cubicBezTo>
+                <a:moveTo>
+                  <a:pt x="7499" y="3167"/>
+                </a:moveTo>
+                <a:lnTo>
+                  <a:pt x="2499" y="3167"/>
+                </a:lnTo>
+                <a:cubicBezTo>
+                  <a:pt x="2383" y="3167"/>
+                  <a:pt x="2284" y="3216"/>
+                  <a:pt x="2204" y="3314"/>
+                </a:cubicBezTo>
+                <a:cubicBezTo>
+                  <a:pt x="2123" y="3411"/>
+                  <a:pt x="2083" y="3525"/>
+                  <a:pt x="2083" y="3655"/>
+                </a:cubicBezTo>
+                <a:lnTo>
+                  <a:pt x="2083" y="8536"/>
+                </a:lnTo>
+                <a:cubicBezTo>
+                  <a:pt x="2083" y="8672"/>
+                  <a:pt x="2123" y="8788"/>
+                  <a:pt x="2204" y="8882"/>
+                </a:cubicBezTo>
+                <a:cubicBezTo>
+                  <a:pt x="2284" y="8976"/>
+                  <a:pt x="2383" y="9024"/>
+                  <a:pt x="2499" y="9024"/>
+                </a:cubicBezTo>
+                <a:lnTo>
+                  <a:pt x="7499" y="9024"/>
+                </a:lnTo>
+                <a:cubicBezTo>
+                  <a:pt x="7615" y="9024"/>
+                  <a:pt x="7713" y="8976"/>
+                  <a:pt x="7794" y="8882"/>
+                </a:cubicBezTo>
+                <a:cubicBezTo>
+                  <a:pt x="7874" y="8788"/>
+                  <a:pt x="7915" y="8672"/>
+                  <a:pt x="7915" y="8536"/>
+                </a:cubicBezTo>
+                <a:lnTo>
+                  <a:pt x="7915" y="3655"/>
+                </a:lnTo>
+                <a:cubicBezTo>
+                  <a:pt x="7915" y="3525"/>
+                  <a:pt x="7874" y="3413"/>
+                  <a:pt x="7794" y="3319"/>
+                </a:cubicBezTo>
+                <a:cubicBezTo>
+                  <a:pt x="7713" y="3224"/>
+                  <a:pt x="7615" y="3173"/>
+                  <a:pt x="7499" y="3167"/>
+                </a:cubicBezTo>
+                <a:moveTo>
+                  <a:pt x="833" y="7560"/>
+                </a:moveTo>
+                <a:lnTo>
+                  <a:pt x="833" y="4632"/>
+                </a:lnTo>
+                <a:lnTo>
+                  <a:pt x="0" y="4632"/>
+                </a:lnTo>
+                <a:lnTo>
+                  <a:pt x="0" y="7560"/>
+                </a:lnTo>
+                <a:lnTo>
+                  <a:pt x="833" y="7560"/>
+                </a:lnTo>
+                <a:moveTo>
+                  <a:pt x="9165" y="7560"/>
+                </a:moveTo>
+                <a:lnTo>
+                  <a:pt x="9165" y="4632"/>
+                </a:lnTo>
+                <a:lnTo>
+                  <a:pt x="9998" y="4632"/>
+                </a:lnTo>
+                <a:lnTo>
+                  <a:pt x="9998" y="7560"/>
+                </a:lnTo>
+                <a:lnTo>
+                  <a:pt x="9165" y="7560"/>
+                </a:lnTo>
+                <a:moveTo>
+                  <a:pt x="3749" y="6828"/>
+                </a:moveTo>
+                <a:cubicBezTo>
+                  <a:pt x="3921" y="6834"/>
+                  <a:pt x="4069" y="6765"/>
+                  <a:pt x="4191" y="6623"/>
+                </a:cubicBezTo>
+                <a:cubicBezTo>
+                  <a:pt x="4313" y="6479"/>
+                  <a:pt x="4374" y="6305"/>
+                  <a:pt x="4374" y="6101"/>
+                </a:cubicBezTo>
+                <a:cubicBezTo>
+                  <a:pt x="4374" y="5895"/>
+                  <a:pt x="4313" y="5721"/>
+                  <a:pt x="4191" y="5578"/>
+                </a:cubicBezTo>
+                <a:cubicBezTo>
+                  <a:pt x="4069" y="5435"/>
+                  <a:pt x="3921" y="5365"/>
+                  <a:pt x="3749" y="5368"/>
+                </a:cubicBezTo>
+                <a:cubicBezTo>
+                  <a:pt x="3577" y="5371"/>
+                  <a:pt x="3430" y="5443"/>
+                  <a:pt x="3308" y="5583"/>
+                </a:cubicBezTo>
+                <a:cubicBezTo>
+                  <a:pt x="3185" y="5723"/>
+                  <a:pt x="3124" y="5895"/>
+                  <a:pt x="3124" y="6101"/>
+                </a:cubicBezTo>
+                <a:cubicBezTo>
+                  <a:pt x="3124" y="6305"/>
+                  <a:pt x="3185" y="6478"/>
+                  <a:pt x="3308" y="6618"/>
+                </a:cubicBezTo>
+                <a:cubicBezTo>
+                  <a:pt x="3430" y="6758"/>
+                  <a:pt x="3577" y="6828"/>
+                  <a:pt x="3749" y="6828"/>
+                </a:cubicBezTo>
+                <a:moveTo>
+                  <a:pt x="6249" y="6828"/>
+                </a:moveTo>
+                <a:cubicBezTo>
+                  <a:pt x="6421" y="6828"/>
+                  <a:pt x="6568" y="6758"/>
+                  <a:pt x="6690" y="6618"/>
+                </a:cubicBezTo>
+                <a:cubicBezTo>
+                  <a:pt x="6812" y="6478"/>
+                  <a:pt x="6874" y="6305"/>
+                  <a:pt x="6874" y="6101"/>
+                </a:cubicBezTo>
+                <a:cubicBezTo>
+                  <a:pt x="6874" y="5895"/>
+                  <a:pt x="6812" y="5721"/>
+                  <a:pt x="6690" y="5578"/>
+                </a:cubicBezTo>
+                <a:cubicBezTo>
+                  <a:pt x="6568" y="5435"/>
+                  <a:pt x="6421" y="5365"/>
+                  <a:pt x="6249" y="5368"/>
+                </a:cubicBezTo>
+                <a:cubicBezTo>
+                  <a:pt x="6076" y="5371"/>
+                  <a:pt x="5929" y="5443"/>
+                  <a:pt x="5807" y="5583"/>
+                </a:cubicBezTo>
+                <a:cubicBezTo>
+                  <a:pt x="5685" y="5723"/>
+                  <a:pt x="5624" y="5895"/>
+                  <a:pt x="5624" y="6101"/>
+                </a:cubicBezTo>
+                <a:cubicBezTo>
+                  <a:pt x="5624" y="6305"/>
+                  <a:pt x="5685" y="6478"/>
+                  <a:pt x="5807" y="6618"/>
+                </a:cubicBezTo>
+                <a:cubicBezTo>
+                  <a:pt x="5929" y="6758"/>
+                  <a:pt x="6076" y="6828"/>
+                  <a:pt x="6249" y="6828"/>
+                </a:cubicBezTo>
+              </a:path>
+            </a:pathLst>
+          </a:custGeom>
+          <a:solidFill>
+            <a:srgbClr val="2B4C9B">
+              <a:alpha val="100000"/>
+            </a:srgbClr>
+          </a:solidFill>
+          <a:ln>
+            <a:solidFill>
+              <a:srgbClr val="C00000"/>
+            </a:solidFill>
+            <a:headEnd type="none"/>
+            <a:tailEnd type="none"/>
+          </a:ln>
+        </p:spPr>
+      </p:sp>
+      <p:sp>
+        <p:nvSpPr>
+          <p:cNvPr id="47" name="TextBox 22"/>
+          <p:cNvSpPr txBox="1"/>
+          <p:nvPr/>
+        </p:nvSpPr>
+        <p:spPr>
+          <a:xfrm>
+            <a:off x="6584445" y="1886208"/>
+            <a:ext cx="2076079" cy="190500"/>
+          </a:xfrm>
+          <a:prstGeom prst="rect">
+            <a:avLst/>
+          </a:prstGeom>
+          <a:ln>
+            <a:headEnd type="none"/>
+            <a:tailEnd type="none"/>
+          </a:ln>
+        </p:spPr>
+        <p:txBody>
+          <a:bodyPr vert="horz" wrap="none" lIns="0" tIns="0" rIns="0" bIns="0" rtlCol="0" anchor="t" anchorCtr="0"/>
+          <a:lstStyle/>
+          <a:p>
+            <a:pPr algn="l">
+              <a:defRPr/>
+            </a:pPr>
+            <a:r>
+              <a:rPr lang="en-US" sz="1300" b="1" i="0" strike="noStrike">
+                <a:solidFill>
+                  <a:srgbClr val="1A1A1A">
+                    <a:alpha val="100000"/>
+                  </a:srgbClr>
+                </a:solidFill>
+                <a:latin typeface="Source Han Serif CN" panose="02020400000000000000" charset="-122"/>
+                <a:ea typeface="Source Han Serif CN" panose="02020400000000000000" charset="-122"/>
+                <a:cs typeface="Source Han Serif CN" panose="02020400000000000000" charset="-122"/>
+              </a:rPr>
+              <a:t>智能体驱动 · 不确定性场景</a:t>
+            </a:r>
+            <a:endParaRPr lang="en-US" sz="1100"/>
+          </a:p>
+        </p:txBody>
+      </p:sp>
+      <p:pic>
+        <p:nvPicPr>
+          <p:cNvPr id="48" name="Picture 23"/>
+          <p:cNvPicPr>
+            <a:picLocks noChangeAspect="1"/>
+          </p:cNvPicPr>
+          <p:nvPr/>
+        </p:nvPicPr>
+        <p:blipFill>
+          <a:blip r:embed="rId3">
+            <a:alphaModFix amt="100000"/>
+          </a:blip>
+          <a:srcRect/>
+          <a:stretch>
+            <a:fillRect/>
+          </a:stretch>
+        </p:blipFill>
+        <p:spPr>
+          <a:xfrm>
+            <a:off x="6389677" y="2191008"/>
+            <a:ext cx="5199350" cy="1919735"/>
+          </a:xfrm>
+          <a:prstGeom prst="rect">
+            <a:avLst/>
+          </a:prstGeom>
+          <a:ln>
+            <a:headEnd type="none"/>
+            <a:tailEnd type="none"/>
+          </a:ln>
+        </p:spPr>
+      </p:pic>
+      <p:sp>
+        <p:nvSpPr>
+          <p:cNvPr id="49" name="TextBox 24"/>
+          <p:cNvSpPr txBox="1"/>
+          <p:nvPr/>
+        </p:nvSpPr>
+        <p:spPr>
+          <a:xfrm>
+            <a:off x="6389677" y="4139317"/>
+            <a:ext cx="5199350" cy="133350"/>
+          </a:xfrm>
+          <a:prstGeom prst="rect">
+            <a:avLst/>
+          </a:prstGeom>
+          <a:ln>
+            <a:headEnd type="none"/>
+            <a:tailEnd type="none"/>
+          </a:ln>
+        </p:spPr>
+        <p:txBody>
+          <a:bodyPr vert="horz" wrap="none" lIns="0" tIns="0" rIns="0" bIns="0" rtlCol="0" anchor="t" anchorCtr="0"/>
+          <a:lstStyle/>
+          <a:p>
+            <a:pPr algn="l">
+              <a:defRPr/>
+            </a:pPr>
+            <a:r>
+              <a:rPr lang="zh-CN" altLang="en-US" sz="1200" b="1" i="0" strike="noStrike">
+                <a:solidFill>
+                  <a:schemeClr val="tx1">
+                    <a:alpha val="40000"/>
+                  </a:schemeClr>
+                </a:solidFill>
+                <a:latin typeface="微软雅黑" panose="020B0503020204020204" pitchFamily="34" charset="-122"/>
+                <a:ea typeface="微软雅黑" panose="020B0503020204020204" pitchFamily="34" charset="-122"/>
+                <a:cs typeface="Inter" panose="02000503000000020004"/>
+              </a:rPr>
+              <a:t>不确定性场景</a:t>
+            </a:r>
+            <a:endParaRPr lang="zh-CN" altLang="en-US" sz="1200" b="1" i="0" strike="noStrike">
+              <a:solidFill>
+                <a:schemeClr val="tx1">
+                  <a:alpha val="40000"/>
+                </a:schemeClr>
+              </a:solidFill>
+              <a:latin typeface="微软雅黑" panose="020B0503020204020204" pitchFamily="34" charset="-122"/>
+              <a:ea typeface="微软雅黑" panose="020B0503020204020204" pitchFamily="34" charset="-122"/>
+              <a:cs typeface="Inter" panose="02000503000000020004"/>
+            </a:endParaRPr>
+          </a:p>
+        </p:txBody>
+      </p:sp>
+      <p:sp>
+        <p:nvSpPr>
+          <p:cNvPr id="50" name="AutoShape 25"/>
+          <p:cNvSpPr/>
+          <p:nvPr/>
+        </p:nvSpPr>
+        <p:spPr>
+          <a:xfrm>
+            <a:off x="6389677" y="4477901"/>
+            <a:ext cx="9522" cy="400050"/>
+          </a:xfrm>
+          <a:prstGeom prst="line">
+            <a:avLst/>
+          </a:prstGeom>
+          <a:ln w="9525">
+            <a:solidFill>
+              <a:srgbClr val="C00000">
+                <a:alpha val="100000"/>
+              </a:srgbClr>
+            </a:solidFill>
+            <a:prstDash val="solid"/>
+            <a:headEnd type="none"/>
+            <a:tailEnd type="none"/>
+          </a:ln>
+        </p:spPr>
+      </p:sp>
+      <p:sp>
+        <p:nvSpPr>
+          <p:cNvPr id="51" name="TextBox 26"/>
+          <p:cNvSpPr txBox="1"/>
+          <p:nvPr/>
+        </p:nvSpPr>
+        <p:spPr>
+          <a:xfrm>
+            <a:off x="6494426" y="4496951"/>
+            <a:ext cx="5275530" cy="352425"/>
+          </a:xfrm>
+          <a:prstGeom prst="rect">
+            <a:avLst/>
+          </a:prstGeom>
+          <a:ln>
+            <a:headEnd type="none"/>
+            <a:tailEnd type="none"/>
+          </a:ln>
+        </p:spPr>
+        <p:txBody>
+          <a:bodyPr vert="horz" wrap="square" lIns="0" tIns="0" rIns="0" bIns="0" rtlCol="0" anchor="t" anchorCtr="0"/>
+          <a:lstStyle/>
+          <a:p>
+            <a:pPr algn="l">
+              <a:defRPr/>
+            </a:pPr>
+            <a:r>
+              <a:rPr lang="en-US" sz="1000" b="0" i="0" strike="noStrike">
+                <a:solidFill>
+                  <a:schemeClr val="tx1">
+                    <a:alpha val="85098"/>
+                  </a:schemeClr>
+                </a:solidFill>
+                <a:latin typeface="微软雅黑" panose="020B0503020204020204" pitchFamily="34" charset="-122"/>
+                <a:ea typeface="微软雅黑" panose="020B0503020204020204" pitchFamily="34" charset="-122"/>
+                <a:cs typeface="FZYaYiHei GB18030L2 R" panose="02000500000000000000" charset="-122"/>
+              </a:rPr>
+              <a:t>模糊需求、开放性推理与复杂决策由智能体主导完成，结合上下文理解、多步规划与工</a:t>
+            </a:r>
+            <a:endParaRPr lang="en-US" sz="1100">
+              <a:solidFill>
+                <a:schemeClr val="tx1"/>
+              </a:solidFill>
+              <a:latin typeface="微软雅黑" panose="020B0503020204020204" pitchFamily="34" charset="-122"/>
+              <a:ea typeface="微软雅黑" panose="020B0503020204020204" pitchFamily="34" charset="-122"/>
+            </a:endParaRPr>
+          </a:p>
+          <a:p>
+            <a:pPr algn="l"/>
+            <a:r>
+              <a:rPr sz="1000" b="0" i="0" strike="noStrike">
+                <a:solidFill>
+                  <a:schemeClr val="tx1">
+                    <a:alpha val="85098"/>
+                  </a:schemeClr>
+                </a:solidFill>
+                <a:latin typeface="微软雅黑" panose="020B0503020204020204" pitchFamily="34" charset="-122"/>
+                <a:ea typeface="微软雅黑" panose="020B0503020204020204" pitchFamily="34" charset="-122"/>
+                <a:cs typeface="FZYaYiHei GB18030L2 R" panose="02000500000000000000" charset="-122"/>
+              </a:rPr>
+              <a:t>具调用实现深度推理</a:t>
+            </a:r>
+            <a:r>
+              <a:rPr lang="zh-CN" sz="1000" b="0" i="0" strike="noStrike">
+                <a:solidFill>
+                  <a:schemeClr val="tx1">
+                    <a:alpha val="85098"/>
+                  </a:schemeClr>
+                </a:solidFill>
+                <a:latin typeface="微软雅黑" panose="020B0503020204020204" pitchFamily="34" charset="-122"/>
+                <a:ea typeface="微软雅黑" panose="020B0503020204020204" pitchFamily="34" charset="-122"/>
+                <a:cs typeface="FZYaYiHei GB18030L2 R" panose="02000500000000000000" charset="-122"/>
+              </a:rPr>
+              <a:t>，必要时人工</a:t>
+            </a:r>
+            <a:r>
+              <a:rPr lang="zh-CN" sz="1000" b="0" i="0" strike="noStrike">
+                <a:solidFill>
+                  <a:schemeClr val="tx1">
+                    <a:alpha val="85098"/>
+                  </a:schemeClr>
+                </a:solidFill>
+                <a:latin typeface="微软雅黑" panose="020B0503020204020204" pitchFamily="34" charset="-122"/>
+                <a:ea typeface="微软雅黑" panose="020B0503020204020204" pitchFamily="34" charset="-122"/>
+                <a:cs typeface="FZYaYiHei GB18030L2 R" panose="02000500000000000000" charset="-122"/>
+              </a:rPr>
+              <a:t>参与</a:t>
+            </a:r>
+            <a:endParaRPr lang="zh-CN" sz="1000" b="0" i="0" strike="noStrike">
+              <a:solidFill>
+                <a:schemeClr val="tx1">
+                  <a:alpha val="85098"/>
+                </a:schemeClr>
+              </a:solidFill>
+              <a:latin typeface="微软雅黑" panose="020B0503020204020204" pitchFamily="34" charset="-122"/>
+              <a:ea typeface="微软雅黑" panose="020B0503020204020204" pitchFamily="34" charset="-122"/>
+              <a:cs typeface="FZYaYiHei GB18030L2 R" panose="02000500000000000000" charset="-122"/>
+            </a:endParaRPr>
+          </a:p>
+        </p:txBody>
+      </p:sp>
+      <p:sp>
+        <p:nvSpPr>
+          <p:cNvPr id="52" name="AutoShape 27"/>
+          <p:cNvSpPr/>
+          <p:nvPr/>
+        </p:nvSpPr>
+        <p:spPr>
+          <a:xfrm>
+            <a:off x="6389677" y="5172481"/>
+            <a:ext cx="9522" cy="400050"/>
+          </a:xfrm>
+          <a:prstGeom prst="line">
+            <a:avLst/>
+          </a:prstGeom>
+          <a:ln w="9525">
+            <a:solidFill>
+              <a:srgbClr val="C00000">
+                <a:alpha val="100000"/>
+              </a:srgbClr>
+            </a:solidFill>
+            <a:prstDash val="solid"/>
+            <a:headEnd type="none"/>
+            <a:tailEnd type="none"/>
+          </a:ln>
+        </p:spPr>
+      </p:sp>
+      <p:sp>
+        <p:nvSpPr>
+          <p:cNvPr id="53" name="TextBox 28"/>
+          <p:cNvSpPr txBox="1"/>
+          <p:nvPr/>
+        </p:nvSpPr>
+        <p:spPr>
+          <a:xfrm>
+            <a:off x="6494426" y="5191531"/>
+            <a:ext cx="5275530" cy="352425"/>
+          </a:xfrm>
+          <a:prstGeom prst="rect">
+            <a:avLst/>
+          </a:prstGeom>
+          <a:ln>
+            <a:headEnd type="none"/>
+            <a:tailEnd type="none"/>
+          </a:ln>
+        </p:spPr>
+        <p:txBody>
+          <a:bodyPr vert="horz" wrap="square" lIns="0" tIns="0" rIns="0" bIns="0" rtlCol="0" anchor="t" anchorCtr="0"/>
+          <a:lstStyle/>
+          <a:p>
+            <a:pPr algn="l">
+              <a:defRPr/>
+            </a:pPr>
+            <a:r>
+              <a:rPr lang="en-US" sz="1000" b="0" i="0" strike="noStrike">
+                <a:solidFill>
+                  <a:schemeClr val="tx1">
+                    <a:alpha val="85098"/>
+                  </a:schemeClr>
+                </a:solidFill>
+                <a:latin typeface="微软雅黑" panose="020B0503020204020204" pitchFamily="34" charset="-122"/>
+                <a:ea typeface="微软雅黑" panose="020B0503020204020204" pitchFamily="34" charset="-122"/>
+                <a:cs typeface="FZYaYiHei GB18030L2 R" panose="02000500000000000000" charset="-122"/>
+              </a:rPr>
+              <a:t>推理准确率超过资深专家水平，智能体在本体知识骨架上进行合理性校验，避免幻觉并</a:t>
+            </a:r>
+            <a:endParaRPr lang="en-US" sz="1100">
+              <a:solidFill>
+                <a:schemeClr val="tx1"/>
+              </a:solidFill>
+              <a:latin typeface="微软雅黑" panose="020B0503020204020204" pitchFamily="34" charset="-122"/>
+              <a:ea typeface="微软雅黑" panose="020B0503020204020204" pitchFamily="34" charset="-122"/>
+            </a:endParaRPr>
+          </a:p>
+          <a:p>
+            <a:pPr algn="l"/>
+            <a:r>
+              <a:rPr sz="1000" b="0" i="0" strike="noStrike">
+                <a:solidFill>
+                  <a:schemeClr val="tx1">
+                    <a:alpha val="85098"/>
+                  </a:schemeClr>
+                </a:solidFill>
+                <a:latin typeface="微软雅黑" panose="020B0503020204020204" pitchFamily="34" charset="-122"/>
+                <a:ea typeface="微软雅黑" panose="020B0503020204020204" pitchFamily="34" charset="-122"/>
+                <a:cs typeface="FZYaYiHei GB18030L2 R" panose="02000500000000000000" charset="-122"/>
+              </a:rPr>
+              <a:t>确保输出质量</a:t>
+            </a:r>
+            <a:endParaRPr sz="1000" b="0" i="0" strike="noStrike">
+              <a:solidFill>
+                <a:schemeClr val="tx1">
+                  <a:alpha val="85098"/>
+                </a:schemeClr>
+              </a:solidFill>
+              <a:latin typeface="微软雅黑" panose="020B0503020204020204" pitchFamily="34" charset="-122"/>
+              <a:ea typeface="微软雅黑" panose="020B0503020204020204" pitchFamily="34" charset="-122"/>
+              <a:cs typeface="FZYaYiHei GB18030L2 R" panose="02000500000000000000" charset="-122"/>
+            </a:endParaRPr>
+          </a:p>
+        </p:txBody>
+      </p:sp>
+      <p:sp>
+        <p:nvSpPr>
+          <p:cNvPr id="54" name="AutoShape 29"/>
+          <p:cNvSpPr/>
+          <p:nvPr/>
+        </p:nvSpPr>
+        <p:spPr>
+          <a:xfrm>
+            <a:off x="6389677" y="5867062"/>
+            <a:ext cx="9522" cy="400050"/>
+          </a:xfrm>
+          <a:prstGeom prst="line">
+            <a:avLst/>
+          </a:prstGeom>
+          <a:ln w="9525">
+            <a:solidFill>
+              <a:srgbClr val="C00000">
+                <a:alpha val="100000"/>
+              </a:srgbClr>
+            </a:solidFill>
+            <a:prstDash val="solid"/>
+            <a:headEnd type="none"/>
+            <a:tailEnd type="none"/>
+          </a:ln>
+        </p:spPr>
+      </p:sp>
+      <p:sp>
+        <p:nvSpPr>
+          <p:cNvPr id="55" name="TextBox 30"/>
+          <p:cNvSpPr txBox="1"/>
+          <p:nvPr/>
+        </p:nvSpPr>
+        <p:spPr>
+          <a:xfrm>
+            <a:off x="6494426" y="5886112"/>
+            <a:ext cx="5275530" cy="352425"/>
+          </a:xfrm>
+          <a:prstGeom prst="rect">
+            <a:avLst/>
+          </a:prstGeom>
+          <a:ln>
+            <a:headEnd type="none"/>
+            <a:tailEnd type="none"/>
+          </a:ln>
+        </p:spPr>
+        <p:txBody>
+          <a:bodyPr vert="horz" wrap="square" lIns="0" tIns="0" rIns="0" bIns="0" rtlCol="0" anchor="t" anchorCtr="0"/>
+          <a:lstStyle/>
+          <a:p>
+            <a:pPr algn="l">
+              <a:defRPr/>
+            </a:pPr>
+            <a:r>
+              <a:rPr lang="en-US" sz="1000" b="0" i="0" strike="noStrike">
+                <a:solidFill>
+                  <a:schemeClr val="tx1">
+                    <a:alpha val="85098"/>
+                  </a:schemeClr>
+                </a:solidFill>
+                <a:latin typeface="微软雅黑" panose="020B0503020204020204" pitchFamily="34" charset="-122"/>
+                <a:ea typeface="微软雅黑" panose="020B0503020204020204" pitchFamily="34" charset="-122"/>
+                <a:cs typeface="FZYaYiHei GB18030L2 R" panose="02000500000000000000" charset="-122"/>
+              </a:rPr>
+              <a:t>适用于客户咨询、创意生成、方案探索等场景，以灵活应变弥补本体无法覆盖的长尾与</a:t>
+            </a:r>
+            <a:endParaRPr lang="en-US" sz="1100">
+              <a:solidFill>
+                <a:schemeClr val="tx1"/>
+              </a:solidFill>
+              <a:latin typeface="微软雅黑" panose="020B0503020204020204" pitchFamily="34" charset="-122"/>
+              <a:ea typeface="微软雅黑" panose="020B0503020204020204" pitchFamily="34" charset="-122"/>
+            </a:endParaRPr>
+          </a:p>
+          <a:p>
+            <a:pPr algn="l"/>
+            <a:r>
+              <a:rPr sz="1000" b="0" i="0" strike="noStrike">
+                <a:solidFill>
+                  <a:schemeClr val="tx1">
+                    <a:alpha val="85098"/>
+                  </a:schemeClr>
+                </a:solidFill>
+                <a:latin typeface="微软雅黑" panose="020B0503020204020204" pitchFamily="34" charset="-122"/>
+                <a:ea typeface="微软雅黑" panose="020B0503020204020204" pitchFamily="34" charset="-122"/>
+                <a:cs typeface="FZYaYiHei GB18030L2 R" panose="02000500000000000000" charset="-122"/>
+              </a:rPr>
+              <a:t>边界问题</a:t>
+            </a:r>
+            <a:endParaRPr sz="1000" b="0" i="0" strike="noStrike">
+              <a:solidFill>
+                <a:schemeClr val="tx1">
+                  <a:alpha val="85098"/>
+                </a:schemeClr>
+              </a:solidFill>
+              <a:latin typeface="微软雅黑" panose="020B0503020204020204" pitchFamily="34" charset="-122"/>
+              <a:ea typeface="微软雅黑" panose="020B0503020204020204" pitchFamily="34" charset="-122"/>
+              <a:cs typeface="FZYaYiHei GB18030L2 R" panose="02000500000000000000" charset="-122"/>
+            </a:endParaRPr>
+          </a:p>
+        </p:txBody>
+      </p:sp>
     </p:spTree>
   </p:cSld>
   <p:clrMapOvr>
@@ -22136,6 +21878,2118 @@
 </p:sld>
 </file>
 
+<file path=ppt/slides/slide9.xml><?xml version="1.0" encoding="utf-8"?>
+<p:sld xmlns:a="http://schemas.openxmlformats.org/drawingml/2006/main" xmlns:r="http://schemas.openxmlformats.org/officeDocument/2006/relationships" xmlns:p="http://schemas.openxmlformats.org/presentationml/2006/main">
+  <p:cSld>
+    <p:spTree>
+      <p:nvGrpSpPr>
+        <p:cNvPr id="1" name=""/>
+        <p:cNvGrpSpPr/>
+        <p:nvPr/>
+      </p:nvGrpSpPr>
+      <p:grpSpPr/>
+      <p:sp>
+        <p:nvSpPr>
+          <p:cNvPr id="4" name="AutoShape 10"/>
+          <p:cNvSpPr/>
+          <p:nvPr/>
+        </p:nvSpPr>
+        <p:spPr>
+          <a:xfrm>
+            <a:off x="619125" y="1064895"/>
+            <a:ext cx="11207750" cy="742950"/>
+          </a:xfrm>
+          <a:prstGeom prst="rect">
+            <a:avLst/>
+          </a:prstGeom>
+          <a:blipFill rotWithShape="1">
+            <a:blip r:embed="rId1">
+              <a:alphaModFix amt="100000"/>
+              <a:alphaModFix amt="100000"/>
+            </a:blip>
+            <a:stretch>
+              <a:fillRect/>
+            </a:stretch>
+          </a:blipFill>
+          <a:ln>
+            <a:headEnd type="none"/>
+            <a:tailEnd type="none"/>
+          </a:ln>
+        </p:spPr>
+      </p:sp>
+      <p:sp>
+        <p:nvSpPr>
+          <p:cNvPr id="2" name="标题 1"/>
+          <p:cNvSpPr>
+            <a:spLocks noGrp="1"/>
+          </p:cNvSpPr>
+          <p:nvPr>
+            <p:ph type="title"/>
+          </p:nvPr>
+        </p:nvSpPr>
+        <p:spPr/>
+        <p:txBody>
+          <a:bodyPr>
+            <a:normAutofit/>
+          </a:bodyPr>
+          <a:p>
+            <a:pPr algn="l">
+              <a:buClrTx/>
+              <a:buSzTx/>
+              <a:buFontTx/>
+            </a:pPr>
+            <a:r>
+              <a:rPr lang="zh-CN" altLang="en-US"/>
+              <a:t>三种使用场景与精度梯度</a:t>
+            </a:r>
+            <a:r>
+              <a:rPr lang="zh-CN" altLang="en-US" sz="2000"/>
+              <a:t>（</a:t>
+            </a:r>
+            <a:r>
+              <a:rPr kumimoji="1" lang="en-US" altLang="zh-CN" sz="2000">
+                <a:latin typeface="微软雅黑" panose="020B0503020204020204" pitchFamily="34" charset="-122"/>
+                <a:ea typeface="微软雅黑" panose="020B0503020204020204" pitchFamily="34" charset="-122"/>
+                <a:sym typeface="+mn-ea"/>
+              </a:rPr>
+              <a:t>Precision Gradient &amp; Application Scenarios）</a:t>
+            </a:r>
+            <a:endParaRPr kumimoji="1" lang="en-US" altLang="zh-CN" sz="2000">
+              <a:latin typeface="微软雅黑" panose="020B0503020204020204" pitchFamily="34" charset="-122"/>
+              <a:ea typeface="微软雅黑" panose="020B0503020204020204" pitchFamily="34" charset="-122"/>
+              <a:sym typeface="+mn-ea"/>
+            </a:endParaRPr>
+          </a:p>
+        </p:txBody>
+      </p:sp>
+      <p:grpSp>
+        <p:nvGrpSpPr>
+          <p:cNvPr id="3" name="组合 2"/>
+          <p:cNvGrpSpPr/>
+          <p:nvPr>
+            <p:custDataLst>
+              <p:tags r:id="rId2"/>
+            </p:custDataLst>
+          </p:nvPr>
+        </p:nvGrpSpPr>
+        <p:grpSpPr>
+          <a:xfrm>
+            <a:off x="608809" y="1163372"/>
+            <a:ext cx="11263904" cy="5061578"/>
+            <a:chOff x="960" y="2941"/>
+            <a:chExt cx="17275" cy="7439"/>
+          </a:xfrm>
+        </p:grpSpPr>
+        <p:sp>
+          <p:nvSpPr>
+            <p:cNvPr id="14" name="AutoShape 14"/>
+            <p:cNvSpPr/>
+            <p:nvPr>
+              <p:custDataLst>
+                <p:tags r:id="rId3"/>
+              </p:custDataLst>
+            </p:nvPr>
+          </p:nvSpPr>
+          <p:spPr>
+            <a:xfrm>
+              <a:off x="960" y="4171"/>
+              <a:ext cx="5558" cy="6209"/>
+            </a:xfrm>
+            <a:prstGeom prst="roundRect">
+              <a:avLst>
+                <a:gd name="adj" fmla="val 1258"/>
+              </a:avLst>
+            </a:prstGeom>
+            <a:solidFill>
+              <a:srgbClr val="FFFFFF">
+                <a:alpha val="100000"/>
+              </a:srgbClr>
+            </a:solidFill>
+            <a:ln w="9525">
+              <a:solidFill>
+                <a:srgbClr val="E2E6EA">
+                  <a:alpha val="100000"/>
+                </a:srgbClr>
+              </a:solidFill>
+              <a:prstDash val="solid"/>
+              <a:headEnd type="none"/>
+              <a:tailEnd type="none"/>
+            </a:ln>
+          </p:spPr>
+        </p:sp>
+        <p:sp>
+          <p:nvSpPr>
+            <p:cNvPr id="15" name="AutoShape 15"/>
+            <p:cNvSpPr/>
+            <p:nvPr>
+              <p:custDataLst>
+                <p:tags r:id="rId4"/>
+              </p:custDataLst>
+            </p:nvPr>
+          </p:nvSpPr>
+          <p:spPr>
+            <a:xfrm>
+              <a:off x="1335" y="4186"/>
+              <a:ext cx="4814" cy="60"/>
+            </a:xfrm>
+            <a:prstGeom prst="rect">
+              <a:avLst/>
+            </a:prstGeom>
+            <a:solidFill>
+              <a:srgbClr val="C00000"/>
+            </a:solidFill>
+            <a:ln>
+              <a:headEnd type="none"/>
+              <a:tailEnd type="none"/>
+            </a:ln>
+          </p:spPr>
+          <p:txBody>
+            <a:bodyPr/>
+            <a:p>
+              <a:endParaRPr lang="zh-CN" altLang="en-US"/>
+            </a:p>
+          </p:txBody>
+        </p:sp>
+        <p:sp>
+          <p:nvSpPr>
+            <p:cNvPr id="16" name="AutoShape 16"/>
+            <p:cNvSpPr/>
+            <p:nvPr>
+              <p:custDataLst>
+                <p:tags r:id="rId5"/>
+              </p:custDataLst>
+            </p:nvPr>
+          </p:nvSpPr>
+          <p:spPr>
+            <a:xfrm>
+              <a:off x="1335" y="4708"/>
+              <a:ext cx="780" cy="780"/>
+            </a:xfrm>
+            <a:prstGeom prst="ellipse">
+              <a:avLst/>
+            </a:prstGeom>
+            <a:solidFill>
+              <a:srgbClr val="C00000"/>
+            </a:solidFill>
+            <a:ln>
+              <a:headEnd type="none"/>
+              <a:tailEnd type="none"/>
+            </a:ln>
+          </p:spPr>
+        </p:sp>
+        <p:sp>
+          <p:nvSpPr>
+            <p:cNvPr id="17" name="AutoShape 17"/>
+            <p:cNvSpPr/>
+            <p:nvPr>
+              <p:custDataLst>
+                <p:tags r:id="rId6"/>
+              </p:custDataLst>
+            </p:nvPr>
+          </p:nvSpPr>
+          <p:spPr>
+            <a:xfrm>
+              <a:off x="1560" y="4933"/>
+              <a:ext cx="330" cy="330"/>
+            </a:xfrm>
+            <a:custGeom>
+              <a:avLst/>
+              <a:gdLst/>
+              <a:ahLst/>
+              <a:cxnLst/>
+              <a:rect l="l" t="t" r="r" b="b"/>
+              <a:pathLst>
+                <a:path w="9998" h="10000">
+                  <a:moveTo>
+                    <a:pt x="4999" y="0"/>
+                  </a:moveTo>
+                  <a:cubicBezTo>
+                    <a:pt x="5096" y="0"/>
+                    <a:pt x="5186" y="20"/>
+                    <a:pt x="5270" y="60"/>
+                  </a:cubicBezTo>
+                  <a:lnTo>
+                    <a:pt x="9206" y="1650"/>
+                  </a:lnTo>
+                  <a:cubicBezTo>
+                    <a:pt x="9442" y="1742"/>
+                    <a:pt x="9630" y="1888"/>
+                    <a:pt x="9769" y="2087"/>
+                  </a:cubicBezTo>
+                  <a:cubicBezTo>
+                    <a:pt x="9921" y="2286"/>
+                    <a:pt x="9998" y="2518"/>
+                    <a:pt x="9998" y="2783"/>
+                  </a:cubicBezTo>
+                  <a:cubicBezTo>
+                    <a:pt x="10012" y="3459"/>
+                    <a:pt x="9894" y="4254"/>
+                    <a:pt x="9644" y="5169"/>
+                  </a:cubicBezTo>
+                  <a:cubicBezTo>
+                    <a:pt x="9394" y="6083"/>
+                    <a:pt x="8942" y="6971"/>
+                    <a:pt x="8290" y="7833"/>
+                  </a:cubicBezTo>
+                  <a:cubicBezTo>
+                    <a:pt x="7651" y="8707"/>
+                    <a:pt x="6735" y="9430"/>
+                    <a:pt x="5541" y="10000"/>
+                  </a:cubicBezTo>
+                  <a:cubicBezTo>
+                    <a:pt x="5179" y="10159"/>
+                    <a:pt x="4818" y="10159"/>
+                    <a:pt x="4457" y="10000"/>
+                  </a:cubicBezTo>
+                  <a:cubicBezTo>
+                    <a:pt x="3263" y="9430"/>
+                    <a:pt x="2346" y="8707"/>
+                    <a:pt x="1708" y="7833"/>
+                  </a:cubicBezTo>
+                  <a:cubicBezTo>
+                    <a:pt x="1055" y="6971"/>
+                    <a:pt x="604" y="6083"/>
+                    <a:pt x="354" y="5169"/>
+                  </a:cubicBezTo>
+                  <a:cubicBezTo>
+                    <a:pt x="104" y="4254"/>
+                    <a:pt x="-14" y="3459"/>
+                    <a:pt x="0" y="2783"/>
+                  </a:cubicBezTo>
+                  <a:cubicBezTo>
+                    <a:pt x="0" y="2518"/>
+                    <a:pt x="76" y="2286"/>
+                    <a:pt x="229" y="2087"/>
+                  </a:cubicBezTo>
+                  <a:cubicBezTo>
+                    <a:pt x="367" y="1888"/>
+                    <a:pt x="555" y="1742"/>
+                    <a:pt x="792" y="1650"/>
+                  </a:cubicBezTo>
+                  <a:lnTo>
+                    <a:pt x="4728" y="60"/>
+                  </a:lnTo>
+                  <a:cubicBezTo>
+                    <a:pt x="4811" y="20"/>
+                    <a:pt x="4901" y="0"/>
+                    <a:pt x="4999" y="0"/>
+                  </a:cubicBezTo>
+                  <a:moveTo>
+                    <a:pt x="4999" y="1332"/>
+                  </a:moveTo>
+                  <a:lnTo>
+                    <a:pt x="4999" y="8847"/>
+                  </a:lnTo>
+                  <a:lnTo>
+                    <a:pt x="4999" y="1332"/>
+                  </a:lnTo>
+                  <a:lnTo>
+                    <a:pt x="4999" y="8847"/>
+                  </a:lnTo>
+                  <a:cubicBezTo>
+                    <a:pt x="5943" y="8383"/>
+                    <a:pt x="6686" y="7793"/>
+                    <a:pt x="7228" y="7078"/>
+                  </a:cubicBezTo>
+                  <a:cubicBezTo>
+                    <a:pt x="7755" y="6362"/>
+                    <a:pt x="8130" y="5626"/>
+                    <a:pt x="8352" y="4871"/>
+                  </a:cubicBezTo>
+                  <a:cubicBezTo>
+                    <a:pt x="8560" y="4102"/>
+                    <a:pt x="8665" y="3413"/>
+                    <a:pt x="8665" y="2803"/>
+                  </a:cubicBezTo>
+                  <a:lnTo>
+                    <a:pt x="4999" y="1332"/>
+                  </a:lnTo>
+                </a:path>
+              </a:pathLst>
+            </a:custGeom>
+            <a:solidFill>
+              <a:srgbClr val="FFFFFF">
+                <a:alpha val="100000"/>
+              </a:srgbClr>
+            </a:solidFill>
+            <a:ln>
+              <a:headEnd type="none"/>
+              <a:tailEnd type="none"/>
+            </a:ln>
+          </p:spPr>
+        </p:sp>
+        <p:sp>
+          <p:nvSpPr>
+            <p:cNvPr id="18" name="TextBox 18"/>
+            <p:cNvSpPr txBox="1"/>
+            <p:nvPr>
+              <p:custDataLst>
+                <p:tags r:id="rId7"/>
+              </p:custDataLst>
+            </p:nvPr>
+          </p:nvSpPr>
+          <p:spPr>
+            <a:xfrm>
+              <a:off x="2294" y="4695"/>
+              <a:ext cx="1102" cy="450"/>
+            </a:xfrm>
+            <a:prstGeom prst="rect">
+              <a:avLst/>
+            </a:prstGeom>
+            <a:ln>
+              <a:headEnd type="none"/>
+              <a:tailEnd type="none"/>
+            </a:ln>
+          </p:spPr>
+          <p:txBody>
+            <a:bodyPr vert="horz" wrap="none" lIns="0" tIns="0" rIns="0" bIns="0" rtlCol="0" anchor="t" anchorCtr="0"/>
+            <a:lstStyle/>
+            <a:p>
+              <a:pPr algn="l">
+                <a:defRPr/>
+              </a:pPr>
+              <a:r>
+                <a:rPr lang="zh-CN" altLang="en-US" sz="2000" b="1" i="0" strike="noStrike">
+                  <a:solidFill>
+                    <a:srgbClr val="C00000">
+                      <a:alpha val="100000"/>
+                    </a:srgbClr>
+                  </a:solidFill>
+                  <a:latin typeface="微软雅黑" panose="020B0503020204020204" pitchFamily="34" charset="-122"/>
+                  <a:ea typeface="微软雅黑" panose="020B0503020204020204" pitchFamily="34" charset="-122"/>
+                  <a:cs typeface="Inter" panose="02000503000000020004"/>
+                </a:rPr>
+                <a:t>完全</a:t>
+              </a:r>
+              <a:r>
+                <a:rPr lang="zh-CN" altLang="en-US" sz="2000" b="1" i="0" strike="noStrike">
+                  <a:solidFill>
+                    <a:srgbClr val="C00000">
+                      <a:alpha val="100000"/>
+                    </a:srgbClr>
+                  </a:solidFill>
+                  <a:latin typeface="微软雅黑" panose="020B0503020204020204" pitchFamily="34" charset="-122"/>
+                  <a:ea typeface="微软雅黑" panose="020B0503020204020204" pitchFamily="34" charset="-122"/>
+                  <a:cs typeface="Inter" panose="02000503000000020004"/>
+                </a:rPr>
+                <a:t>可控</a:t>
+              </a:r>
+              <a:endParaRPr lang="zh-CN" altLang="en-US" sz="2000" b="1" i="0" strike="noStrike">
+                <a:solidFill>
+                  <a:srgbClr val="C00000">
+                    <a:alpha val="100000"/>
+                  </a:srgbClr>
+                </a:solidFill>
+                <a:latin typeface="微软雅黑" panose="020B0503020204020204" pitchFamily="34" charset="-122"/>
+                <a:ea typeface="微软雅黑" panose="020B0503020204020204" pitchFamily="34" charset="-122"/>
+                <a:cs typeface="Inter" panose="02000503000000020004"/>
+              </a:endParaRPr>
+            </a:p>
+          </p:txBody>
+        </p:sp>
+        <p:sp>
+          <p:nvSpPr>
+            <p:cNvPr id="19" name="TextBox 19"/>
+            <p:cNvSpPr txBox="1"/>
+            <p:nvPr>
+              <p:custDataLst>
+                <p:tags r:id="rId8"/>
+              </p:custDataLst>
+            </p:nvPr>
+          </p:nvSpPr>
+          <p:spPr>
+            <a:xfrm>
+              <a:off x="2294" y="5248"/>
+              <a:ext cx="997" cy="180"/>
+            </a:xfrm>
+            <a:prstGeom prst="rect">
+              <a:avLst/>
+            </a:prstGeom>
+            <a:ln>
+              <a:headEnd type="none"/>
+              <a:tailEnd type="none"/>
+            </a:ln>
+          </p:spPr>
+          <p:txBody>
+            <a:bodyPr vert="horz" wrap="none" lIns="0" tIns="0" rIns="0" bIns="0" rtlCol="0" anchor="t" anchorCtr="0"/>
+            <a:lstStyle/>
+            <a:p>
+              <a:pPr algn="l">
+                <a:defRPr/>
+              </a:pPr>
+              <a:r>
+                <a:rPr lang="en-US" sz="1000" b="1" i="0" strike="noStrike">
+                  <a:solidFill>
+                    <a:srgbClr val="C00000">
+                      <a:alpha val="50196"/>
+                    </a:srgbClr>
+                  </a:solidFill>
+                  <a:latin typeface="微软雅黑" panose="020B0503020204020204" pitchFamily="34" charset="-122"/>
+                  <a:ea typeface="微软雅黑" panose="020B0503020204020204" pitchFamily="34" charset="-122"/>
+                  <a:cs typeface="FZYaYiHei GB18030L2 R" panose="02000500000000000000" charset="-122"/>
+                </a:rPr>
+                <a:t>精确推理</a:t>
+              </a:r>
+              <a:endParaRPr lang="en-US" sz="1000" b="1" i="0" strike="noStrike">
+                <a:solidFill>
+                  <a:srgbClr val="C00000">
+                    <a:alpha val="50196"/>
+                  </a:srgbClr>
+                </a:solidFill>
+                <a:latin typeface="微软雅黑" panose="020B0503020204020204" pitchFamily="34" charset="-122"/>
+                <a:ea typeface="微软雅黑" panose="020B0503020204020204" pitchFamily="34" charset="-122"/>
+                <a:cs typeface="FZYaYiHei GB18030L2 R" panose="02000500000000000000" charset="-122"/>
+              </a:endParaRPr>
+            </a:p>
+          </p:txBody>
+        </p:sp>
+        <p:sp>
+          <p:nvSpPr>
+            <p:cNvPr id="20" name="TextBox 20"/>
+            <p:cNvSpPr txBox="1"/>
+            <p:nvPr>
+              <p:custDataLst>
+                <p:tags r:id="rId9"/>
+              </p:custDataLst>
+            </p:nvPr>
+          </p:nvSpPr>
+          <p:spPr>
+            <a:xfrm>
+              <a:off x="1353" y="6060"/>
+              <a:ext cx="4809" cy="330"/>
+            </a:xfrm>
+            <a:prstGeom prst="rect">
+              <a:avLst/>
+            </a:prstGeom>
+            <a:ln>
+              <a:headEnd type="none"/>
+              <a:tailEnd type="none"/>
+            </a:ln>
+          </p:spPr>
+          <p:txBody>
+            <a:bodyPr vert="horz" wrap="none" lIns="0" tIns="0" rIns="0" bIns="0" rtlCol="0" anchor="t" anchorCtr="0"/>
+            <a:lstStyle/>
+            <a:p>
+              <a:pPr algn="l">
+                <a:defRPr/>
+              </a:pPr>
+              <a:r>
+                <a:rPr lang="zh-CN" altLang="en-US" sz="1600" b="1" i="0" strike="noStrike">
+                  <a:solidFill>
+                    <a:srgbClr val="0A1F3D">
+                      <a:alpha val="100000"/>
+                    </a:srgbClr>
+                  </a:solidFill>
+                  <a:latin typeface="微软雅黑" panose="020B0503020204020204" pitchFamily="34" charset="-122"/>
+                  <a:ea typeface="微软雅黑" panose="020B0503020204020204" pitchFamily="34" charset="-122"/>
+                  <a:cs typeface="微软雅黑" panose="020B0503020204020204" pitchFamily="34" charset="-122"/>
+                </a:rPr>
+                <a:t>完全可控</a:t>
+              </a:r>
+              <a:r>
+                <a:rPr lang="en-US" sz="1600" b="1" i="0" strike="noStrike">
+                  <a:solidFill>
+                    <a:srgbClr val="0A1F3D">
+                      <a:alpha val="100000"/>
+                    </a:srgbClr>
+                  </a:solidFill>
+                  <a:latin typeface="微软雅黑" panose="020B0503020204020204" pitchFamily="34" charset="-122"/>
+                  <a:ea typeface="微软雅黑" panose="020B0503020204020204" pitchFamily="34" charset="-122"/>
+                  <a:cs typeface="微软雅黑" panose="020B0503020204020204" pitchFamily="34" charset="-122"/>
+                </a:rPr>
+                <a:t>推理场景</a:t>
+              </a:r>
+              <a:endParaRPr lang="en-US" sz="1600" b="1" i="0" strike="noStrike">
+                <a:solidFill>
+                  <a:srgbClr val="0A1F3D">
+                    <a:alpha val="100000"/>
+                  </a:srgbClr>
+                </a:solidFill>
+                <a:latin typeface="微软雅黑" panose="020B0503020204020204" pitchFamily="34" charset="-122"/>
+                <a:ea typeface="微软雅黑" panose="020B0503020204020204" pitchFamily="34" charset="-122"/>
+                <a:cs typeface="微软雅黑" panose="020B0503020204020204" pitchFamily="34" charset="-122"/>
+              </a:endParaRPr>
+            </a:p>
+          </p:txBody>
+        </p:sp>
+        <p:sp>
+          <p:nvSpPr>
+            <p:cNvPr id="22" name="TextBox 22"/>
+            <p:cNvSpPr txBox="1"/>
+            <p:nvPr>
+              <p:custDataLst>
+                <p:tags r:id="rId10"/>
+              </p:custDataLst>
+            </p:nvPr>
+          </p:nvSpPr>
+          <p:spPr>
+            <a:xfrm>
+              <a:off x="1563" y="6705"/>
+              <a:ext cx="4599" cy="3013"/>
+            </a:xfrm>
+            <a:prstGeom prst="rect">
+              <a:avLst/>
+            </a:prstGeom>
+            <a:ln>
+              <a:headEnd type="none"/>
+              <a:tailEnd type="none"/>
+            </a:ln>
+          </p:spPr>
+          <p:txBody>
+            <a:bodyPr vert="horz" wrap="square" lIns="0" tIns="0" rIns="0" bIns="0" rtlCol="0" anchor="t" anchorCtr="0"/>
+            <a:lstStyle/>
+            <a:p>
+              <a:pPr marL="171450" indent="-171450" algn="l">
+                <a:buFont typeface="Wingdings" panose="05000000000000000000" charset="0"/>
+                <a:buChar char="Ø"/>
+                <a:defRPr/>
+              </a:pPr>
+              <a:r>
+                <a:rPr lang="en-US" sz="1400" b="0" i="0" strike="noStrike">
+                  <a:solidFill>
+                    <a:srgbClr val="0A1F3D">
+                      <a:alpha val="85098"/>
+                    </a:srgbClr>
+                  </a:solidFill>
+                  <a:latin typeface="微软雅黑" panose="020B0503020204020204" pitchFamily="34" charset="-122"/>
+                  <a:ea typeface="微软雅黑" panose="020B0503020204020204" pitchFamily="34" charset="-122"/>
+                  <a:cs typeface="FZYaYiHei GB18030L2 R" panose="02000500000000000000" charset="-122"/>
+                </a:rPr>
+                <a:t>通过大模型录入各类语料打造精确本体，用提示</a:t>
+              </a:r>
+              <a:r>
+                <a:rPr sz="1400" b="0" i="0" strike="noStrike">
+                  <a:solidFill>
+                    <a:srgbClr val="0A1F3D">
+                      <a:alpha val="85098"/>
+                    </a:srgbClr>
+                  </a:solidFill>
+                  <a:latin typeface="微软雅黑" panose="020B0503020204020204" pitchFamily="34" charset="-122"/>
+                  <a:ea typeface="微软雅黑" panose="020B0503020204020204" pitchFamily="34" charset="-122"/>
+                  <a:cs typeface="FZYaYiHei GB18030L2 R" panose="02000500000000000000" charset="-122"/>
+                </a:rPr>
+                <a:t>词工程确定客户需求后输入本体封装框架，由本体独立完成精确推理。</a:t>
+              </a:r>
+              <a:endParaRPr sz="1400" b="0" i="0" strike="noStrike">
+                <a:solidFill>
+                  <a:srgbClr val="0A1F3D">
+                    <a:alpha val="85098"/>
+                  </a:srgbClr>
+                </a:solidFill>
+                <a:latin typeface="微软雅黑" panose="020B0503020204020204" pitchFamily="34" charset="-122"/>
+                <a:ea typeface="微软雅黑" panose="020B0503020204020204" pitchFamily="34" charset="-122"/>
+                <a:cs typeface="FZYaYiHei GB18030L2 R" panose="02000500000000000000" charset="-122"/>
+              </a:endParaRPr>
+            </a:p>
+            <a:p>
+              <a:pPr marL="171450" indent="-171450" algn="l">
+                <a:buFont typeface="Wingdings" panose="05000000000000000000" charset="0"/>
+                <a:buChar char="Ø"/>
+                <a:defRPr/>
+              </a:pPr>
+              <a:endParaRPr sz="1400" b="0" i="0" strike="noStrike">
+                <a:solidFill>
+                  <a:srgbClr val="0A1F3D">
+                    <a:alpha val="85098"/>
+                  </a:srgbClr>
+                </a:solidFill>
+                <a:latin typeface="微软雅黑" panose="020B0503020204020204" pitchFamily="34" charset="-122"/>
+                <a:ea typeface="微软雅黑" panose="020B0503020204020204" pitchFamily="34" charset="-122"/>
+                <a:cs typeface="FZYaYiHei GB18030L2 R" panose="02000500000000000000" charset="-122"/>
+              </a:endParaRPr>
+            </a:p>
+            <a:p>
+              <a:pPr marL="171450" indent="-171450" algn="l">
+                <a:buFont typeface="Wingdings" panose="05000000000000000000" charset="0"/>
+                <a:buChar char="Ø"/>
+                <a:defRPr/>
+              </a:pPr>
+              <a:r>
+                <a:rPr lang="en-US" sz="1400">
+                  <a:solidFill>
+                    <a:srgbClr val="0A1F3D">
+                      <a:alpha val="85098"/>
+                    </a:srgbClr>
+                  </a:solidFill>
+                  <a:latin typeface="微软雅黑" panose="020B0503020204020204" pitchFamily="34" charset="-122"/>
+                  <a:ea typeface="微软雅黑" panose="020B0503020204020204" pitchFamily="34" charset="-122"/>
+                  <a:cs typeface="FZYaYiHei GB18030L2 R" panose="02000500000000000000" charset="-122"/>
+                  <a:sym typeface="+mn-ea"/>
+                </a:rPr>
+                <a:t>适用于金融合规、医疗诊断、安全审计等零容错</a:t>
+              </a:r>
+              <a:r>
+                <a:rPr sz="1400">
+                  <a:solidFill>
+                    <a:srgbClr val="0A1F3D">
+                      <a:alpha val="85098"/>
+                    </a:srgbClr>
+                  </a:solidFill>
+                  <a:latin typeface="微软雅黑" panose="020B0503020204020204" pitchFamily="34" charset="-122"/>
+                  <a:ea typeface="微软雅黑" panose="020B0503020204020204" pitchFamily="34" charset="-122"/>
+                  <a:cs typeface="FZYaYiHei GB18030L2 R" panose="02000500000000000000" charset="-122"/>
+                  <a:sym typeface="+mn-ea"/>
+                </a:rPr>
+                <a:t>领域，推理结果完全由形式化语义保证，不依赖概率模型。</a:t>
+              </a:r>
+              <a:endParaRPr sz="1400" b="0" i="0" strike="noStrike">
+                <a:solidFill>
+                  <a:srgbClr val="0A1F3D">
+                    <a:alpha val="85098"/>
+                  </a:srgbClr>
+                </a:solidFill>
+                <a:latin typeface="微软雅黑" panose="020B0503020204020204" pitchFamily="34" charset="-122"/>
+                <a:ea typeface="微软雅黑" panose="020B0503020204020204" pitchFamily="34" charset="-122"/>
+                <a:cs typeface="FZYaYiHei GB18030L2 R" panose="02000500000000000000" charset="-122"/>
+              </a:endParaRPr>
+            </a:p>
+            <a:p>
+              <a:pPr marL="171450" indent="-171450" algn="l">
+                <a:buFont typeface="Wingdings" panose="05000000000000000000" charset="0"/>
+                <a:buChar char="Ø"/>
+                <a:defRPr/>
+              </a:pPr>
+              <a:endParaRPr sz="1400" b="0" i="0" strike="noStrike">
+                <a:solidFill>
+                  <a:srgbClr val="0A1F3D">
+                    <a:alpha val="85098"/>
+                  </a:srgbClr>
+                </a:solidFill>
+                <a:latin typeface="微软雅黑" panose="020B0503020204020204" pitchFamily="34" charset="-122"/>
+                <a:ea typeface="微软雅黑" panose="020B0503020204020204" pitchFamily="34" charset="-122"/>
+                <a:cs typeface="FZYaYiHei GB18030L2 R" panose="02000500000000000000" charset="-122"/>
+              </a:endParaRPr>
+            </a:p>
+          </p:txBody>
+        </p:sp>
+        <p:sp>
+          <p:nvSpPr>
+            <p:cNvPr id="25" name="AutoShape 25"/>
+            <p:cNvSpPr/>
+            <p:nvPr>
+              <p:custDataLst>
+                <p:tags r:id="rId11"/>
+              </p:custDataLst>
+            </p:nvPr>
+          </p:nvSpPr>
+          <p:spPr>
+            <a:xfrm>
+              <a:off x="6818" y="4171"/>
+              <a:ext cx="5559" cy="6209"/>
+            </a:xfrm>
+            <a:prstGeom prst="roundRect">
+              <a:avLst>
+                <a:gd name="adj" fmla="val 1258"/>
+              </a:avLst>
+            </a:prstGeom>
+            <a:solidFill>
+              <a:srgbClr val="FFFFFF">
+                <a:alpha val="100000"/>
+              </a:srgbClr>
+            </a:solidFill>
+            <a:ln w="9525">
+              <a:solidFill>
+                <a:srgbClr val="E2E6EA">
+                  <a:alpha val="100000"/>
+                </a:srgbClr>
+              </a:solidFill>
+              <a:prstDash val="solid"/>
+              <a:headEnd type="none"/>
+              <a:tailEnd type="none"/>
+            </a:ln>
+          </p:spPr>
+        </p:sp>
+        <p:sp>
+          <p:nvSpPr>
+            <p:cNvPr id="26" name="AutoShape 26"/>
+            <p:cNvSpPr/>
+            <p:nvPr>
+              <p:custDataLst>
+                <p:tags r:id="rId12"/>
+              </p:custDataLst>
+            </p:nvPr>
+          </p:nvSpPr>
+          <p:spPr>
+            <a:xfrm>
+              <a:off x="7193" y="4186"/>
+              <a:ext cx="4814" cy="60"/>
+            </a:xfrm>
+            <a:prstGeom prst="rect">
+              <a:avLst/>
+            </a:prstGeom>
+            <a:solidFill>
+              <a:srgbClr val="C00000"/>
+            </a:solidFill>
+            <a:ln>
+              <a:headEnd type="none"/>
+              <a:tailEnd type="none"/>
+            </a:ln>
+          </p:spPr>
+        </p:sp>
+        <p:sp>
+          <p:nvSpPr>
+            <p:cNvPr id="27" name="AutoShape 27"/>
+            <p:cNvSpPr/>
+            <p:nvPr>
+              <p:custDataLst>
+                <p:tags r:id="rId13"/>
+              </p:custDataLst>
+            </p:nvPr>
+          </p:nvSpPr>
+          <p:spPr>
+            <a:xfrm>
+              <a:off x="7193" y="4708"/>
+              <a:ext cx="780" cy="780"/>
+            </a:xfrm>
+            <a:prstGeom prst="ellipse">
+              <a:avLst/>
+            </a:prstGeom>
+            <a:solidFill>
+              <a:srgbClr val="C00000"/>
+            </a:solidFill>
+            <a:ln>
+              <a:headEnd type="none"/>
+              <a:tailEnd type="none"/>
+            </a:ln>
+          </p:spPr>
+        </p:sp>
+        <p:sp>
+          <p:nvSpPr>
+            <p:cNvPr id="28" name="AutoShape 28"/>
+            <p:cNvSpPr/>
+            <p:nvPr>
+              <p:custDataLst>
+                <p:tags r:id="rId14"/>
+              </p:custDataLst>
+            </p:nvPr>
+          </p:nvSpPr>
+          <p:spPr>
+            <a:xfrm>
+              <a:off x="7418" y="5563"/>
+              <a:ext cx="330" cy="330"/>
+            </a:xfrm>
+            <a:custGeom>
+              <a:avLst/>
+              <a:gdLst/>
+              <a:ahLst/>
+              <a:cxnLst/>
+              <a:rect l="l" t="t" r="r" b="b"/>
+              <a:pathLst>
+                <a:path w="9998" h="10000">
+                  <a:moveTo>
+                    <a:pt x="1854" y="3779"/>
+                  </a:moveTo>
+                  <a:cubicBezTo>
+                    <a:pt x="2020" y="3256"/>
+                    <a:pt x="2284" y="2795"/>
+                    <a:pt x="2645" y="2396"/>
+                  </a:cubicBezTo>
+                  <a:cubicBezTo>
+                    <a:pt x="3325" y="1674"/>
+                    <a:pt x="4110" y="1313"/>
+                    <a:pt x="4999" y="1313"/>
+                  </a:cubicBezTo>
+                  <a:cubicBezTo>
+                    <a:pt x="5887" y="1313"/>
+                    <a:pt x="6672" y="1674"/>
+                    <a:pt x="7353" y="2396"/>
+                  </a:cubicBezTo>
+                  <a:lnTo>
+                    <a:pt x="7707" y="2788"/>
+                  </a:lnTo>
+                  <a:lnTo>
+                    <a:pt x="6999" y="2788"/>
+                  </a:lnTo>
+                  <a:cubicBezTo>
+                    <a:pt x="6804" y="2788"/>
+                    <a:pt x="6644" y="2857"/>
+                    <a:pt x="6520" y="2995"/>
+                  </a:cubicBezTo>
+                  <a:cubicBezTo>
+                    <a:pt x="6394" y="3133"/>
+                    <a:pt x="6332" y="3310"/>
+                    <a:pt x="6332" y="3525"/>
+                  </a:cubicBezTo>
+                  <a:cubicBezTo>
+                    <a:pt x="6332" y="3740"/>
+                    <a:pt x="6394" y="3917"/>
+                    <a:pt x="6520" y="4055"/>
+                  </a:cubicBezTo>
+                  <a:cubicBezTo>
+                    <a:pt x="6644" y="4193"/>
+                    <a:pt x="6804" y="4263"/>
+                    <a:pt x="6999" y="4263"/>
+                  </a:cubicBezTo>
+                  <a:lnTo>
+                    <a:pt x="9331" y="4263"/>
+                  </a:lnTo>
+                  <a:cubicBezTo>
+                    <a:pt x="9331" y="4263"/>
+                    <a:pt x="9331" y="4263"/>
+                    <a:pt x="9331" y="4263"/>
+                  </a:cubicBezTo>
+                  <a:cubicBezTo>
+                    <a:pt x="9331" y="4263"/>
+                    <a:pt x="9331" y="4263"/>
+                    <a:pt x="9331" y="4263"/>
+                  </a:cubicBezTo>
+                  <a:cubicBezTo>
+                    <a:pt x="9525" y="4263"/>
+                    <a:pt x="9685" y="4193"/>
+                    <a:pt x="9811" y="4055"/>
+                  </a:cubicBezTo>
+                  <a:cubicBezTo>
+                    <a:pt x="9935" y="3917"/>
+                    <a:pt x="9998" y="3740"/>
+                    <a:pt x="9998" y="3525"/>
+                  </a:cubicBezTo>
+                  <a:lnTo>
+                    <a:pt x="9998" y="945"/>
+                  </a:lnTo>
+                  <a:cubicBezTo>
+                    <a:pt x="9998" y="729"/>
+                    <a:pt x="9935" y="553"/>
+                    <a:pt x="9811" y="415"/>
+                  </a:cubicBezTo>
+                  <a:cubicBezTo>
+                    <a:pt x="9685" y="276"/>
+                    <a:pt x="9525" y="207"/>
+                    <a:pt x="9331" y="207"/>
+                  </a:cubicBezTo>
+                  <a:cubicBezTo>
+                    <a:pt x="9137" y="207"/>
+                    <a:pt x="8977" y="276"/>
+                    <a:pt x="8852" y="415"/>
+                  </a:cubicBezTo>
+                  <a:cubicBezTo>
+                    <a:pt x="8727" y="553"/>
+                    <a:pt x="8665" y="729"/>
+                    <a:pt x="8665" y="945"/>
+                  </a:cubicBezTo>
+                  <a:lnTo>
+                    <a:pt x="8665" y="1751"/>
+                  </a:lnTo>
+                  <a:lnTo>
+                    <a:pt x="8290" y="1359"/>
+                  </a:lnTo>
+                  <a:cubicBezTo>
+                    <a:pt x="7679" y="683"/>
+                    <a:pt x="6978" y="230"/>
+                    <a:pt x="6186" y="0"/>
+                  </a:cubicBezTo>
+                  <a:cubicBezTo>
+                    <a:pt x="5394" y="-215"/>
+                    <a:pt x="4603" y="-215"/>
+                    <a:pt x="3812" y="0"/>
+                  </a:cubicBezTo>
+                  <a:cubicBezTo>
+                    <a:pt x="3020" y="230"/>
+                    <a:pt x="2318" y="683"/>
+                    <a:pt x="1708" y="1359"/>
+                  </a:cubicBezTo>
+                  <a:cubicBezTo>
+                    <a:pt x="1194" y="1927"/>
+                    <a:pt x="826" y="2565"/>
+                    <a:pt x="604" y="3272"/>
+                  </a:cubicBezTo>
+                  <a:cubicBezTo>
+                    <a:pt x="548" y="3471"/>
+                    <a:pt x="555" y="3663"/>
+                    <a:pt x="625" y="3848"/>
+                  </a:cubicBezTo>
+                  <a:cubicBezTo>
+                    <a:pt x="708" y="4016"/>
+                    <a:pt x="833" y="4139"/>
+                    <a:pt x="1000" y="4217"/>
+                  </a:cubicBezTo>
+                  <a:cubicBezTo>
+                    <a:pt x="1180" y="4278"/>
+                    <a:pt x="1354" y="4270"/>
+                    <a:pt x="1521" y="4194"/>
+                  </a:cubicBezTo>
+                  <a:cubicBezTo>
+                    <a:pt x="1673" y="4101"/>
+                    <a:pt x="1784" y="3963"/>
+                    <a:pt x="1854" y="3779"/>
+                  </a:cubicBezTo>
+                  <a:moveTo>
+                    <a:pt x="479" y="5760"/>
+                  </a:moveTo>
+                  <a:cubicBezTo>
+                    <a:pt x="367" y="5806"/>
+                    <a:pt x="270" y="5875"/>
+                    <a:pt x="187" y="5968"/>
+                  </a:cubicBezTo>
+                  <a:cubicBezTo>
+                    <a:pt x="103" y="6060"/>
+                    <a:pt x="48" y="6167"/>
+                    <a:pt x="21" y="6290"/>
+                  </a:cubicBezTo>
+                  <a:cubicBezTo>
+                    <a:pt x="21" y="6305"/>
+                    <a:pt x="14" y="6328"/>
+                    <a:pt x="0" y="6359"/>
+                  </a:cubicBezTo>
+                  <a:cubicBezTo>
+                    <a:pt x="0" y="6405"/>
+                    <a:pt x="0" y="6444"/>
+                    <a:pt x="0" y="6475"/>
+                  </a:cubicBezTo>
+                  <a:lnTo>
+                    <a:pt x="0" y="9055"/>
+                  </a:lnTo>
+                  <a:cubicBezTo>
+                    <a:pt x="0" y="9270"/>
+                    <a:pt x="62" y="9447"/>
+                    <a:pt x="187" y="9585"/>
+                  </a:cubicBezTo>
+                  <a:cubicBezTo>
+                    <a:pt x="312" y="9723"/>
+                    <a:pt x="472" y="9793"/>
+                    <a:pt x="667" y="9793"/>
+                  </a:cubicBezTo>
+                  <a:cubicBezTo>
+                    <a:pt x="861" y="9793"/>
+                    <a:pt x="1020" y="9723"/>
+                    <a:pt x="1146" y="9585"/>
+                  </a:cubicBezTo>
+                  <a:cubicBezTo>
+                    <a:pt x="1270" y="9447"/>
+                    <a:pt x="1333" y="9270"/>
+                    <a:pt x="1333" y="9055"/>
+                  </a:cubicBezTo>
+                  <a:lnTo>
+                    <a:pt x="1333" y="8249"/>
+                  </a:lnTo>
+                  <a:lnTo>
+                    <a:pt x="1708" y="8641"/>
+                  </a:lnTo>
+                  <a:cubicBezTo>
+                    <a:pt x="2318" y="9316"/>
+                    <a:pt x="3020" y="9769"/>
+                    <a:pt x="3812" y="10000"/>
+                  </a:cubicBezTo>
+                  <a:cubicBezTo>
+                    <a:pt x="4603" y="10215"/>
+                    <a:pt x="5394" y="10215"/>
+                    <a:pt x="6186" y="10000"/>
+                  </a:cubicBezTo>
+                  <a:cubicBezTo>
+                    <a:pt x="6978" y="9769"/>
+                    <a:pt x="7679" y="9316"/>
+                    <a:pt x="8290" y="8641"/>
+                  </a:cubicBezTo>
+                  <a:cubicBezTo>
+                    <a:pt x="8804" y="8072"/>
+                    <a:pt x="9172" y="7434"/>
+                    <a:pt x="9394" y="6728"/>
+                  </a:cubicBezTo>
+                  <a:cubicBezTo>
+                    <a:pt x="9449" y="6528"/>
+                    <a:pt x="9442" y="6336"/>
+                    <a:pt x="9373" y="6152"/>
+                  </a:cubicBezTo>
+                  <a:cubicBezTo>
+                    <a:pt x="9289" y="5983"/>
+                    <a:pt x="9164" y="5860"/>
+                    <a:pt x="8998" y="5783"/>
+                  </a:cubicBezTo>
+                  <a:cubicBezTo>
+                    <a:pt x="8817" y="5721"/>
+                    <a:pt x="8643" y="5729"/>
+                    <a:pt x="8477" y="5806"/>
+                  </a:cubicBezTo>
+                  <a:cubicBezTo>
+                    <a:pt x="8324" y="5898"/>
+                    <a:pt x="8213" y="6037"/>
+                    <a:pt x="8144" y="6221"/>
+                  </a:cubicBezTo>
+                  <a:cubicBezTo>
+                    <a:pt x="7977" y="6743"/>
+                    <a:pt x="7713" y="7204"/>
+                    <a:pt x="7353" y="7604"/>
+                  </a:cubicBezTo>
+                  <a:cubicBezTo>
+                    <a:pt x="6672" y="8326"/>
+                    <a:pt x="5887" y="8687"/>
+                    <a:pt x="4999" y="8687"/>
+                  </a:cubicBezTo>
+                  <a:cubicBezTo>
+                    <a:pt x="4110" y="8687"/>
+                    <a:pt x="3325" y="8326"/>
+                    <a:pt x="2645" y="7604"/>
+                  </a:cubicBezTo>
+                  <a:lnTo>
+                    <a:pt x="2291" y="7212"/>
+                  </a:lnTo>
+                  <a:lnTo>
+                    <a:pt x="2999" y="7212"/>
+                  </a:lnTo>
+                  <a:cubicBezTo>
+                    <a:pt x="3193" y="7212"/>
+                    <a:pt x="3353" y="7143"/>
+                    <a:pt x="3478" y="7005"/>
+                  </a:cubicBezTo>
+                  <a:cubicBezTo>
+                    <a:pt x="3603" y="6866"/>
+                    <a:pt x="3666" y="6689"/>
+                    <a:pt x="3666" y="6475"/>
+                  </a:cubicBezTo>
+                  <a:cubicBezTo>
+                    <a:pt x="3666" y="6259"/>
+                    <a:pt x="3603" y="6083"/>
+                    <a:pt x="3478" y="5945"/>
+                  </a:cubicBezTo>
+                  <a:cubicBezTo>
+                    <a:pt x="3353" y="5806"/>
+                    <a:pt x="3193" y="5737"/>
+                    <a:pt x="2999" y="5737"/>
+                  </a:cubicBezTo>
+                  <a:lnTo>
+                    <a:pt x="667" y="5737"/>
+                  </a:lnTo>
+                  <a:cubicBezTo>
+                    <a:pt x="639" y="5737"/>
+                    <a:pt x="611" y="5737"/>
+                    <a:pt x="583" y="5737"/>
+                  </a:cubicBezTo>
+                  <a:cubicBezTo>
+                    <a:pt x="541" y="5752"/>
+                    <a:pt x="507" y="5760"/>
+                    <a:pt x="479" y="5760"/>
+                  </a:cubicBezTo>
+                </a:path>
+              </a:pathLst>
+            </a:custGeom>
+            <a:solidFill>
+              <a:srgbClr val="FFFFFF">
+                <a:alpha val="100000"/>
+              </a:srgbClr>
+            </a:solidFill>
+            <a:ln>
+              <a:headEnd type="none"/>
+              <a:tailEnd type="none"/>
+            </a:ln>
+          </p:spPr>
+        </p:sp>
+        <p:sp>
+          <p:nvSpPr>
+            <p:cNvPr id="29" name="TextBox 29"/>
+            <p:cNvSpPr txBox="1"/>
+            <p:nvPr>
+              <p:custDataLst>
+                <p:tags r:id="rId15"/>
+              </p:custDataLst>
+            </p:nvPr>
+          </p:nvSpPr>
+          <p:spPr>
+            <a:xfrm>
+              <a:off x="8153" y="4695"/>
+              <a:ext cx="1113" cy="450"/>
+            </a:xfrm>
+            <a:prstGeom prst="rect">
+              <a:avLst/>
+            </a:prstGeom>
+            <a:ln>
+              <a:headEnd type="none"/>
+              <a:tailEnd type="none"/>
+            </a:ln>
+          </p:spPr>
+          <p:txBody>
+            <a:bodyPr vert="horz" wrap="none" lIns="0" tIns="0" rIns="0" bIns="0" rtlCol="0" anchor="t" anchorCtr="0"/>
+            <a:lstStyle/>
+            <a:p>
+              <a:pPr algn="l">
+                <a:defRPr/>
+              </a:pPr>
+              <a:r>
+                <a:rPr lang="en-US" sz="2000" b="1" i="0" strike="noStrike">
+                  <a:solidFill>
+                    <a:srgbClr val="C00000">
+                      <a:alpha val="100000"/>
+                    </a:srgbClr>
+                  </a:solidFill>
+                  <a:latin typeface="微软雅黑" panose="020B0503020204020204" pitchFamily="34" charset="-122"/>
+                  <a:ea typeface="微软雅黑" panose="020B0503020204020204" pitchFamily="34" charset="-122"/>
+                  <a:cs typeface="Inter" panose="02000503000000020004"/>
+                </a:rPr>
+                <a:t>~95%+</a:t>
+              </a:r>
+              <a:endParaRPr lang="en-US" sz="2000" b="1" i="0" strike="noStrike">
+                <a:solidFill>
+                  <a:srgbClr val="C00000">
+                    <a:alpha val="100000"/>
+                  </a:srgbClr>
+                </a:solidFill>
+                <a:latin typeface="微软雅黑" panose="020B0503020204020204" pitchFamily="34" charset="-122"/>
+                <a:ea typeface="微软雅黑" panose="020B0503020204020204" pitchFamily="34" charset="-122"/>
+                <a:cs typeface="Inter" panose="02000503000000020004"/>
+              </a:endParaRPr>
+            </a:p>
+          </p:txBody>
+        </p:sp>
+        <p:sp>
+          <p:nvSpPr>
+            <p:cNvPr id="30" name="TextBox 30"/>
+            <p:cNvSpPr txBox="1"/>
+            <p:nvPr>
+              <p:custDataLst>
+                <p:tags r:id="rId16"/>
+              </p:custDataLst>
+            </p:nvPr>
+          </p:nvSpPr>
+          <p:spPr>
+            <a:xfrm>
+              <a:off x="8153" y="5248"/>
+              <a:ext cx="1008" cy="180"/>
+            </a:xfrm>
+            <a:prstGeom prst="rect">
+              <a:avLst/>
+            </a:prstGeom>
+            <a:ln>
+              <a:headEnd type="none"/>
+              <a:tailEnd type="none"/>
+            </a:ln>
+          </p:spPr>
+          <p:txBody>
+            <a:bodyPr vert="horz" wrap="none" lIns="0" tIns="0" rIns="0" bIns="0" rtlCol="0" anchor="t" anchorCtr="0"/>
+            <a:lstStyle/>
+            <a:p>
+              <a:pPr algn="l">
+                <a:defRPr/>
+              </a:pPr>
+              <a:r>
+                <a:rPr lang="en-US" sz="1000" b="1" i="0" strike="noStrike">
+                  <a:solidFill>
+                    <a:srgbClr val="C00000">
+                      <a:alpha val="50196"/>
+                    </a:srgbClr>
+                  </a:solidFill>
+                  <a:latin typeface="微软雅黑" panose="020B0503020204020204" pitchFamily="34" charset="-122"/>
+                  <a:ea typeface="微软雅黑" panose="020B0503020204020204" pitchFamily="34" charset="-122"/>
+                  <a:cs typeface="FZYaYiHei GB18030L2 R" panose="02000500000000000000" charset="-122"/>
+                </a:rPr>
+                <a:t>混合验证</a:t>
+              </a:r>
+              <a:endParaRPr lang="en-US" sz="1000" b="1" i="0" strike="noStrike">
+                <a:solidFill>
+                  <a:srgbClr val="C00000">
+                    <a:alpha val="50196"/>
+                  </a:srgbClr>
+                </a:solidFill>
+                <a:latin typeface="微软雅黑" panose="020B0503020204020204" pitchFamily="34" charset="-122"/>
+                <a:ea typeface="微软雅黑" panose="020B0503020204020204" pitchFamily="34" charset="-122"/>
+                <a:cs typeface="FZYaYiHei GB18030L2 R" panose="02000500000000000000" charset="-122"/>
+              </a:endParaRPr>
+            </a:p>
+          </p:txBody>
+        </p:sp>
+        <p:sp>
+          <p:nvSpPr>
+            <p:cNvPr id="31" name="TextBox 31"/>
+            <p:cNvSpPr txBox="1"/>
+            <p:nvPr>
+              <p:custDataLst>
+                <p:tags r:id="rId17"/>
+              </p:custDataLst>
+            </p:nvPr>
+          </p:nvSpPr>
+          <p:spPr>
+            <a:xfrm>
+              <a:off x="7212" y="6060"/>
+              <a:ext cx="4809" cy="330"/>
+            </a:xfrm>
+            <a:prstGeom prst="rect">
+              <a:avLst/>
+            </a:prstGeom>
+            <a:ln>
+              <a:headEnd type="none"/>
+              <a:tailEnd type="none"/>
+            </a:ln>
+          </p:spPr>
+          <p:txBody>
+            <a:bodyPr vert="horz" wrap="none" lIns="0" tIns="0" rIns="0" bIns="0" rtlCol="0" anchor="t" anchorCtr="0"/>
+            <a:lstStyle/>
+            <a:p>
+              <a:pPr algn="l">
+                <a:defRPr/>
+              </a:pPr>
+              <a:r>
+                <a:rPr lang="en-US" sz="1600" b="1" i="0" strike="noStrike">
+                  <a:solidFill>
+                    <a:srgbClr val="0A1F3D">
+                      <a:alpha val="100000"/>
+                    </a:srgbClr>
+                  </a:solidFill>
+                  <a:latin typeface="微软雅黑" panose="020B0503020204020204" pitchFamily="34" charset="-122"/>
+                  <a:ea typeface="微软雅黑" panose="020B0503020204020204" pitchFamily="34" charset="-122"/>
+                  <a:cs typeface="Alibaba PuHuiTi 3.0 55 Regular"/>
+                </a:rPr>
+                <a:t>高准确度混合验证场景</a:t>
+              </a:r>
+              <a:endParaRPr lang="en-US" sz="1600" b="1" i="0" strike="noStrike">
+                <a:solidFill>
+                  <a:srgbClr val="0A1F3D">
+                    <a:alpha val="100000"/>
+                  </a:srgbClr>
+                </a:solidFill>
+                <a:latin typeface="微软雅黑" panose="020B0503020204020204" pitchFamily="34" charset="-122"/>
+                <a:ea typeface="微软雅黑" panose="020B0503020204020204" pitchFamily="34" charset="-122"/>
+                <a:cs typeface="Alibaba PuHuiTi 3.0 55 Regular"/>
+              </a:endParaRPr>
+            </a:p>
+          </p:txBody>
+        </p:sp>
+        <p:sp>
+          <p:nvSpPr>
+            <p:cNvPr id="33" name="TextBox 33"/>
+            <p:cNvSpPr txBox="1"/>
+            <p:nvPr>
+              <p:custDataLst>
+                <p:tags r:id="rId18"/>
+              </p:custDataLst>
+            </p:nvPr>
+          </p:nvSpPr>
+          <p:spPr>
+            <a:xfrm>
+              <a:off x="7154" y="6705"/>
+              <a:ext cx="4599" cy="2350"/>
+            </a:xfrm>
+            <a:prstGeom prst="rect">
+              <a:avLst/>
+            </a:prstGeom>
+            <a:ln>
+              <a:headEnd type="none"/>
+              <a:tailEnd type="none"/>
+            </a:ln>
+          </p:spPr>
+          <p:txBody>
+            <a:bodyPr vert="horz" wrap="square" lIns="0" tIns="0" rIns="0" bIns="0" rtlCol="0" anchor="t" anchorCtr="0"/>
+            <a:lstStyle/>
+            <a:p>
+              <a:pPr marL="171450" indent="-171450" algn="l">
+                <a:buFont typeface="Wingdings" panose="05000000000000000000" charset="0"/>
+                <a:buChar char="Ø"/>
+                <a:defRPr/>
+              </a:pPr>
+              <a:r>
+                <a:rPr lang="en-US" sz="1400" b="0" i="0" strike="noStrike">
+                  <a:solidFill>
+                    <a:srgbClr val="0A1F3D">
+                      <a:alpha val="85098"/>
+                    </a:srgbClr>
+                  </a:solidFill>
+                  <a:latin typeface="微软雅黑" panose="020B0503020204020204" pitchFamily="34" charset="-122"/>
+                  <a:ea typeface="微软雅黑" panose="020B0503020204020204" pitchFamily="34" charset="-122"/>
+                  <a:cs typeface="FZYaYiHei GB18030L2 R" panose="02000500000000000000" charset="-122"/>
+                </a:rPr>
+                <a:t>将精确本体直接导入大模型，由大模型生成初步</a:t>
+              </a:r>
+              <a:r>
+                <a:rPr sz="1400" b="0" i="0" strike="noStrike">
+                  <a:solidFill>
+                    <a:srgbClr val="0A1F3D">
+                      <a:alpha val="85098"/>
+                    </a:srgbClr>
+                  </a:solidFill>
+                  <a:latin typeface="微软雅黑" panose="020B0503020204020204" pitchFamily="34" charset="-122"/>
+                  <a:ea typeface="微软雅黑" panose="020B0503020204020204" pitchFamily="34" charset="-122"/>
+                  <a:cs typeface="FZYaYiHei GB18030L2 R" panose="02000500000000000000" charset="-122"/>
+                </a:rPr>
+                <a:t>结果后交由本体系统验证合法性，不合法则触发重新生成。</a:t>
+              </a:r>
+              <a:endParaRPr sz="1400" b="0" i="0" strike="noStrike">
+                <a:solidFill>
+                  <a:srgbClr val="0A1F3D">
+                    <a:alpha val="85098"/>
+                  </a:srgbClr>
+                </a:solidFill>
+                <a:latin typeface="微软雅黑" panose="020B0503020204020204" pitchFamily="34" charset="-122"/>
+                <a:ea typeface="微软雅黑" panose="020B0503020204020204" pitchFamily="34" charset="-122"/>
+                <a:cs typeface="FZYaYiHei GB18030L2 R" panose="02000500000000000000" charset="-122"/>
+              </a:endParaRPr>
+            </a:p>
+            <a:p>
+              <a:pPr marL="171450" indent="-171450" algn="l">
+                <a:buFont typeface="Wingdings" panose="05000000000000000000" charset="0"/>
+                <a:buChar char="Ø"/>
+                <a:defRPr/>
+              </a:pPr>
+              <a:endParaRPr sz="1400" b="0" i="0" strike="noStrike">
+                <a:solidFill>
+                  <a:srgbClr val="0A1F3D">
+                    <a:alpha val="85098"/>
+                  </a:srgbClr>
+                </a:solidFill>
+                <a:latin typeface="微软雅黑" panose="020B0503020204020204" pitchFamily="34" charset="-122"/>
+                <a:ea typeface="微软雅黑" panose="020B0503020204020204" pitchFamily="34" charset="-122"/>
+                <a:cs typeface="FZYaYiHei GB18030L2 R" panose="02000500000000000000" charset="-122"/>
+              </a:endParaRPr>
+            </a:p>
+            <a:p>
+              <a:pPr marL="171450" indent="-171450" algn="l">
+                <a:buFont typeface="Wingdings" panose="05000000000000000000" charset="0"/>
+                <a:buChar char="Ø"/>
+                <a:defRPr/>
+              </a:pPr>
+              <a:r>
+                <a:rPr lang="en-US" sz="1400">
+                  <a:solidFill>
+                    <a:srgbClr val="0A1F3D">
+                      <a:alpha val="85098"/>
+                    </a:srgbClr>
+                  </a:solidFill>
+                  <a:latin typeface="微软雅黑" panose="020B0503020204020204" pitchFamily="34" charset="-122"/>
+                  <a:ea typeface="微软雅黑" panose="020B0503020204020204" pitchFamily="34" charset="-122"/>
+                  <a:cs typeface="微软雅黑" panose="020B0503020204020204" pitchFamily="34" charset="-122"/>
+                  <a:sym typeface="+mn-ea"/>
+                </a:rPr>
+                <a:t>准确度要求大于90%时采用此模式，兼顾大模型</a:t>
+              </a:r>
+              <a:r>
+                <a:rPr sz="1400">
+                  <a:solidFill>
+                    <a:srgbClr val="0A1F3D">
+                      <a:alpha val="85098"/>
+                    </a:srgbClr>
+                  </a:solidFill>
+                  <a:latin typeface="微软雅黑" panose="020B0503020204020204" pitchFamily="34" charset="-122"/>
+                  <a:ea typeface="微软雅黑" panose="020B0503020204020204" pitchFamily="34" charset="-122"/>
+                  <a:cs typeface="微软雅黑" panose="020B0503020204020204" pitchFamily="34" charset="-122"/>
+                  <a:sym typeface="+mn-ea"/>
+                </a:rPr>
+                <a:t>的灵活性与本体的严格校验，形成生成-验证闭环。</a:t>
+              </a:r>
+              <a:endParaRPr sz="1400" b="0" i="0" strike="noStrike">
+                <a:solidFill>
+                  <a:srgbClr val="0A1F3D">
+                    <a:alpha val="85098"/>
+                  </a:srgbClr>
+                </a:solidFill>
+                <a:latin typeface="微软雅黑" panose="020B0503020204020204" pitchFamily="34" charset="-122"/>
+                <a:ea typeface="微软雅黑" panose="020B0503020204020204" pitchFamily="34" charset="-122"/>
+                <a:cs typeface="微软雅黑" panose="020B0503020204020204" pitchFamily="34" charset="-122"/>
+              </a:endParaRPr>
+            </a:p>
+            <a:p>
+              <a:pPr algn="l">
+                <a:defRPr/>
+              </a:pPr>
+              <a:endParaRPr sz="1400" b="0" i="0" strike="noStrike">
+                <a:solidFill>
+                  <a:srgbClr val="0A1F3D">
+                    <a:alpha val="85098"/>
+                  </a:srgbClr>
+                </a:solidFill>
+                <a:latin typeface="微软雅黑" panose="020B0503020204020204" pitchFamily="34" charset="-122"/>
+                <a:ea typeface="微软雅黑" panose="020B0503020204020204" pitchFamily="34" charset="-122"/>
+                <a:cs typeface="微软雅黑" panose="020B0503020204020204" pitchFamily="34" charset="-122"/>
+              </a:endParaRPr>
+            </a:p>
+          </p:txBody>
+        </p:sp>
+        <p:sp>
+          <p:nvSpPr>
+            <p:cNvPr id="36" name="AutoShape 36"/>
+            <p:cNvSpPr/>
+            <p:nvPr>
+              <p:custDataLst>
+                <p:tags r:id="rId19"/>
+              </p:custDataLst>
+            </p:nvPr>
+          </p:nvSpPr>
+          <p:spPr>
+            <a:xfrm>
+              <a:off x="12677" y="4171"/>
+              <a:ext cx="5558" cy="6209"/>
+            </a:xfrm>
+            <a:prstGeom prst="roundRect">
+              <a:avLst>
+                <a:gd name="adj" fmla="val 1258"/>
+              </a:avLst>
+            </a:prstGeom>
+            <a:solidFill>
+              <a:srgbClr val="FFFFFF">
+                <a:alpha val="100000"/>
+              </a:srgbClr>
+            </a:solidFill>
+            <a:ln w="9525">
+              <a:solidFill>
+                <a:srgbClr val="E2E6EA">
+                  <a:alpha val="100000"/>
+                </a:srgbClr>
+              </a:solidFill>
+              <a:prstDash val="solid"/>
+              <a:headEnd type="none"/>
+              <a:tailEnd type="none"/>
+            </a:ln>
+          </p:spPr>
+        </p:sp>
+        <p:sp>
+          <p:nvSpPr>
+            <p:cNvPr id="37" name="AutoShape 37"/>
+            <p:cNvSpPr/>
+            <p:nvPr>
+              <p:custDataLst>
+                <p:tags r:id="rId20"/>
+              </p:custDataLst>
+            </p:nvPr>
+          </p:nvSpPr>
+          <p:spPr>
+            <a:xfrm>
+              <a:off x="13052" y="4186"/>
+              <a:ext cx="4814" cy="60"/>
+            </a:xfrm>
+            <a:prstGeom prst="rect">
+              <a:avLst/>
+            </a:prstGeom>
+            <a:solidFill>
+              <a:srgbClr val="C00000"/>
+            </a:solidFill>
+            <a:ln>
+              <a:headEnd type="none"/>
+              <a:tailEnd type="none"/>
+            </a:ln>
+          </p:spPr>
+        </p:sp>
+        <p:sp>
+          <p:nvSpPr>
+            <p:cNvPr id="38" name="AutoShape 38"/>
+            <p:cNvSpPr/>
+            <p:nvPr>
+              <p:custDataLst>
+                <p:tags r:id="rId21"/>
+              </p:custDataLst>
+            </p:nvPr>
+          </p:nvSpPr>
+          <p:spPr>
+            <a:xfrm>
+              <a:off x="13052" y="4875"/>
+              <a:ext cx="780" cy="780"/>
+            </a:xfrm>
+            <a:prstGeom prst="ellipse">
+              <a:avLst/>
+            </a:prstGeom>
+            <a:solidFill>
+              <a:srgbClr val="C00000"/>
+            </a:solidFill>
+            <a:ln>
+              <a:headEnd type="none"/>
+              <a:tailEnd type="none"/>
+            </a:ln>
+          </p:spPr>
+        </p:sp>
+        <p:sp>
+          <p:nvSpPr>
+            <p:cNvPr id="39" name="AutoShape 39"/>
+            <p:cNvSpPr/>
+            <p:nvPr>
+              <p:custDataLst>
+                <p:tags r:id="rId22"/>
+              </p:custDataLst>
+            </p:nvPr>
+          </p:nvSpPr>
+          <p:spPr>
+            <a:xfrm>
+              <a:off x="13277" y="5731"/>
+              <a:ext cx="330" cy="330"/>
+            </a:xfrm>
+            <a:custGeom>
+              <a:avLst/>
+              <a:gdLst/>
+              <a:ahLst/>
+              <a:cxnLst/>
+              <a:rect l="l" t="t" r="r" b="b"/>
+              <a:pathLst>
+                <a:path w="9998" h="10000">
+                  <a:moveTo>
+                    <a:pt x="3031" y="7559"/>
+                  </a:moveTo>
+                  <a:lnTo>
+                    <a:pt x="2421" y="6949"/>
+                  </a:lnTo>
+                  <a:lnTo>
+                    <a:pt x="3031" y="7559"/>
+                  </a:lnTo>
+                  <a:lnTo>
+                    <a:pt x="2421" y="6949"/>
+                  </a:lnTo>
+                  <a:cubicBezTo>
+                    <a:pt x="2250" y="6765"/>
+                    <a:pt x="2197" y="6555"/>
+                    <a:pt x="2263" y="6319"/>
+                  </a:cubicBezTo>
+                  <a:cubicBezTo>
+                    <a:pt x="2329" y="6135"/>
+                    <a:pt x="2407" y="5912"/>
+                    <a:pt x="2499" y="5650"/>
+                  </a:cubicBezTo>
+                  <a:lnTo>
+                    <a:pt x="413" y="5650"/>
+                  </a:lnTo>
+                  <a:cubicBezTo>
+                    <a:pt x="229" y="5650"/>
+                    <a:pt x="92" y="5571"/>
+                    <a:pt x="0" y="5413"/>
+                  </a:cubicBezTo>
+                  <a:cubicBezTo>
+                    <a:pt x="-78" y="5255"/>
+                    <a:pt x="-78" y="5098"/>
+                    <a:pt x="0" y="4941"/>
+                  </a:cubicBezTo>
+                  <a:lnTo>
+                    <a:pt x="1043" y="3189"/>
+                  </a:lnTo>
+                  <a:cubicBezTo>
+                    <a:pt x="1318" y="2743"/>
+                    <a:pt x="1725" y="2513"/>
+                    <a:pt x="2263" y="2500"/>
+                  </a:cubicBezTo>
+                  <a:lnTo>
+                    <a:pt x="3877" y="2500"/>
+                  </a:lnTo>
+                  <a:cubicBezTo>
+                    <a:pt x="3929" y="2421"/>
+                    <a:pt x="3975" y="2349"/>
+                    <a:pt x="4015" y="2283"/>
+                  </a:cubicBezTo>
+                  <a:cubicBezTo>
+                    <a:pt x="4566" y="1495"/>
+                    <a:pt x="5170" y="931"/>
+                    <a:pt x="5826" y="591"/>
+                  </a:cubicBezTo>
+                  <a:cubicBezTo>
+                    <a:pt x="6482" y="249"/>
+                    <a:pt x="7131" y="52"/>
+                    <a:pt x="7774" y="0"/>
+                  </a:cubicBezTo>
+                  <a:cubicBezTo>
+                    <a:pt x="8416" y="-39"/>
+                    <a:pt x="8981" y="-13"/>
+                    <a:pt x="9467" y="79"/>
+                  </a:cubicBezTo>
+                  <a:cubicBezTo>
+                    <a:pt x="9703" y="144"/>
+                    <a:pt x="9853" y="295"/>
+                    <a:pt x="9919" y="531"/>
+                  </a:cubicBezTo>
+                  <a:cubicBezTo>
+                    <a:pt x="10011" y="1017"/>
+                    <a:pt x="10037" y="1581"/>
+                    <a:pt x="9998" y="2224"/>
+                  </a:cubicBezTo>
+                  <a:cubicBezTo>
+                    <a:pt x="9945" y="2867"/>
+                    <a:pt x="9748" y="3517"/>
+                    <a:pt x="9408" y="4173"/>
+                  </a:cubicBezTo>
+                  <a:cubicBezTo>
+                    <a:pt x="9066" y="4829"/>
+                    <a:pt x="8502" y="5432"/>
+                    <a:pt x="7715" y="5984"/>
+                  </a:cubicBezTo>
+                  <a:cubicBezTo>
+                    <a:pt x="7649" y="6023"/>
+                    <a:pt x="7577" y="6069"/>
+                    <a:pt x="7499" y="6122"/>
+                  </a:cubicBezTo>
+                  <a:lnTo>
+                    <a:pt x="7499" y="7736"/>
+                  </a:lnTo>
+                  <a:cubicBezTo>
+                    <a:pt x="7485" y="8274"/>
+                    <a:pt x="7256" y="8681"/>
+                    <a:pt x="6810" y="8957"/>
+                  </a:cubicBezTo>
+                  <a:lnTo>
+                    <a:pt x="5058" y="10000"/>
+                  </a:lnTo>
+                  <a:cubicBezTo>
+                    <a:pt x="4900" y="10078"/>
+                    <a:pt x="4743" y="10078"/>
+                    <a:pt x="4586" y="10000"/>
+                  </a:cubicBezTo>
+                  <a:cubicBezTo>
+                    <a:pt x="4428" y="9908"/>
+                    <a:pt x="4350" y="9770"/>
+                    <a:pt x="4350" y="9587"/>
+                  </a:cubicBezTo>
+                  <a:lnTo>
+                    <a:pt x="4350" y="7480"/>
+                  </a:lnTo>
+                  <a:cubicBezTo>
+                    <a:pt x="4074" y="7572"/>
+                    <a:pt x="3837" y="7651"/>
+                    <a:pt x="3641" y="7717"/>
+                  </a:cubicBezTo>
+                  <a:cubicBezTo>
+                    <a:pt x="3405" y="7782"/>
+                    <a:pt x="3201" y="7729"/>
+                    <a:pt x="3031" y="7559"/>
+                  </a:cubicBezTo>
+                  <a:moveTo>
+                    <a:pt x="7499" y="3287"/>
+                  </a:moveTo>
+                  <a:cubicBezTo>
+                    <a:pt x="7800" y="3274"/>
+                    <a:pt x="8029" y="3143"/>
+                    <a:pt x="8187" y="2894"/>
+                  </a:cubicBezTo>
+                  <a:cubicBezTo>
+                    <a:pt x="8318" y="2631"/>
+                    <a:pt x="8318" y="2368"/>
+                    <a:pt x="8187" y="2106"/>
+                  </a:cubicBezTo>
+                  <a:cubicBezTo>
+                    <a:pt x="8029" y="1856"/>
+                    <a:pt x="7800" y="1725"/>
+                    <a:pt x="7499" y="1713"/>
+                  </a:cubicBezTo>
+                  <a:cubicBezTo>
+                    <a:pt x="7197" y="1725"/>
+                    <a:pt x="6967" y="1856"/>
+                    <a:pt x="6810" y="2106"/>
+                  </a:cubicBezTo>
+                  <a:cubicBezTo>
+                    <a:pt x="6678" y="2368"/>
+                    <a:pt x="6678" y="2631"/>
+                    <a:pt x="6810" y="2894"/>
+                  </a:cubicBezTo>
+                  <a:cubicBezTo>
+                    <a:pt x="6967" y="3143"/>
+                    <a:pt x="7197" y="3274"/>
+                    <a:pt x="7499" y="3287"/>
+                  </a:cubicBezTo>
+                </a:path>
+              </a:pathLst>
+            </a:custGeom>
+            <a:solidFill>
+              <a:srgbClr val="FFFFFF">
+                <a:alpha val="100000"/>
+              </a:srgbClr>
+            </a:solidFill>
+            <a:ln>
+              <a:headEnd type="none"/>
+              <a:tailEnd type="none"/>
+            </a:ln>
+          </p:spPr>
+        </p:sp>
+        <p:sp>
+          <p:nvSpPr>
+            <p:cNvPr id="40" name="TextBox 40"/>
+            <p:cNvSpPr txBox="1"/>
+            <p:nvPr>
+              <p:custDataLst>
+                <p:tags r:id="rId23"/>
+              </p:custDataLst>
+            </p:nvPr>
+          </p:nvSpPr>
+          <p:spPr>
+            <a:xfrm>
+              <a:off x="14011" y="4695"/>
+              <a:ext cx="1113" cy="450"/>
+            </a:xfrm>
+            <a:prstGeom prst="rect">
+              <a:avLst/>
+            </a:prstGeom>
+            <a:ln>
+              <a:headEnd type="none"/>
+              <a:tailEnd type="none"/>
+            </a:ln>
+          </p:spPr>
+          <p:txBody>
+            <a:bodyPr vert="horz" wrap="none" lIns="0" tIns="0" rIns="0" bIns="0" rtlCol="0" anchor="t" anchorCtr="0"/>
+            <a:lstStyle/>
+            <a:p>
+              <a:pPr algn="l">
+                <a:defRPr/>
+              </a:pPr>
+              <a:r>
+                <a:rPr lang="en-US" sz="2000" b="1" i="0" strike="noStrike">
+                  <a:solidFill>
+                    <a:srgbClr val="C00000">
+                      <a:alpha val="100000"/>
+                    </a:srgbClr>
+                  </a:solidFill>
+                  <a:latin typeface="微软雅黑" panose="020B0503020204020204" pitchFamily="34" charset="-122"/>
+                  <a:ea typeface="微软雅黑" panose="020B0503020204020204" pitchFamily="34" charset="-122"/>
+                  <a:cs typeface="Inter" panose="02000503000000020004"/>
+                </a:rPr>
+                <a:t>~90%</a:t>
+              </a:r>
+              <a:endParaRPr lang="en-US" sz="2000" b="1" i="0" strike="noStrike">
+                <a:solidFill>
+                  <a:srgbClr val="C00000">
+                    <a:alpha val="100000"/>
+                  </a:srgbClr>
+                </a:solidFill>
+                <a:latin typeface="微软雅黑" panose="020B0503020204020204" pitchFamily="34" charset="-122"/>
+                <a:ea typeface="微软雅黑" panose="020B0503020204020204" pitchFamily="34" charset="-122"/>
+                <a:cs typeface="Inter" panose="02000503000000020004"/>
+              </a:endParaRPr>
+            </a:p>
+          </p:txBody>
+        </p:sp>
+        <p:sp>
+          <p:nvSpPr>
+            <p:cNvPr id="41" name="TextBox 41"/>
+            <p:cNvSpPr txBox="1"/>
+            <p:nvPr>
+              <p:custDataLst>
+                <p:tags r:id="rId24"/>
+              </p:custDataLst>
+            </p:nvPr>
+          </p:nvSpPr>
+          <p:spPr>
+            <a:xfrm>
+              <a:off x="14011" y="5248"/>
+              <a:ext cx="1008" cy="180"/>
+            </a:xfrm>
+            <a:prstGeom prst="rect">
+              <a:avLst/>
+            </a:prstGeom>
+            <a:ln>
+              <a:headEnd type="none"/>
+              <a:tailEnd type="none"/>
+            </a:ln>
+          </p:spPr>
+          <p:txBody>
+            <a:bodyPr vert="horz" wrap="none" lIns="0" tIns="0" rIns="0" bIns="0" rtlCol="0" anchor="t" anchorCtr="0"/>
+            <a:lstStyle/>
+            <a:p>
+              <a:pPr algn="l">
+                <a:defRPr/>
+              </a:pPr>
+              <a:r>
+                <a:rPr lang="en-US" sz="1000" b="1" i="0" strike="noStrike">
+                  <a:solidFill>
+                    <a:srgbClr val="C00000">
+                      <a:alpha val="50196"/>
+                    </a:srgbClr>
+                  </a:solidFill>
+                  <a:latin typeface="微软雅黑" panose="020B0503020204020204" pitchFamily="34" charset="-122"/>
+                  <a:ea typeface="微软雅黑" panose="020B0503020204020204" pitchFamily="34" charset="-122"/>
+                  <a:cs typeface="FZYaYiHei GB18030L2 R" panose="02000500000000000000" charset="-122"/>
+                </a:rPr>
+                <a:t>快速探索</a:t>
+              </a:r>
+              <a:endParaRPr lang="en-US" sz="1000" b="1" i="0" strike="noStrike">
+                <a:solidFill>
+                  <a:srgbClr val="C00000">
+                    <a:alpha val="50196"/>
+                  </a:srgbClr>
+                </a:solidFill>
+                <a:latin typeface="微软雅黑" panose="020B0503020204020204" pitchFamily="34" charset="-122"/>
+                <a:ea typeface="微软雅黑" panose="020B0503020204020204" pitchFamily="34" charset="-122"/>
+                <a:cs typeface="FZYaYiHei GB18030L2 R" panose="02000500000000000000" charset="-122"/>
+              </a:endParaRPr>
+            </a:p>
+          </p:txBody>
+        </p:sp>
+        <p:sp>
+          <p:nvSpPr>
+            <p:cNvPr id="42" name="TextBox 42"/>
+            <p:cNvSpPr txBox="1"/>
+            <p:nvPr>
+              <p:custDataLst>
+                <p:tags r:id="rId25"/>
+              </p:custDataLst>
+            </p:nvPr>
+          </p:nvSpPr>
+          <p:spPr>
+            <a:xfrm>
+              <a:off x="13070" y="6060"/>
+              <a:ext cx="4809" cy="330"/>
+            </a:xfrm>
+            <a:prstGeom prst="rect">
+              <a:avLst/>
+            </a:prstGeom>
+            <a:ln>
+              <a:headEnd type="none"/>
+              <a:tailEnd type="none"/>
+            </a:ln>
+          </p:spPr>
+          <p:txBody>
+            <a:bodyPr vert="horz" wrap="none" lIns="0" tIns="0" rIns="0" bIns="0" rtlCol="0" anchor="t" anchorCtr="0"/>
+            <a:lstStyle/>
+            <a:p>
+              <a:pPr algn="l">
+                <a:defRPr/>
+              </a:pPr>
+              <a:r>
+                <a:rPr lang="en-US" sz="1600" b="1" i="0" strike="noStrike">
+                  <a:solidFill>
+                    <a:srgbClr val="0A1F3D">
+                      <a:alpha val="100000"/>
+                    </a:srgbClr>
+                  </a:solidFill>
+                  <a:latin typeface="微软雅黑" panose="020B0503020204020204" pitchFamily="34" charset="-122"/>
+                  <a:ea typeface="微软雅黑" panose="020B0503020204020204" pitchFamily="34" charset="-122"/>
+                  <a:cs typeface="Alibaba PuHuiTi 3.0 55 Regular"/>
+                </a:rPr>
+                <a:t>低要求快速探索场景</a:t>
+              </a:r>
+              <a:endParaRPr lang="en-US" sz="1600" b="1" i="0" strike="noStrike">
+                <a:solidFill>
+                  <a:srgbClr val="0A1F3D">
+                    <a:alpha val="100000"/>
+                  </a:srgbClr>
+                </a:solidFill>
+                <a:latin typeface="微软雅黑" panose="020B0503020204020204" pitchFamily="34" charset="-122"/>
+                <a:ea typeface="微软雅黑" panose="020B0503020204020204" pitchFamily="34" charset="-122"/>
+                <a:cs typeface="Alibaba PuHuiTi 3.0 55 Regular"/>
+              </a:endParaRPr>
+            </a:p>
+          </p:txBody>
+        </p:sp>
+        <p:sp>
+          <p:nvSpPr>
+            <p:cNvPr id="44" name="TextBox 44"/>
+            <p:cNvSpPr txBox="1"/>
+            <p:nvPr>
+              <p:custDataLst>
+                <p:tags r:id="rId26"/>
+              </p:custDataLst>
+            </p:nvPr>
+          </p:nvSpPr>
+          <p:spPr>
+            <a:xfrm>
+              <a:off x="13023" y="6705"/>
+              <a:ext cx="4599" cy="2817"/>
+            </a:xfrm>
+            <a:prstGeom prst="rect">
+              <a:avLst/>
+            </a:prstGeom>
+            <a:ln>
+              <a:headEnd type="none"/>
+              <a:tailEnd type="none"/>
+            </a:ln>
+          </p:spPr>
+          <p:txBody>
+            <a:bodyPr vert="horz" wrap="square" lIns="0" tIns="0" rIns="0" bIns="0" rtlCol="0" anchor="t" anchorCtr="0"/>
+            <a:lstStyle/>
+            <a:p>
+              <a:pPr marL="285750" indent="-285750" algn="l">
+                <a:buFont typeface="Wingdings" panose="05000000000000000000" charset="0"/>
+                <a:buChar char="Ø"/>
+                <a:defRPr/>
+              </a:pPr>
+              <a:r>
+                <a:rPr lang="en-US" sz="1400" b="0" i="0" strike="noStrike">
+                  <a:solidFill>
+                    <a:srgbClr val="0A1F3D">
+                      <a:alpha val="85098"/>
+                    </a:srgbClr>
+                  </a:solidFill>
+                  <a:latin typeface="微软雅黑" panose="020B0503020204020204" pitchFamily="34" charset="-122"/>
+                  <a:ea typeface="微软雅黑" panose="020B0503020204020204" pitchFamily="34" charset="-122"/>
+                  <a:cs typeface="FZYaYiHei GB18030L2 R" panose="02000500000000000000" charset="-122"/>
+                </a:rPr>
+                <a:t>利用本体打造基础版本导入大模型，由大模型完</a:t>
+              </a:r>
+              <a:r>
+                <a:rPr sz="1400" b="0" i="0" strike="noStrike">
+                  <a:solidFill>
+                    <a:srgbClr val="0A1F3D">
+                      <a:alpha val="85098"/>
+                    </a:srgbClr>
+                  </a:solidFill>
+                  <a:latin typeface="微软雅黑" panose="020B0503020204020204" pitchFamily="34" charset="-122"/>
+                  <a:ea typeface="微软雅黑" panose="020B0503020204020204" pitchFamily="34" charset="-122"/>
+                  <a:cs typeface="FZYaYiHei GB18030L2 R" panose="02000500000000000000" charset="-122"/>
+                </a:rPr>
+                <a:t>成主要推理任务，本体框架仅做合理性检查而非精确验证。</a:t>
+              </a:r>
+              <a:endParaRPr sz="1400" b="0" i="0" strike="noStrike">
+                <a:solidFill>
+                  <a:srgbClr val="0A1F3D">
+                    <a:alpha val="85098"/>
+                  </a:srgbClr>
+                </a:solidFill>
+                <a:latin typeface="微软雅黑" panose="020B0503020204020204" pitchFamily="34" charset="-122"/>
+                <a:ea typeface="微软雅黑" panose="020B0503020204020204" pitchFamily="34" charset="-122"/>
+                <a:cs typeface="FZYaYiHei GB18030L2 R" panose="02000500000000000000" charset="-122"/>
+              </a:endParaRPr>
+            </a:p>
+            <a:p>
+              <a:pPr marL="285750" indent="-285750" algn="l">
+                <a:buFont typeface="Wingdings" panose="05000000000000000000" charset="0"/>
+                <a:buChar char="Ø"/>
+                <a:defRPr/>
+              </a:pPr>
+              <a:endParaRPr sz="1400" b="0" i="0" strike="noStrike">
+                <a:solidFill>
+                  <a:srgbClr val="0A1F3D">
+                    <a:alpha val="85098"/>
+                  </a:srgbClr>
+                </a:solidFill>
+                <a:latin typeface="微软雅黑" panose="020B0503020204020204" pitchFamily="34" charset="-122"/>
+                <a:ea typeface="微软雅黑" panose="020B0503020204020204" pitchFamily="34" charset="-122"/>
+                <a:cs typeface="FZYaYiHei GB18030L2 R" panose="02000500000000000000" charset="-122"/>
+              </a:endParaRPr>
+            </a:p>
+            <a:p>
+              <a:pPr marL="285750" indent="-285750" algn="l">
+                <a:buFont typeface="Wingdings" panose="05000000000000000000" charset="0"/>
+                <a:buChar char="Ø"/>
+                <a:defRPr/>
+              </a:pPr>
+              <a:r>
+                <a:rPr lang="en-US" sz="1400">
+                  <a:solidFill>
+                    <a:srgbClr val="0A1F3D">
+                      <a:alpha val="85098"/>
+                    </a:srgbClr>
+                  </a:solidFill>
+                  <a:latin typeface="微软雅黑" panose="020B0503020204020204" pitchFamily="34" charset="-122"/>
+                  <a:ea typeface="微软雅黑" panose="020B0503020204020204" pitchFamily="34" charset="-122"/>
+                  <a:cs typeface="FZYaYiHei GB18030L2 R" panose="02000500000000000000" charset="-122"/>
+                  <a:sym typeface="+mn-ea"/>
+                </a:rPr>
+                <a:t>适用于创意生成、内部探索、原型验证等容忍度</a:t>
+              </a:r>
+              <a:r>
+                <a:rPr sz="1400">
+                  <a:solidFill>
+                    <a:srgbClr val="0A1F3D">
+                      <a:alpha val="85098"/>
+                    </a:srgbClr>
+                  </a:solidFill>
+                  <a:latin typeface="微软雅黑" panose="020B0503020204020204" pitchFamily="34" charset="-122"/>
+                  <a:ea typeface="微软雅黑" panose="020B0503020204020204" pitchFamily="34" charset="-122"/>
+                  <a:cs typeface="FZYaYiHei GB18030L2 R" panose="02000500000000000000" charset="-122"/>
+                  <a:sym typeface="+mn-ea"/>
+                </a:rPr>
+                <a:t>较高的场景，以最低成本获得可用结果。</a:t>
+              </a:r>
+              <a:endParaRPr sz="1400" b="0" i="0" strike="noStrike">
+                <a:solidFill>
+                  <a:srgbClr val="0A1F3D">
+                    <a:alpha val="85098"/>
+                  </a:srgbClr>
+                </a:solidFill>
+                <a:latin typeface="微软雅黑" panose="020B0503020204020204" pitchFamily="34" charset="-122"/>
+                <a:ea typeface="微软雅黑" panose="020B0503020204020204" pitchFamily="34" charset="-122"/>
+                <a:cs typeface="FZYaYiHei GB18030L2 R" panose="02000500000000000000" charset="-122"/>
+              </a:endParaRPr>
+            </a:p>
+            <a:p>
+              <a:pPr algn="l">
+                <a:defRPr/>
+              </a:pPr>
+              <a:endParaRPr sz="1400" b="0" i="0" strike="noStrike">
+                <a:solidFill>
+                  <a:srgbClr val="0A1F3D">
+                    <a:alpha val="85098"/>
+                  </a:srgbClr>
+                </a:solidFill>
+                <a:latin typeface="微软雅黑" panose="020B0503020204020204" pitchFamily="34" charset="-122"/>
+                <a:ea typeface="微软雅黑" panose="020B0503020204020204" pitchFamily="34" charset="-122"/>
+                <a:cs typeface="FZYaYiHei GB18030L2 R" panose="02000500000000000000" charset="-122"/>
+              </a:endParaRPr>
+            </a:p>
+          </p:txBody>
+        </p:sp>
+        <p:sp>
+          <p:nvSpPr>
+            <p:cNvPr id="13" name="TextBox 13"/>
+            <p:cNvSpPr txBox="1"/>
+            <p:nvPr/>
+          </p:nvSpPr>
+          <p:spPr>
+            <a:xfrm>
+              <a:off x="1275" y="2941"/>
+              <a:ext cx="16680" cy="604"/>
+            </a:xfrm>
+            <a:prstGeom prst="rect">
+              <a:avLst/>
+            </a:prstGeom>
+            <a:ln>
+              <a:headEnd type="none"/>
+              <a:tailEnd type="none"/>
+            </a:ln>
+          </p:spPr>
+          <p:txBody>
+            <a:bodyPr vert="horz" wrap="square" lIns="0" tIns="0" rIns="0" bIns="0" rtlCol="0" anchor="t" anchorCtr="0"/>
+            <a:lstStyle/>
+            <a:p>
+              <a:pPr algn="l">
+                <a:defRPr/>
+              </a:pPr>
+              <a:r>
+                <a:rPr lang="en-US" sz="1600" b="0" i="1" strike="noStrike">
+                  <a:solidFill>
+                    <a:srgbClr val="0A1F3D">
+                      <a:alpha val="81960"/>
+                    </a:srgbClr>
+                  </a:solidFill>
+                  <a:latin typeface="微软雅黑" panose="020B0503020204020204" pitchFamily="34" charset="-122"/>
+                  <a:ea typeface="微软雅黑" panose="020B0503020204020204" pitchFamily="34" charset="-122"/>
+                  <a:cs typeface="微软雅黑" panose="020B0503020204020204" pitchFamily="34" charset="-122"/>
+                </a:rPr>
+                <a:t>根据业务准确度要求分为三档：</a:t>
+              </a:r>
+              <a:r>
+                <a:rPr lang="zh-CN" altLang="en-US" sz="1600" b="0" i="1" strike="noStrike">
+                  <a:solidFill>
+                    <a:srgbClr val="0A1F3D">
+                      <a:alpha val="81960"/>
+                    </a:srgbClr>
+                  </a:solidFill>
+                  <a:latin typeface="微软雅黑" panose="020B0503020204020204" pitchFamily="34" charset="-122"/>
+                  <a:ea typeface="微软雅黑" panose="020B0503020204020204" pitchFamily="34" charset="-122"/>
+                  <a:cs typeface="微软雅黑" panose="020B0503020204020204" pitchFamily="34" charset="-122"/>
+                </a:rPr>
+                <a:t>完全可控</a:t>
+              </a:r>
+              <a:r>
+                <a:rPr lang="en-US" sz="1600" b="0" i="1" strike="noStrike">
+                  <a:solidFill>
+                    <a:srgbClr val="0A1F3D">
+                      <a:alpha val="81960"/>
+                    </a:srgbClr>
+                  </a:solidFill>
+                  <a:latin typeface="微软雅黑" panose="020B0503020204020204" pitchFamily="34" charset="-122"/>
+                  <a:ea typeface="微软雅黑" panose="020B0503020204020204" pitchFamily="34" charset="-122"/>
+                  <a:cs typeface="微软雅黑" panose="020B0503020204020204" pitchFamily="34" charset="-122"/>
+                </a:rPr>
+                <a:t>场景由本体框架独立完成推理；高准确度场景采用大模型生成加本体验证的闭环模式；低要求场景由大模型主导推理、本体仅</a:t>
+              </a:r>
+              <a:r>
+                <a:rPr sz="1600" b="0" i="1" strike="noStrike">
+                  <a:solidFill>
+                    <a:srgbClr val="0A1F3D">
+                      <a:alpha val="81960"/>
+                    </a:srgbClr>
+                  </a:solidFill>
+                  <a:latin typeface="微软雅黑" panose="020B0503020204020204" pitchFamily="34" charset="-122"/>
+                  <a:ea typeface="微软雅黑" panose="020B0503020204020204" pitchFamily="34" charset="-122"/>
+                  <a:cs typeface="微软雅黑" panose="020B0503020204020204" pitchFamily="34" charset="-122"/>
+                </a:rPr>
+                <a:t>做合理性检查。</a:t>
+              </a:r>
+              <a:endParaRPr sz="1600" b="0" i="1" strike="noStrike">
+                <a:solidFill>
+                  <a:srgbClr val="0A1F3D">
+                    <a:alpha val="81960"/>
+                  </a:srgbClr>
+                </a:solidFill>
+                <a:latin typeface="微软雅黑" panose="020B0503020204020204" pitchFamily="34" charset="-122"/>
+                <a:ea typeface="微软雅黑" panose="020B0503020204020204" pitchFamily="34" charset="-122"/>
+                <a:cs typeface="微软雅黑" panose="020B0503020204020204" pitchFamily="34" charset="-122"/>
+              </a:endParaRPr>
+            </a:p>
+          </p:txBody>
+        </p:sp>
+      </p:grpSp>
+    </p:spTree>
+  </p:cSld>
+  <p:clrMapOvr>
+    <a:masterClrMapping/>
+  </p:clrMapOvr>
+</p:sld>
+</file>
+
 <file path=ppt/tags/tag1.xml><?xml version="1.0" encoding="utf-8"?>
 <p:tagLst xmlns:p="http://schemas.openxmlformats.org/presentationml/2006/main">
   <p:tag name="THINKCELLSHAPEDONOTDELETE" val="thinkcellActiveDocDoNotDelete"/>
@@ -22360,19 +24214,19 @@
 
 <file path=ppt/tags/tag43.xml><?xml version="1.0" encoding="utf-8"?>
 <p:tagLst xmlns:p="http://schemas.openxmlformats.org/presentationml/2006/main">
-  <p:tag name="KSO_WM_DIAGRAM_VIRTUALLY_FRAME" val="{&quot;height&quot;:398.5494488188976,&quot;left&quot;:47.93771653543307,&quot;top&quot;:91.60409448818898,&quot;width&quot;:886.9215748031496}"/>
+  <p:tag name="KSO_WM_DIAGRAM_VIRTUALLY_FRAME" val="{&quot;height&quot;:370.0515748031496,&quot;left&quot;:59.985039370078745,&quot;top&quot;:173.64842519685038,&quot;width&quot;:839.7782677165354}"/>
 </p:tagLst>
 </file>
 
 <file path=ppt/tags/tag44.xml><?xml version="1.0" encoding="utf-8"?>
 <p:tagLst xmlns:p="http://schemas.openxmlformats.org/presentationml/2006/main">
-  <p:tag name="KSO_WM_DIAGRAM_VIRTUALLY_FRAME" val="{&quot;height&quot;:398.5494488188976,&quot;left&quot;:47.93771653543307,&quot;top&quot;:91.60409448818898,&quot;width&quot;:886.9215748031496}"/>
+  <p:tag name="KSO_WM_DIAGRAM_VIRTUALLY_FRAME" val="{&quot;height&quot;:370.0515748031496,&quot;left&quot;:59.985039370078745,&quot;top&quot;:173.64842519685038,&quot;width&quot;:839.7782677165354}"/>
 </p:tagLst>
 </file>
 
 <file path=ppt/tags/tag45.xml><?xml version="1.0" encoding="utf-8"?>
 <p:tagLst xmlns:p="http://schemas.openxmlformats.org/presentationml/2006/main">
-  <p:tag name="KSO_WM_DIAGRAM_VIRTUALLY_FRAME" val="{&quot;height&quot;:398.5494488188976,&quot;left&quot;:47.93771653543307,&quot;top&quot;:91.60409448818898,&quot;width&quot;:886.9215748031496}"/>
+  <p:tag name="KSO_WM_DIAGRAM_VIRTUALLY_FRAME" val="{&quot;height&quot;:370.0515748031496,&quot;left&quot;:59.985039370078745,&quot;top&quot;:173.64842519685038,&quot;width&quot;:839.7782677165354}"/>
 </p:tagLst>
 </file>
 
@@ -22522,13 +24376,13 @@
 
 <file path=ppt/tags/tag68.xml><?xml version="1.0" encoding="utf-8"?>
 <p:tagLst xmlns:p="http://schemas.openxmlformats.org/presentationml/2006/main">
-  <p:tag name="KSO_WM_DIAGRAM_VIRTUALLY_FRAME" val="{&quot;height&quot;:370.0515748031496,&quot;left&quot;:59.985039370078745,&quot;top&quot;:173.64842519685038,&quot;width&quot;:839.7782677165354}"/>
+  <p:tag name="KSO_WM_DIAGRAM_VIRTUALLY_FRAME" val="{&quot;height&quot;:398.5494488188976,&quot;left&quot;:47.93771653543307,&quot;top&quot;:91.60409448818898,&quot;width&quot;:886.9215748031496}"/>
 </p:tagLst>
 </file>
 
 <file path=ppt/tags/tag69.xml><?xml version="1.0" encoding="utf-8"?>
 <p:tagLst xmlns:p="http://schemas.openxmlformats.org/presentationml/2006/main">
-  <p:tag name="KSO_WM_DIAGRAM_VIRTUALLY_FRAME" val="{&quot;height&quot;:370.0515748031496,&quot;left&quot;:59.985039370078745,&quot;top&quot;:173.64842519685038,&quot;width&quot;:839.7782677165354}"/>
+  <p:tag name="KSO_WM_DIAGRAM_VIRTUALLY_FRAME" val="{&quot;height&quot;:398.5494488188976,&quot;left&quot;:47.93771653543307,&quot;top&quot;:91.60409448818898,&quot;width&quot;:886.9215748031496}"/>
 </p:tagLst>
 </file>
 
@@ -22540,7 +24394,7 @@
 
 <file path=ppt/tags/tag70.xml><?xml version="1.0" encoding="utf-8"?>
 <p:tagLst xmlns:p="http://schemas.openxmlformats.org/presentationml/2006/main">
-  <p:tag name="KSO_WM_DIAGRAM_VIRTUALLY_FRAME" val="{&quot;height&quot;:370.0515748031496,&quot;left&quot;:59.985039370078745,&quot;top&quot;:173.64842519685038,&quot;width&quot;:839.7782677165354}"/>
+  <p:tag name="KSO_WM_DIAGRAM_VIRTUALLY_FRAME" val="{&quot;height&quot;:398.5494488188976,&quot;left&quot;:47.93771653543307,&quot;top&quot;:91.60409448818898,&quot;width&quot;:886.9215748031496}"/>
 </p:tagLst>
 </file>
 
